--- a/Rehnuma_UBL_Presentation.pptx
+++ b/Rehnuma_UBL_Presentation.pptx
@@ -3107,7 +3107,7 @@
             <a:avLst/>
           </a:prstGeom>
           <a:solidFill>
-            <a:srgbClr val="10131A"/>
+            <a:srgbClr val="FFFFFF"/>
           </a:solidFill>
           <a:ln>
             <a:noFill/>
@@ -3138,176 +3138,20 @@
       </p:sp>
       <p:sp>
         <p:nvSpPr>
-          <p:cNvPr id="3" name="TextBox 2"/>
-          <p:cNvSpPr txBox="1"/>
-          <p:nvPr/>
-        </p:nvSpPr>
-        <p:spPr>
-          <a:xfrm>
-            <a:off x="685800" y="502920"/>
-            <a:ext cx="5486400" cy="365760"/>
-          </a:xfrm>
-          <a:prstGeom prst="rect">
-            <a:avLst/>
-          </a:prstGeom>
-          <a:noFill/>
-        </p:spPr>
-        <p:txBody>
-          <a:bodyPr wrap="square" lIns="0" rIns="0" tIns="0" bIns="0" anchor="t">
-            <a:spAutoFit/>
-          </a:bodyPr>
-          <a:lstStyle/>
-          <a:p>
-            <a:pPr algn="l">
-              <a:spcAft>
-                <a:spcPts val="400"/>
-              </a:spcAft>
-            </a:pPr>
-            <a:r>
-              <a:rPr sz="1100" b="1" i="0">
-                <a:solidFill>
-                  <a:srgbClr val="FFC402"/>
-                </a:solidFill>
-                <a:latin typeface="Calibri"/>
-              </a:rPr>
-              <a:t>UBL PRESENTS</a:t>
-            </a:r>
-          </a:p>
-        </p:txBody>
-      </p:sp>
-      <p:sp>
-        <p:nvSpPr>
-          <p:cNvPr id="4" name="TextBox 3"/>
-          <p:cNvSpPr txBox="1"/>
-          <p:nvPr/>
-        </p:nvSpPr>
-        <p:spPr>
-          <a:xfrm>
-            <a:off x="685800" y="868680"/>
-            <a:ext cx="6583680" cy="822960"/>
-          </a:xfrm>
-          <a:prstGeom prst="rect">
-            <a:avLst/>
-          </a:prstGeom>
-          <a:noFill/>
-        </p:spPr>
-        <p:txBody>
-          <a:bodyPr wrap="square" lIns="0" rIns="0" tIns="0" bIns="0" anchor="t">
-            <a:spAutoFit/>
-          </a:bodyPr>
-          <a:lstStyle/>
-          <a:p>
-            <a:pPr algn="l">
-              <a:spcAft>
-                <a:spcPts val="400"/>
-              </a:spcAft>
-            </a:pPr>
-            <a:r>
-              <a:rPr sz="5200" b="1" i="0">
-                <a:solidFill>
-                  <a:srgbClr val="F2E9D8"/>
-                </a:solidFill>
-                <a:latin typeface="Arial"/>
-              </a:rPr>
-              <a:t>REHNUMA</a:t>
-            </a:r>
-          </a:p>
-        </p:txBody>
-      </p:sp>
-      <p:sp>
-        <p:nvSpPr>
-          <p:cNvPr id="5" name="TextBox 4"/>
-          <p:cNvSpPr txBox="1"/>
-          <p:nvPr/>
-        </p:nvSpPr>
-        <p:spPr>
-          <a:xfrm>
-            <a:off x="685800" y="1627632"/>
-            <a:ext cx="9601200" cy="457200"/>
-          </a:xfrm>
-          <a:prstGeom prst="rect">
-            <a:avLst/>
-          </a:prstGeom>
-          <a:noFill/>
-        </p:spPr>
-        <p:txBody>
-          <a:bodyPr wrap="square" lIns="0" rIns="0" tIns="0" bIns="0" anchor="t">
-            <a:spAutoFit/>
-          </a:bodyPr>
-          <a:lstStyle/>
-          <a:p>
-            <a:pPr algn="l">
-              <a:spcAft>
-                <a:spcPts val="400"/>
-              </a:spcAft>
-            </a:pPr>
-            <a:r>
-              <a:rPr sz="1400" b="0" i="0">
-                <a:solidFill>
-                  <a:srgbClr val="A99A7C"/>
-                </a:solidFill>
-                <a:latin typeface="Calibri"/>
-              </a:rPr>
-              <a:t>An AI Learning Experience Engine · a community financial-literacy initiative</a:t>
-            </a:r>
-          </a:p>
-        </p:txBody>
-      </p:sp>
-      <p:sp>
-        <p:nvSpPr>
-          <p:cNvPr id="6" name="TextBox 5"/>
-          <p:cNvSpPr txBox="1"/>
-          <p:nvPr/>
-        </p:nvSpPr>
-        <p:spPr>
-          <a:xfrm>
-            <a:off x="685800" y="2340864"/>
-            <a:ext cx="10789920" cy="585216"/>
-          </a:xfrm>
-          <a:prstGeom prst="rect">
-            <a:avLst/>
-          </a:prstGeom>
-          <a:noFill/>
-        </p:spPr>
-        <p:txBody>
-          <a:bodyPr wrap="square" lIns="0" rIns="0" tIns="0" bIns="0" anchor="t">
-            <a:spAutoFit/>
-          </a:bodyPr>
-          <a:lstStyle/>
-          <a:p>
-            <a:pPr algn="l">
-              <a:spcAft>
-                <a:spcPts val="400"/>
-              </a:spcAft>
-            </a:pPr>
-            <a:r>
-              <a:rPr sz="3000" b="1" i="0">
-                <a:solidFill>
-                  <a:srgbClr val="FFC402"/>
-                </a:solidFill>
-                <a:latin typeface="Arial"/>
-              </a:rPr>
-              <a:t>Learning that doesn’t feel like a test</a:t>
-            </a:r>
-          </a:p>
-        </p:txBody>
-      </p:sp>
-      <p:sp>
-        <p:nvSpPr>
-          <p:cNvPr id="7" name="Rectangle 6"/>
+          <p:cNvPr id="3" name="Oval 2"/>
           <p:cNvSpPr/>
           <p:nvPr/>
         </p:nvSpPr>
         <p:spPr>
           <a:xfrm>
-            <a:off x="685800" y="3154680"/>
-            <a:ext cx="4983480" cy="1874519"/>
-          </a:xfrm>
-          <a:prstGeom prst="rect">
+            <a:off x="10323576" y="2144268"/>
+            <a:ext cx="1472184" cy="1472184"/>
+          </a:xfrm>
+          <a:prstGeom prst="ellipse">
             <a:avLst/>
           </a:prstGeom>
           <a:solidFill>
-            <a:srgbClr val="1A202B"/>
+            <a:srgbClr val="F4F7FA"/>
           </a:solidFill>
           <a:ln>
             <a:noFill/>
@@ -3338,91 +3182,20 @@
       </p:sp>
       <p:sp>
         <p:nvSpPr>
-          <p:cNvPr id="8" name="TextBox 7"/>
-          <p:cNvSpPr txBox="1"/>
-          <p:nvPr/>
-        </p:nvSpPr>
-        <p:spPr>
-          <a:xfrm>
-            <a:off x="960120" y="3364992"/>
-            <a:ext cx="4434840" cy="1554480"/>
-          </a:xfrm>
-          <a:prstGeom prst="rect">
-            <a:avLst/>
-          </a:prstGeom>
-          <a:noFill/>
-        </p:spPr>
-        <p:txBody>
-          <a:bodyPr wrap="square" lIns="0" rIns="0" tIns="0" bIns="0" anchor="t">
-            <a:spAutoFit/>
-          </a:bodyPr>
-          <a:lstStyle/>
-          <a:p>
-            <a:pPr algn="l">
-              <a:spcAft>
-                <a:spcPts val="800"/>
-              </a:spcAft>
-            </a:pPr>
-            <a:r>
-              <a:rPr sz="1100" b="1" i="0">
-                <a:solidFill>
-                  <a:srgbClr val="E6006E"/>
-                </a:solidFill>
-                <a:latin typeface="Calibri"/>
-              </a:rPr>
-              <a:t>THE PROBLEM</a:t>
-            </a:r>
-          </a:p>
-          <a:p>
-            <a:pPr algn="l">
-              <a:spcAft>
-                <a:spcPts val="600"/>
-              </a:spcAft>
-            </a:pPr>
-            <a:r>
-              <a:rPr sz="1300" b="0" i="0">
-                <a:solidFill>
-                  <a:srgbClr val="F2E9D8"/>
-                </a:solidFill>
-                <a:latin typeface="Calibri"/>
-              </a:rPr>
-              <a:t>Training material is written to be read, so most of it never is.</a:t>
-            </a:r>
-          </a:p>
-          <a:p>
-            <a:pPr algn="l">
-              <a:spcAft>
-                <a:spcPts val="0"/>
-              </a:spcAft>
-            </a:pPr>
-            <a:r>
-              <a:rPr sz="1300" b="0" i="0">
-                <a:solidFill>
-                  <a:srgbClr val="F2E9D8"/>
-                </a:solidFill>
-                <a:latin typeface="Calibri"/>
-              </a:rPr>
-              <a:t>A quiz at the end measures recall on the day — not whether someone can use the idea.</a:t>
-            </a:r>
-          </a:p>
-        </p:txBody>
-      </p:sp>
-      <p:sp>
-        <p:nvSpPr>
-          <p:cNvPr id="9" name="Rectangle 8"/>
+          <p:cNvPr id="4" name="Oval 3"/>
           <p:cNvSpPr/>
           <p:nvPr/>
         </p:nvSpPr>
         <p:spPr>
           <a:xfrm>
-            <a:off x="5989320" y="3154680"/>
-            <a:ext cx="4983480" cy="1874519"/>
-          </a:xfrm>
-          <a:prstGeom prst="rect">
+            <a:off x="10070484" y="2755284"/>
+            <a:ext cx="1472184" cy="1472184"/>
+          </a:xfrm>
+          <a:prstGeom prst="ellipse">
             <a:avLst/>
           </a:prstGeom>
           <a:solidFill>
-            <a:srgbClr val="1A202B"/>
+            <a:srgbClr val="F4F7FA"/>
           </a:solidFill>
           <a:ln>
             <a:noFill/>
@@ -3453,91 +3226,20 @@
       </p:sp>
       <p:sp>
         <p:nvSpPr>
-          <p:cNvPr id="10" name="TextBox 9"/>
-          <p:cNvSpPr txBox="1"/>
-          <p:nvPr/>
-        </p:nvSpPr>
-        <p:spPr>
-          <a:xfrm>
-            <a:off x="6263640" y="3364992"/>
-            <a:ext cx="4434840" cy="1554480"/>
-          </a:xfrm>
-          <a:prstGeom prst="rect">
-            <a:avLst/>
-          </a:prstGeom>
-          <a:noFill/>
-        </p:spPr>
-        <p:txBody>
-          <a:bodyPr wrap="square" lIns="0" rIns="0" tIns="0" bIns="0" anchor="t">
-            <a:spAutoFit/>
-          </a:bodyPr>
-          <a:lstStyle/>
-          <a:p>
-            <a:pPr algn="l">
-              <a:spcAft>
-                <a:spcPts val="800"/>
-              </a:spcAft>
-            </a:pPr>
-            <a:r>
-              <a:rPr sz="1100" b="1" i="0">
-                <a:solidFill>
-                  <a:srgbClr val="00A878"/>
-                </a:solidFill>
-                <a:latin typeface="Calibri"/>
-              </a:rPr>
-              <a:t>WHAT REHNUMA DOES</a:t>
-            </a:r>
-          </a:p>
-          <a:p>
-            <a:pPr algn="l">
-              <a:spcAft>
-                <a:spcPts val="600"/>
-              </a:spcAft>
-            </a:pPr>
-            <a:r>
-              <a:rPr sz="1300" b="0" i="0">
-                <a:solidFill>
-                  <a:srgbClr val="F2E9D8"/>
-                </a:solidFill>
-                <a:latin typeface="Calibri"/>
-              </a:rPr>
-              <a:t>Turns any document into a journey you play — missions, choices, puzzles, role-play.</a:t>
-            </a:r>
-          </a:p>
-          <a:p>
-            <a:pPr algn="l">
-              <a:spcAft>
-                <a:spcPts val="0"/>
-              </a:spcAft>
-            </a:pPr>
-            <a:r>
-              <a:rPr sz="1300" b="0" i="0">
-                <a:solidFill>
-                  <a:srgbClr val="F2E9D8"/>
-                </a:solidFill>
-                <a:latin typeface="Calibri"/>
-              </a:rPr>
-              <a:t>Works out what you understand from how you talk. No score, no test, no right answer box.</a:t>
-            </a:r>
-          </a:p>
-        </p:txBody>
-      </p:sp>
-      <p:sp>
-        <p:nvSpPr>
-          <p:cNvPr id="11" name="Oval 10"/>
+          <p:cNvPr id="5" name="Oval 4"/>
           <p:cNvSpPr/>
           <p:nvPr/>
         </p:nvSpPr>
         <p:spPr>
           <a:xfrm>
-            <a:off x="685800" y="5285232"/>
-            <a:ext cx="566928" cy="566928"/>
+            <a:off x="9459468" y="3008375"/>
+            <a:ext cx="1472184" cy="1472184"/>
           </a:xfrm>
           <a:prstGeom prst="ellipse">
             <a:avLst/>
           </a:prstGeom>
           <a:solidFill>
-            <a:srgbClr val="00B4D8"/>
+            <a:srgbClr val="F4F7FA"/>
           </a:solidFill>
           <a:ln>
             <a:noFill/>
@@ -3568,20 +3270,20 @@
       </p:sp>
       <p:sp>
         <p:nvSpPr>
-          <p:cNvPr id="12" name="Oval 11"/>
+          <p:cNvPr id="6" name="Oval 5"/>
           <p:cNvSpPr/>
           <p:nvPr/>
         </p:nvSpPr>
         <p:spPr>
           <a:xfrm>
-            <a:off x="782177" y="5381609"/>
-            <a:ext cx="374172" cy="374172"/>
+            <a:off x="8848451" y="2755284"/>
+            <a:ext cx="1472184" cy="1472184"/>
           </a:xfrm>
           <a:prstGeom prst="ellipse">
             <a:avLst/>
           </a:prstGeom>
           <a:solidFill>
-            <a:srgbClr val="10131A"/>
+            <a:srgbClr val="F4F7FA"/>
           </a:solidFill>
           <a:ln>
             <a:noFill/>
@@ -3603,93 +3305,29 @@
           </a:fontRef>
         </p:style>
         <p:txBody>
-          <a:bodyPr rtlCol="0" anchor="ctr" lIns="0" rIns="0" tIns="0" bIns="0"/>
+          <a:bodyPr rtlCol="0" anchor="ctr"/>
           <a:lstStyle/>
           <a:p>
             <a:pPr algn="ctr"/>
-            <a:r>
-              <a:rPr sz="1500" b="1">
-                <a:solidFill>
-                  <a:srgbClr val="00B4D8"/>
-                </a:solidFill>
-                <a:latin typeface="Arial"/>
-              </a:rPr>
-              <a:t>1</a:t>
-            </a:r>
-          </a:p>
-        </p:txBody>
-      </p:sp>
-      <p:sp>
-        <p:nvSpPr>
-          <p:cNvPr id="13" name="TextBox 12"/>
-          <p:cNvSpPr txBox="1"/>
-          <p:nvPr/>
-        </p:nvSpPr>
-        <p:spPr>
-          <a:xfrm>
-            <a:off x="1435607" y="5321808"/>
-            <a:ext cx="2697480" cy="640080"/>
-          </a:xfrm>
-          <a:prstGeom prst="rect">
-            <a:avLst/>
-          </a:prstGeom>
-          <a:noFill/>
-        </p:spPr>
-        <p:txBody>
-          <a:bodyPr wrap="square" lIns="0" rIns="0" tIns="0" bIns="0" anchor="t">
-            <a:spAutoFit/>
-          </a:bodyPr>
-          <a:lstStyle/>
-          <a:p>
-            <a:pPr algn="l">
-              <a:spcAft>
-                <a:spcPts val="200"/>
-              </a:spcAft>
-            </a:pPr>
-            <a:r>
-              <a:rPr sz="1200" b="1" i="0">
-                <a:solidFill>
-                  <a:srgbClr val="00B4D8"/>
-                </a:solidFill>
-                <a:latin typeface="Calibri"/>
-              </a:rPr>
-              <a:t>ANY CONTENT IN</a:t>
-            </a:r>
-          </a:p>
-          <a:p>
-            <a:pPr algn="l">
-              <a:spcAft>
-                <a:spcPts val="0"/>
-              </a:spcAft>
-            </a:pPr>
-            <a:r>
-              <a:rPr sz="1100" b="0" i="0">
-                <a:solidFill>
-                  <a:srgbClr val="A99A7C"/>
-                </a:solidFill>
-                <a:latin typeface="Calibri"/>
-              </a:rPr>
-              <a:t>PDF, policy, article — or paste it</a:t>
-            </a:r>
-          </a:p>
-        </p:txBody>
-      </p:sp>
-      <p:sp>
-        <p:nvSpPr>
-          <p:cNvPr id="14" name="Oval 13"/>
+          </a:p>
+        </p:txBody>
+      </p:sp>
+      <p:sp>
+        <p:nvSpPr>
+          <p:cNvPr id="7" name="Oval 6"/>
           <p:cNvSpPr/>
           <p:nvPr/>
         </p:nvSpPr>
         <p:spPr>
           <a:xfrm>
-            <a:off x="4343400" y="5285232"/>
-            <a:ext cx="566928" cy="566928"/>
+            <a:off x="8595360" y="2144268"/>
+            <a:ext cx="1472184" cy="1472184"/>
           </a:xfrm>
           <a:prstGeom prst="ellipse">
             <a:avLst/>
           </a:prstGeom>
           <a:solidFill>
-            <a:srgbClr val="FFC402"/>
+            <a:srgbClr val="F4F7FA"/>
           </a:solidFill>
           <a:ln>
             <a:noFill/>
@@ -3720,20 +3358,20 @@
       </p:sp>
       <p:sp>
         <p:nvSpPr>
-          <p:cNvPr id="15" name="Oval 14"/>
+          <p:cNvPr id="8" name="Oval 7"/>
           <p:cNvSpPr/>
           <p:nvPr/>
         </p:nvSpPr>
         <p:spPr>
           <a:xfrm>
-            <a:off x="4439777" y="5381609"/>
-            <a:ext cx="374172" cy="374172"/>
+            <a:off x="8848451" y="1533251"/>
+            <a:ext cx="1472184" cy="1472184"/>
           </a:xfrm>
           <a:prstGeom prst="ellipse">
             <a:avLst/>
           </a:prstGeom>
           <a:solidFill>
-            <a:srgbClr val="10131A"/>
+            <a:srgbClr val="F4F7FA"/>
           </a:solidFill>
           <a:ln>
             <a:noFill/>
@@ -3755,93 +3393,29 @@
           </a:fontRef>
         </p:style>
         <p:txBody>
-          <a:bodyPr rtlCol="0" anchor="ctr" lIns="0" rIns="0" tIns="0" bIns="0"/>
+          <a:bodyPr rtlCol="0" anchor="ctr"/>
           <a:lstStyle/>
           <a:p>
             <a:pPr algn="ctr"/>
-            <a:r>
-              <a:rPr sz="1500" b="1">
-                <a:solidFill>
-                  <a:srgbClr val="FFC402"/>
-                </a:solidFill>
-                <a:latin typeface="Arial"/>
-              </a:rPr>
-              <a:t>2</a:t>
-            </a:r>
-          </a:p>
-        </p:txBody>
-      </p:sp>
-      <p:sp>
-        <p:nvSpPr>
-          <p:cNvPr id="16" name="TextBox 15"/>
-          <p:cNvSpPr txBox="1"/>
-          <p:nvPr/>
-        </p:nvSpPr>
-        <p:spPr>
-          <a:xfrm>
-            <a:off x="5093208" y="5321808"/>
-            <a:ext cx="2697480" cy="640080"/>
-          </a:xfrm>
-          <a:prstGeom prst="rect">
-            <a:avLst/>
-          </a:prstGeom>
-          <a:noFill/>
-        </p:spPr>
-        <p:txBody>
-          <a:bodyPr wrap="square" lIns="0" rIns="0" tIns="0" bIns="0" anchor="t">
-            <a:spAutoFit/>
-          </a:bodyPr>
-          <a:lstStyle/>
-          <a:p>
-            <a:pPr algn="l">
-              <a:spcAft>
-                <a:spcPts val="200"/>
-              </a:spcAft>
-            </a:pPr>
-            <a:r>
-              <a:rPr sz="1200" b="1" i="0">
-                <a:solidFill>
-                  <a:srgbClr val="FFC402"/>
-                </a:solidFill>
-                <a:latin typeface="Calibri"/>
-              </a:rPr>
-              <a:t>A JOURNEY OUT</a:t>
-            </a:r>
-          </a:p>
-          <a:p>
-            <a:pPr algn="l">
-              <a:spcAft>
-                <a:spcPts val="0"/>
-              </a:spcAft>
-            </a:pPr>
-            <a:r>
-              <a:rPr sz="1100" b="0" i="0">
-                <a:solidFill>
-                  <a:srgbClr val="A99A7C"/>
-                </a:solidFill>
-                <a:latin typeface="Calibri"/>
-              </a:rPr>
-              <a:t>Grounded in the source, quote by quote</a:t>
-            </a:r>
-          </a:p>
-        </p:txBody>
-      </p:sp>
-      <p:sp>
-        <p:nvSpPr>
-          <p:cNvPr id="17" name="Oval 16"/>
+          </a:p>
+        </p:txBody>
+      </p:sp>
+      <p:sp>
+        <p:nvSpPr>
+          <p:cNvPr id="9" name="Oval 8"/>
           <p:cNvSpPr/>
           <p:nvPr/>
         </p:nvSpPr>
         <p:spPr>
           <a:xfrm>
-            <a:off x="8001000" y="5285232"/>
-            <a:ext cx="566928" cy="566928"/>
+            <a:off x="9459468" y="1280160"/>
+            <a:ext cx="1472184" cy="1472184"/>
           </a:xfrm>
           <a:prstGeom prst="ellipse">
             <a:avLst/>
           </a:prstGeom>
           <a:solidFill>
-            <a:srgbClr val="00A878"/>
+            <a:srgbClr val="F4F7FA"/>
           </a:solidFill>
           <a:ln>
             <a:noFill/>
@@ -3872,20 +3446,20 @@
       </p:sp>
       <p:sp>
         <p:nvSpPr>
-          <p:cNvPr id="18" name="Oval 17"/>
+          <p:cNvPr id="10" name="Oval 9"/>
           <p:cNvSpPr/>
           <p:nvPr/>
         </p:nvSpPr>
         <p:spPr>
           <a:xfrm>
-            <a:off x="8097377" y="5381609"/>
-            <a:ext cx="374172" cy="374172"/>
+            <a:off x="10070484" y="1533251"/>
+            <a:ext cx="1472184" cy="1472184"/>
           </a:xfrm>
           <a:prstGeom prst="ellipse">
             <a:avLst/>
           </a:prstGeom>
           <a:solidFill>
-            <a:srgbClr val="10131A"/>
+            <a:srgbClr val="F4F7FA"/>
           </a:solidFill>
           <a:ln>
             <a:noFill/>
@@ -3907,32 +3481,516 @@
           </a:fontRef>
         </p:style>
         <p:txBody>
+          <a:bodyPr rtlCol="0" anchor="ctr"/>
+          <a:lstStyle/>
+          <a:p>
+            <a:pPr algn="ctr"/>
+          </a:p>
+        </p:txBody>
+      </p:sp>
+      <p:sp>
+        <p:nvSpPr>
+          <p:cNvPr id="11" name="Oval 10"/>
+          <p:cNvSpPr/>
+          <p:nvPr/>
+        </p:nvSpPr>
+        <p:spPr>
+          <a:xfrm>
+            <a:off x="9587484" y="2272284"/>
+            <a:ext cx="1216152" cy="1216152"/>
+          </a:xfrm>
+          <a:prstGeom prst="ellipse">
+            <a:avLst/>
+          </a:prstGeom>
+          <a:solidFill>
+            <a:srgbClr val="FFFFFF"/>
+          </a:solidFill>
+          <a:ln>
+            <a:noFill/>
+          </a:ln>
+          <a:effectLst/>
+        </p:spPr>
+        <p:style>
+          <a:lnRef idx="1">
+            <a:schemeClr val="accent1"/>
+          </a:lnRef>
+          <a:fillRef idx="3">
+            <a:schemeClr val="accent1"/>
+          </a:fillRef>
+          <a:effectRef idx="2">
+            <a:schemeClr val="accent1"/>
+          </a:effectRef>
+          <a:fontRef idx="minor">
+            <a:schemeClr val="lt1"/>
+          </a:fontRef>
+        </p:style>
+        <p:txBody>
+          <a:bodyPr rtlCol="0" anchor="ctr"/>
+          <a:lstStyle/>
+          <a:p>
+            <a:pPr algn="ctr"/>
+          </a:p>
+        </p:txBody>
+      </p:sp>
+      <p:sp>
+        <p:nvSpPr>
+          <p:cNvPr id="12" name="Oval 11"/>
+          <p:cNvSpPr/>
+          <p:nvPr/>
+        </p:nvSpPr>
+        <p:spPr>
+          <a:xfrm>
+            <a:off x="10250424" y="2564891"/>
+            <a:ext cx="630936" cy="630936"/>
+          </a:xfrm>
+          <a:prstGeom prst="ellipse">
+            <a:avLst/>
+          </a:prstGeom>
+          <a:solidFill>
+            <a:srgbClr val="ECF3F9"/>
+          </a:solidFill>
+          <a:ln>
+            <a:noFill/>
+          </a:ln>
+          <a:effectLst/>
+        </p:spPr>
+        <p:style>
+          <a:lnRef idx="1">
+            <a:schemeClr val="accent1"/>
+          </a:lnRef>
+          <a:fillRef idx="3">
+            <a:schemeClr val="accent1"/>
+          </a:fillRef>
+          <a:effectRef idx="2">
+            <a:schemeClr val="accent1"/>
+          </a:effectRef>
+          <a:fontRef idx="minor">
+            <a:schemeClr val="lt1"/>
+          </a:fontRef>
+        </p:style>
+        <p:txBody>
+          <a:bodyPr rtlCol="0" anchor="ctr"/>
+          <a:lstStyle/>
+          <a:p>
+            <a:pPr algn="ctr"/>
+          </a:p>
+        </p:txBody>
+      </p:sp>
+      <p:sp>
+        <p:nvSpPr>
+          <p:cNvPr id="13" name="Oval 12"/>
+          <p:cNvSpPr/>
+          <p:nvPr/>
+        </p:nvSpPr>
+        <p:spPr>
+          <a:xfrm>
+            <a:off x="10141956" y="2826756"/>
+            <a:ext cx="630936" cy="630936"/>
+          </a:xfrm>
+          <a:prstGeom prst="ellipse">
+            <a:avLst/>
+          </a:prstGeom>
+          <a:solidFill>
+            <a:srgbClr val="ECF3F9"/>
+          </a:solidFill>
+          <a:ln>
+            <a:noFill/>
+          </a:ln>
+          <a:effectLst/>
+        </p:spPr>
+        <p:style>
+          <a:lnRef idx="1">
+            <a:schemeClr val="accent1"/>
+          </a:lnRef>
+          <a:fillRef idx="3">
+            <a:schemeClr val="accent1"/>
+          </a:fillRef>
+          <a:effectRef idx="2">
+            <a:schemeClr val="accent1"/>
+          </a:effectRef>
+          <a:fontRef idx="minor">
+            <a:schemeClr val="lt1"/>
+          </a:fontRef>
+        </p:style>
+        <p:txBody>
+          <a:bodyPr rtlCol="0" anchor="ctr"/>
+          <a:lstStyle/>
+          <a:p>
+            <a:pPr algn="ctr"/>
+          </a:p>
+        </p:txBody>
+      </p:sp>
+      <p:sp>
+        <p:nvSpPr>
+          <p:cNvPr id="14" name="Oval 13"/>
+          <p:cNvSpPr/>
+          <p:nvPr/>
+        </p:nvSpPr>
+        <p:spPr>
+          <a:xfrm>
+            <a:off x="9880092" y="2935223"/>
+            <a:ext cx="630936" cy="630936"/>
+          </a:xfrm>
+          <a:prstGeom prst="ellipse">
+            <a:avLst/>
+          </a:prstGeom>
+          <a:solidFill>
+            <a:srgbClr val="ECF3F9"/>
+          </a:solidFill>
+          <a:ln>
+            <a:noFill/>
+          </a:ln>
+          <a:effectLst/>
+        </p:spPr>
+        <p:style>
+          <a:lnRef idx="1">
+            <a:schemeClr val="accent1"/>
+          </a:lnRef>
+          <a:fillRef idx="3">
+            <a:schemeClr val="accent1"/>
+          </a:fillRef>
+          <a:effectRef idx="2">
+            <a:schemeClr val="accent1"/>
+          </a:effectRef>
+          <a:fontRef idx="minor">
+            <a:schemeClr val="lt1"/>
+          </a:fontRef>
+        </p:style>
+        <p:txBody>
+          <a:bodyPr rtlCol="0" anchor="ctr"/>
+          <a:lstStyle/>
+          <a:p>
+            <a:pPr algn="ctr"/>
+          </a:p>
+        </p:txBody>
+      </p:sp>
+      <p:sp>
+        <p:nvSpPr>
+          <p:cNvPr id="15" name="Oval 14"/>
+          <p:cNvSpPr/>
+          <p:nvPr/>
+        </p:nvSpPr>
+        <p:spPr>
+          <a:xfrm>
+            <a:off x="9618227" y="2826756"/>
+            <a:ext cx="630936" cy="630936"/>
+          </a:xfrm>
+          <a:prstGeom prst="ellipse">
+            <a:avLst/>
+          </a:prstGeom>
+          <a:solidFill>
+            <a:srgbClr val="ECF3F9"/>
+          </a:solidFill>
+          <a:ln>
+            <a:noFill/>
+          </a:ln>
+          <a:effectLst/>
+        </p:spPr>
+        <p:style>
+          <a:lnRef idx="1">
+            <a:schemeClr val="accent1"/>
+          </a:lnRef>
+          <a:fillRef idx="3">
+            <a:schemeClr val="accent1"/>
+          </a:fillRef>
+          <a:effectRef idx="2">
+            <a:schemeClr val="accent1"/>
+          </a:effectRef>
+          <a:fontRef idx="minor">
+            <a:schemeClr val="lt1"/>
+          </a:fontRef>
+        </p:style>
+        <p:txBody>
+          <a:bodyPr rtlCol="0" anchor="ctr"/>
+          <a:lstStyle/>
+          <a:p>
+            <a:pPr algn="ctr"/>
+          </a:p>
+        </p:txBody>
+      </p:sp>
+      <p:sp>
+        <p:nvSpPr>
+          <p:cNvPr id="16" name="Oval 15"/>
+          <p:cNvSpPr/>
+          <p:nvPr/>
+        </p:nvSpPr>
+        <p:spPr>
+          <a:xfrm>
+            <a:off x="9509760" y="2564891"/>
+            <a:ext cx="630936" cy="630936"/>
+          </a:xfrm>
+          <a:prstGeom prst="ellipse">
+            <a:avLst/>
+          </a:prstGeom>
+          <a:solidFill>
+            <a:srgbClr val="ECF3F9"/>
+          </a:solidFill>
+          <a:ln>
+            <a:noFill/>
+          </a:ln>
+          <a:effectLst/>
+        </p:spPr>
+        <p:style>
+          <a:lnRef idx="1">
+            <a:schemeClr val="accent1"/>
+          </a:lnRef>
+          <a:fillRef idx="3">
+            <a:schemeClr val="accent1"/>
+          </a:fillRef>
+          <a:effectRef idx="2">
+            <a:schemeClr val="accent1"/>
+          </a:effectRef>
+          <a:fontRef idx="minor">
+            <a:schemeClr val="lt1"/>
+          </a:fontRef>
+        </p:style>
+        <p:txBody>
+          <a:bodyPr rtlCol="0" anchor="ctr"/>
+          <a:lstStyle/>
+          <a:p>
+            <a:pPr algn="ctr"/>
+          </a:p>
+        </p:txBody>
+      </p:sp>
+      <p:sp>
+        <p:nvSpPr>
+          <p:cNvPr id="17" name="Oval 16"/>
+          <p:cNvSpPr/>
+          <p:nvPr/>
+        </p:nvSpPr>
+        <p:spPr>
+          <a:xfrm>
+            <a:off x="9618227" y="2303027"/>
+            <a:ext cx="630936" cy="630936"/>
+          </a:xfrm>
+          <a:prstGeom prst="ellipse">
+            <a:avLst/>
+          </a:prstGeom>
+          <a:solidFill>
+            <a:srgbClr val="ECF3F9"/>
+          </a:solidFill>
+          <a:ln>
+            <a:noFill/>
+          </a:ln>
+          <a:effectLst/>
+        </p:spPr>
+        <p:style>
+          <a:lnRef idx="1">
+            <a:schemeClr val="accent1"/>
+          </a:lnRef>
+          <a:fillRef idx="3">
+            <a:schemeClr val="accent1"/>
+          </a:fillRef>
+          <a:effectRef idx="2">
+            <a:schemeClr val="accent1"/>
+          </a:effectRef>
+          <a:fontRef idx="minor">
+            <a:schemeClr val="lt1"/>
+          </a:fontRef>
+        </p:style>
+        <p:txBody>
+          <a:bodyPr rtlCol="0" anchor="ctr"/>
+          <a:lstStyle/>
+          <a:p>
+            <a:pPr algn="ctr"/>
+          </a:p>
+        </p:txBody>
+      </p:sp>
+      <p:sp>
+        <p:nvSpPr>
+          <p:cNvPr id="18" name="Oval 17"/>
+          <p:cNvSpPr/>
+          <p:nvPr/>
+        </p:nvSpPr>
+        <p:spPr>
+          <a:xfrm>
+            <a:off x="9880092" y="2194560"/>
+            <a:ext cx="630936" cy="630936"/>
+          </a:xfrm>
+          <a:prstGeom prst="ellipse">
+            <a:avLst/>
+          </a:prstGeom>
+          <a:solidFill>
+            <a:srgbClr val="ECF3F9"/>
+          </a:solidFill>
+          <a:ln>
+            <a:noFill/>
+          </a:ln>
+          <a:effectLst/>
+        </p:spPr>
+        <p:style>
+          <a:lnRef idx="1">
+            <a:schemeClr val="accent1"/>
+          </a:lnRef>
+          <a:fillRef idx="3">
+            <a:schemeClr val="accent1"/>
+          </a:fillRef>
+          <a:effectRef idx="2">
+            <a:schemeClr val="accent1"/>
+          </a:effectRef>
+          <a:fontRef idx="minor">
+            <a:schemeClr val="lt1"/>
+          </a:fontRef>
+        </p:style>
+        <p:txBody>
+          <a:bodyPr rtlCol="0" anchor="ctr"/>
+          <a:lstStyle/>
+          <a:p>
+            <a:pPr algn="ctr"/>
+          </a:p>
+        </p:txBody>
+      </p:sp>
+      <p:sp>
+        <p:nvSpPr>
+          <p:cNvPr id="19" name="Oval 18"/>
+          <p:cNvSpPr/>
+          <p:nvPr/>
+        </p:nvSpPr>
+        <p:spPr>
+          <a:xfrm>
+            <a:off x="10141956" y="2303027"/>
+            <a:ext cx="630936" cy="630936"/>
+          </a:xfrm>
+          <a:prstGeom prst="ellipse">
+            <a:avLst/>
+          </a:prstGeom>
+          <a:solidFill>
+            <a:srgbClr val="ECF3F9"/>
+          </a:solidFill>
+          <a:ln>
+            <a:noFill/>
+          </a:ln>
+          <a:effectLst/>
+        </p:spPr>
+        <p:style>
+          <a:lnRef idx="1">
+            <a:schemeClr val="accent1"/>
+          </a:lnRef>
+          <a:fillRef idx="3">
+            <a:schemeClr val="accent1"/>
+          </a:fillRef>
+          <a:effectRef idx="2">
+            <a:schemeClr val="accent1"/>
+          </a:effectRef>
+          <a:fontRef idx="minor">
+            <a:schemeClr val="lt1"/>
+          </a:fontRef>
+        </p:style>
+        <p:txBody>
+          <a:bodyPr rtlCol="0" anchor="ctr"/>
+          <a:lstStyle/>
+          <a:p>
+            <a:pPr algn="ctr"/>
+          </a:p>
+        </p:txBody>
+      </p:sp>
+      <p:sp>
+        <p:nvSpPr>
+          <p:cNvPr id="20" name="Oval 19"/>
+          <p:cNvSpPr/>
+          <p:nvPr/>
+        </p:nvSpPr>
+        <p:spPr>
+          <a:xfrm>
+            <a:off x="9934956" y="2619756"/>
+            <a:ext cx="521208" cy="521208"/>
+          </a:xfrm>
+          <a:prstGeom prst="ellipse">
+            <a:avLst/>
+          </a:prstGeom>
+          <a:solidFill>
+            <a:srgbClr val="FFFFFF"/>
+          </a:solidFill>
+          <a:ln>
+            <a:noFill/>
+          </a:ln>
+          <a:effectLst/>
+        </p:spPr>
+        <p:style>
+          <a:lnRef idx="1">
+            <a:schemeClr val="accent1"/>
+          </a:lnRef>
+          <a:fillRef idx="3">
+            <a:schemeClr val="accent1"/>
+          </a:fillRef>
+          <a:effectRef idx="2">
+            <a:schemeClr val="accent1"/>
+          </a:effectRef>
+          <a:fontRef idx="minor">
+            <a:schemeClr val="lt1"/>
+          </a:fontRef>
+        </p:style>
+        <p:txBody>
+          <a:bodyPr rtlCol="0" anchor="ctr"/>
+          <a:lstStyle/>
+          <a:p>
+            <a:pPr algn="ctr"/>
+          </a:p>
+        </p:txBody>
+      </p:sp>
+      <p:sp>
+        <p:nvSpPr>
+          <p:cNvPr id="21" name="Rectangle 20"/>
+          <p:cNvSpPr/>
+          <p:nvPr/>
+        </p:nvSpPr>
+        <p:spPr>
+          <a:xfrm>
+            <a:off x="822960" y="658368"/>
+            <a:ext cx="817839" cy="475488"/>
+          </a:xfrm>
+          <a:prstGeom prst="rect">
+            <a:avLst/>
+          </a:prstGeom>
+          <a:solidFill>
+            <a:srgbClr val="0083CA"/>
+          </a:solidFill>
+          <a:ln>
+            <a:noFill/>
+          </a:ln>
+          <a:effectLst/>
+        </p:spPr>
+        <p:style>
+          <a:lnRef idx="1">
+            <a:schemeClr val="accent1"/>
+          </a:lnRef>
+          <a:fillRef idx="3">
+            <a:schemeClr val="accent1"/>
+          </a:fillRef>
+          <a:effectRef idx="2">
+            <a:schemeClr val="accent1"/>
+          </a:effectRef>
+          <a:fontRef idx="minor">
+            <a:schemeClr val="lt1"/>
+          </a:fontRef>
+        </p:style>
+        <p:txBody>
           <a:bodyPr rtlCol="0" anchor="ctr" lIns="0" rIns="0" tIns="0" bIns="0"/>
           <a:lstStyle/>
           <a:p>
             <a:pPr algn="ctr"/>
             <a:r>
-              <a:rPr sz="1500" b="1">
-                <a:solidFill>
-                  <a:srgbClr val="00A878"/>
+              <a:rPr sz="2080" b="1">
+                <a:solidFill>
+                  <a:srgbClr val="FFFFFF"/>
                 </a:solidFill>
                 <a:latin typeface="Arial"/>
               </a:rPr>
-              <a:t>3</a:t>
-            </a:r>
-          </a:p>
-        </p:txBody>
-      </p:sp>
-      <p:sp>
-        <p:nvSpPr>
-          <p:cNvPr id="19" name="TextBox 18"/>
+              <a:t>UBL</a:t>
+            </a:r>
+          </a:p>
+        </p:txBody>
+      </p:sp>
+      <p:sp>
+        <p:nvSpPr>
+          <p:cNvPr id="22" name="TextBox 21"/>
           <p:cNvSpPr txBox="1"/>
           <p:nvPr/>
         </p:nvSpPr>
         <p:spPr>
           <a:xfrm>
-            <a:off x="8750808" y="5321808"/>
-            <a:ext cx="2697480" cy="640080"/>
+            <a:off x="822960" y="1755648"/>
+            <a:ext cx="8229600" cy="1188720"/>
           </a:xfrm>
           <a:prstGeom prst="rect">
             <a:avLst/>
@@ -3947,47 +4005,31 @@
           <a:p>
             <a:pPr algn="l">
               <a:spcAft>
-                <a:spcPts val="200"/>
-              </a:spcAft>
-            </a:pPr>
-            <a:r>
-              <a:rPr sz="1200" b="1" i="0">
-                <a:solidFill>
-                  <a:srgbClr val="00A878"/>
-                </a:solidFill>
-                <a:latin typeface="Calibri"/>
-              </a:rPr>
-              <a:t>MASTERY, INFERRED</a:t>
-            </a:r>
-          </a:p>
-          <a:p>
-            <a:pPr algn="l">
-              <a:spcAft>
-                <a:spcPts val="0"/>
-              </a:spcAft>
-            </a:pPr>
-            <a:r>
-              <a:rPr sz="1100" b="0" i="0">
-                <a:solidFill>
-                  <a:srgbClr val="A99A7C"/>
-                </a:solidFill>
-                <a:latin typeface="Calibri"/>
-              </a:rPr>
-              <a:t>From conversation, not assessment</a:t>
-            </a:r>
-          </a:p>
-        </p:txBody>
-      </p:sp>
-      <p:sp>
-        <p:nvSpPr>
-          <p:cNvPr id="20" name="TextBox 19"/>
+                <a:spcPts val="500"/>
+              </a:spcAft>
+            </a:pPr>
+            <a:r>
+              <a:rPr sz="6800" b="1" i="0">
+                <a:solidFill>
+                  <a:srgbClr val="0C2B45"/>
+                </a:solidFill>
+                <a:latin typeface="Cambria"/>
+              </a:rPr>
+              <a:t>Rehnuma</a:t>
+            </a:r>
+          </a:p>
+        </p:txBody>
+      </p:sp>
+      <p:sp>
+        <p:nvSpPr>
+          <p:cNvPr id="23" name="TextBox 22"/>
           <p:cNvSpPr txBox="1"/>
           <p:nvPr/>
         </p:nvSpPr>
         <p:spPr>
           <a:xfrm>
-            <a:off x="685800" y="6327648"/>
-            <a:ext cx="7315200" cy="274320"/>
+            <a:off x="822960" y="2798064"/>
+            <a:ext cx="8229600" cy="457200"/>
           </a:xfrm>
           <a:prstGeom prst="rect">
             <a:avLst/>
@@ -4002,31 +4044,31 @@
           <a:p>
             <a:pPr algn="l">
               <a:spcAft>
-                <a:spcPts val="400"/>
-              </a:spcAft>
-            </a:pPr>
-            <a:r>
-              <a:rPr sz="900" b="0" i="0">
-                <a:solidFill>
-                  <a:srgbClr val="A99A7C"/>
+                <a:spcPts val="500"/>
+              </a:spcAft>
+            </a:pPr>
+            <a:r>
+              <a:rPr sz="1900" b="0" i="0">
+                <a:solidFill>
+                  <a:srgbClr val="0083CA"/>
                 </a:solidFill>
                 <a:latin typeface="Calibri"/>
               </a:rPr>
-              <a:t>Rehnuma  ·  candidate prototype for United Bank Limited</a:t>
-            </a:r>
-          </a:p>
-        </p:txBody>
-      </p:sp>
-      <p:sp>
-        <p:nvSpPr>
-          <p:cNvPr id="21" name="TextBox 20"/>
+              <a:t>رہنما  —  the guide</a:t>
+            </a:r>
+          </a:p>
+        </p:txBody>
+      </p:sp>
+      <p:sp>
+        <p:nvSpPr>
+          <p:cNvPr id="24" name="TextBox 23"/>
           <p:cNvSpPr txBox="1"/>
           <p:nvPr/>
         </p:nvSpPr>
         <p:spPr>
           <a:xfrm>
-            <a:off x="10332720" y="6327648"/>
-            <a:ext cx="1143000" cy="274320"/>
+            <a:off x="822960" y="3456432"/>
+            <a:ext cx="6949440" cy="548640"/>
           </a:xfrm>
           <a:prstGeom prst="rect">
             <a:avLst/>
@@ -4039,19 +4081,445 @@
           </a:bodyPr>
           <a:lstStyle/>
           <a:p>
+            <a:pPr algn="l">
+              <a:lnSpc>
+                <a:spcPct val="120000"/>
+              </a:lnSpc>
+              <a:spcAft>
+                <a:spcPts val="500"/>
+              </a:spcAft>
+            </a:pPr>
+            <a:r>
+              <a:rPr sz="1700" b="0" i="0">
+                <a:solidFill>
+                  <a:srgbClr val="0F5885"/>
+                </a:solidFill>
+                <a:latin typeface="Cambria"/>
+              </a:rPr>
+              <a:t>An AI Learning Experience Engine that turns any content into a conversation — and never gives a test.</a:t>
+            </a:r>
+          </a:p>
+        </p:txBody>
+      </p:sp>
+      <p:sp>
+        <p:nvSpPr>
+          <p:cNvPr id="25" name="Rectangle 24"/>
+          <p:cNvSpPr/>
+          <p:nvPr/>
+        </p:nvSpPr>
+        <p:spPr>
+          <a:xfrm>
+            <a:off x="822960" y="4407408"/>
+            <a:ext cx="3017520" cy="25603"/>
+          </a:xfrm>
+          <a:prstGeom prst="rect">
+            <a:avLst/>
+          </a:prstGeom>
+          <a:solidFill>
+            <a:srgbClr val="E6E7E8"/>
+          </a:solidFill>
+          <a:ln>
+            <a:noFill/>
+          </a:ln>
+          <a:effectLst/>
+        </p:spPr>
+        <p:style>
+          <a:lnRef idx="1">
+            <a:schemeClr val="accent1"/>
+          </a:lnRef>
+          <a:fillRef idx="3">
+            <a:schemeClr val="accent1"/>
+          </a:fillRef>
+          <a:effectRef idx="2">
+            <a:schemeClr val="accent1"/>
+          </a:effectRef>
+          <a:fontRef idx="minor">
+            <a:schemeClr val="lt1"/>
+          </a:fontRef>
+        </p:style>
+        <p:txBody>
+          <a:bodyPr rtlCol="0" anchor="ctr"/>
+          <a:lstStyle/>
+          <a:p>
+            <a:pPr algn="ctr"/>
+          </a:p>
+        </p:txBody>
+      </p:sp>
+      <p:sp>
+        <p:nvSpPr>
+          <p:cNvPr id="26" name="TextBox 25"/>
+          <p:cNvSpPr txBox="1"/>
+          <p:nvPr/>
+        </p:nvSpPr>
+        <p:spPr>
+          <a:xfrm>
+            <a:off x="822960" y="4626864"/>
+            <a:ext cx="2834640" cy="1371600"/>
+          </a:xfrm>
+          <a:prstGeom prst="rect">
+            <a:avLst/>
+          </a:prstGeom>
+          <a:noFill/>
+        </p:spPr>
+        <p:txBody>
+          <a:bodyPr wrap="square" lIns="0" rIns="0" tIns="0" bIns="0" anchor="t">
+            <a:spAutoFit/>
+          </a:bodyPr>
+          <a:lstStyle/>
+          <a:p>
+            <a:pPr algn="l">
+              <a:spcAft>
+                <a:spcPts val="500"/>
+              </a:spcAft>
+            </a:pPr>
+            <a:r>
+              <a:rPr sz="950" b="1" i="0">
+                <a:solidFill>
+                  <a:srgbClr val="0083CA"/>
+                </a:solidFill>
+                <a:latin typeface="Calibri"/>
+              </a:rPr>
+              <a:t>PREPARED BY</a:t>
+            </a:r>
+          </a:p>
+          <a:p>
+            <a:pPr algn="l">
+              <a:spcAft>
+                <a:spcPts val="300"/>
+              </a:spcAft>
+            </a:pPr>
+            <a:r>
+              <a:rPr sz="1500" b="1" i="0">
+                <a:solidFill>
+                  <a:srgbClr val="0C2B45"/>
+                </a:solidFill>
+                <a:latin typeface="Cambria"/>
+              </a:rPr>
+              <a:t>Ayesha Faheem</a:t>
+            </a:r>
+          </a:p>
+          <a:p>
+            <a:pPr algn="l">
+              <a:spcAft>
+                <a:spcPts val="0"/>
+              </a:spcAft>
+            </a:pPr>
+            <a:r>
+              <a:rPr sz="1200" b="0" i="0">
+                <a:solidFill>
+                  <a:srgbClr val="808285"/>
+                </a:solidFill>
+                <a:latin typeface="Calibri"/>
+              </a:rPr>
+              <a:t>InterSec, Inc.</a:t>
+            </a:r>
+          </a:p>
+        </p:txBody>
+      </p:sp>
+      <p:sp>
+        <p:nvSpPr>
+          <p:cNvPr id="27" name="Rectangle 26"/>
+          <p:cNvSpPr/>
+          <p:nvPr/>
+        </p:nvSpPr>
+        <p:spPr>
+          <a:xfrm>
+            <a:off x="4160520" y="4407408"/>
+            <a:ext cx="3017520" cy="25603"/>
+          </a:xfrm>
+          <a:prstGeom prst="rect">
+            <a:avLst/>
+          </a:prstGeom>
+          <a:solidFill>
+            <a:srgbClr val="E6E7E8"/>
+          </a:solidFill>
+          <a:ln>
+            <a:noFill/>
+          </a:ln>
+          <a:effectLst/>
+        </p:spPr>
+        <p:style>
+          <a:lnRef idx="1">
+            <a:schemeClr val="accent1"/>
+          </a:lnRef>
+          <a:fillRef idx="3">
+            <a:schemeClr val="accent1"/>
+          </a:fillRef>
+          <a:effectRef idx="2">
+            <a:schemeClr val="accent1"/>
+          </a:effectRef>
+          <a:fontRef idx="minor">
+            <a:schemeClr val="lt1"/>
+          </a:fontRef>
+        </p:style>
+        <p:txBody>
+          <a:bodyPr rtlCol="0" anchor="ctr"/>
+          <a:lstStyle/>
+          <a:p>
+            <a:pPr algn="ctr"/>
+          </a:p>
+        </p:txBody>
+      </p:sp>
+      <p:sp>
+        <p:nvSpPr>
+          <p:cNvPr id="28" name="TextBox 27"/>
+          <p:cNvSpPr txBox="1"/>
+          <p:nvPr/>
+        </p:nvSpPr>
+        <p:spPr>
+          <a:xfrm>
+            <a:off x="4160520" y="4626864"/>
+            <a:ext cx="2834640" cy="1371600"/>
+          </a:xfrm>
+          <a:prstGeom prst="rect">
+            <a:avLst/>
+          </a:prstGeom>
+          <a:noFill/>
+        </p:spPr>
+        <p:txBody>
+          <a:bodyPr wrap="square" lIns="0" rIns="0" tIns="0" bIns="0" anchor="t">
+            <a:spAutoFit/>
+          </a:bodyPr>
+          <a:lstStyle/>
+          <a:p>
+            <a:pPr algn="l">
+              <a:spcAft>
+                <a:spcPts val="500"/>
+              </a:spcAft>
+            </a:pPr>
+            <a:r>
+              <a:rPr sz="950" b="1" i="0">
+                <a:solidFill>
+                  <a:srgbClr val="0083CA"/>
+                </a:solidFill>
+                <a:latin typeface="Calibri"/>
+              </a:rPr>
+              <a:t>FOR</a:t>
+            </a:r>
+          </a:p>
+          <a:p>
+            <a:pPr algn="l">
+              <a:spcAft>
+                <a:spcPts val="300"/>
+              </a:spcAft>
+            </a:pPr>
+            <a:r>
+              <a:rPr sz="1500" b="1" i="0">
+                <a:solidFill>
+                  <a:srgbClr val="0C2B45"/>
+                </a:solidFill>
+                <a:latin typeface="Cambria"/>
+              </a:rPr>
+              <a:t>United Bank Limited</a:t>
+            </a:r>
+          </a:p>
+          <a:p>
+            <a:pPr algn="l">
+              <a:spcAft>
+                <a:spcPts val="0"/>
+              </a:spcAft>
+            </a:pPr>
+            <a:r>
+              <a:rPr sz="1200" b="0" i="0">
+                <a:solidFill>
+                  <a:srgbClr val="808285"/>
+                </a:solidFill>
+                <a:latin typeface="Calibri"/>
+              </a:rPr>
+              <a:t>Digital HR &amp; AI Manager</a:t>
+            </a:r>
+          </a:p>
+        </p:txBody>
+      </p:sp>
+      <p:sp>
+        <p:nvSpPr>
+          <p:cNvPr id="29" name="Rectangle 28"/>
+          <p:cNvSpPr/>
+          <p:nvPr/>
+        </p:nvSpPr>
+        <p:spPr>
+          <a:xfrm>
+            <a:off x="7498079" y="4407408"/>
+            <a:ext cx="3017520" cy="25603"/>
+          </a:xfrm>
+          <a:prstGeom prst="rect">
+            <a:avLst/>
+          </a:prstGeom>
+          <a:solidFill>
+            <a:srgbClr val="E6E7E8"/>
+          </a:solidFill>
+          <a:ln>
+            <a:noFill/>
+          </a:ln>
+          <a:effectLst/>
+        </p:spPr>
+        <p:style>
+          <a:lnRef idx="1">
+            <a:schemeClr val="accent1"/>
+          </a:lnRef>
+          <a:fillRef idx="3">
+            <a:schemeClr val="accent1"/>
+          </a:fillRef>
+          <a:effectRef idx="2">
+            <a:schemeClr val="accent1"/>
+          </a:effectRef>
+          <a:fontRef idx="minor">
+            <a:schemeClr val="lt1"/>
+          </a:fontRef>
+        </p:style>
+        <p:txBody>
+          <a:bodyPr rtlCol="0" anchor="ctr"/>
+          <a:lstStyle/>
+          <a:p>
+            <a:pPr algn="ctr"/>
+          </a:p>
+        </p:txBody>
+      </p:sp>
+      <p:sp>
+        <p:nvSpPr>
+          <p:cNvPr id="30" name="TextBox 29"/>
+          <p:cNvSpPr txBox="1"/>
+          <p:nvPr/>
+        </p:nvSpPr>
+        <p:spPr>
+          <a:xfrm>
+            <a:off x="7498079" y="4626864"/>
+            <a:ext cx="2926080" cy="1371600"/>
+          </a:xfrm>
+          <a:prstGeom prst="rect">
+            <a:avLst/>
+          </a:prstGeom>
+          <a:noFill/>
+        </p:spPr>
+        <p:txBody>
+          <a:bodyPr wrap="square" lIns="0" rIns="0" tIns="0" bIns="0" anchor="t">
+            <a:spAutoFit/>
+          </a:bodyPr>
+          <a:lstStyle/>
+          <a:p>
+            <a:pPr algn="l">
+              <a:spcAft>
+                <a:spcPts val="500"/>
+              </a:spcAft>
+            </a:pPr>
+            <a:r>
+              <a:rPr sz="950" b="1" i="0">
+                <a:solidFill>
+                  <a:srgbClr val="0083CA"/>
+                </a:solidFill>
+                <a:latin typeface="Calibri"/>
+              </a:rPr>
+              <a:t>THE BRIEF</a:t>
+            </a:r>
+          </a:p>
+          <a:p>
+            <a:pPr algn="l">
+              <a:spcAft>
+                <a:spcPts val="300"/>
+              </a:spcAft>
+            </a:pPr>
+            <a:r>
+              <a:rPr sz="1500" b="1" i="0">
+                <a:solidFill>
+                  <a:srgbClr val="0C2B45"/>
+                </a:solidFill>
+                <a:latin typeface="Cambria"/>
+              </a:rPr>
+              <a:t>Design, build and deploy</a:t>
+            </a:r>
+          </a:p>
+          <a:p>
+            <a:pPr algn="l">
+              <a:spcAft>
+                <a:spcPts val="0"/>
+              </a:spcAft>
+            </a:pPr>
+            <a:r>
+              <a:rPr sz="1200" b="0" i="0">
+                <a:solidFill>
+                  <a:srgbClr val="808285"/>
+                </a:solidFill>
+                <a:latin typeface="Calibri"/>
+              </a:rPr>
+              <a:t>A secure, adaptive, voice-enabled learning engine — live on the cloud</a:t>
+            </a:r>
+          </a:p>
+        </p:txBody>
+      </p:sp>
+      <p:sp>
+        <p:nvSpPr>
+          <p:cNvPr id="31" name="TextBox 30"/>
+          <p:cNvSpPr txBox="1"/>
+          <p:nvPr/>
+        </p:nvSpPr>
+        <p:spPr>
+          <a:xfrm>
+            <a:off x="822960" y="6345936"/>
+            <a:ext cx="8229600" cy="237744"/>
+          </a:xfrm>
+          <a:prstGeom prst="rect">
+            <a:avLst/>
+          </a:prstGeom>
+          <a:noFill/>
+        </p:spPr>
+        <p:txBody>
+          <a:bodyPr wrap="square" lIns="0" rIns="0" tIns="0" bIns="0" anchor="t">
+            <a:spAutoFit/>
+          </a:bodyPr>
+          <a:lstStyle/>
+          <a:p>
+            <a:pPr algn="l">
+              <a:spcAft>
+                <a:spcPts val="500"/>
+              </a:spcAft>
+            </a:pPr>
+            <a:r>
+              <a:rPr sz="850" b="0" i="0">
+                <a:solidFill>
+                  <a:srgbClr val="808285"/>
+                </a:solidFill>
+                <a:latin typeface="Calibri"/>
+              </a:rPr>
+              <a:t>Ayesha Faheem  ·  Digital HR &amp; AI Manager assignment  ·  prototype for assessment</a:t>
+            </a:r>
+          </a:p>
+        </p:txBody>
+      </p:sp>
+      <p:sp>
+        <p:nvSpPr>
+          <p:cNvPr id="32" name="TextBox 31"/>
+          <p:cNvSpPr txBox="1"/>
+          <p:nvPr/>
+        </p:nvSpPr>
+        <p:spPr>
+          <a:xfrm>
+            <a:off x="10058400" y="6345936"/>
+            <a:ext cx="1307592" cy="237744"/>
+          </a:xfrm>
+          <a:prstGeom prst="rect">
+            <a:avLst/>
+          </a:prstGeom>
+          <a:noFill/>
+        </p:spPr>
+        <p:txBody>
+          <a:bodyPr wrap="square" lIns="0" rIns="0" tIns="0" bIns="0" anchor="t">
+            <a:spAutoFit/>
+          </a:bodyPr>
+          <a:lstStyle/>
+          <a:p>
             <a:pPr algn="r">
               <a:spcAft>
-                <a:spcPts val="400"/>
-              </a:spcAft>
-            </a:pPr>
-            <a:r>
-              <a:rPr sz="900" b="0" i="0">
-                <a:solidFill>
-                  <a:srgbClr val="A99A7C"/>
+                <a:spcPts val="500"/>
+              </a:spcAft>
+            </a:pPr>
+            <a:r>
+              <a:rPr sz="850" b="0" i="0">
+                <a:solidFill>
+                  <a:srgbClr val="808285"/>
                 </a:solidFill>
                 <a:latin typeface="Calibri"/>
               </a:rPr>
-              <a:t>1 / 5</a:t>
+              <a:t>1 / 5</a:t>
             </a:r>
           </a:p>
         </p:txBody>
@@ -4089,7 +4557,7 @@
             <a:avLst/>
           </a:prstGeom>
           <a:solidFill>
-            <a:srgbClr val="10131A"/>
+            <a:srgbClr val="FFFFFF"/>
           </a:solidFill>
           <a:ln>
             <a:noFill/>
@@ -4126,8 +4594,8 @@
         </p:nvSpPr>
         <p:spPr>
           <a:xfrm>
-            <a:off x="685800" y="475488"/>
-            <a:ext cx="10789920" cy="274320"/>
+            <a:off x="822960" y="658368"/>
+            <a:ext cx="10545775" cy="237744"/>
           </a:xfrm>
           <a:prstGeom prst="rect">
             <a:avLst/>
@@ -4142,17 +4610,17 @@
           <a:p>
             <a:pPr algn="l">
               <a:spcAft>
-                <a:spcPts val="400"/>
-              </a:spcAft>
-            </a:pPr>
-            <a:r>
-              <a:rPr sz="1100" b="1" i="0">
-                <a:solidFill>
-                  <a:srgbClr val="A99A7C"/>
+                <a:spcPts val="500"/>
+              </a:spcAft>
+            </a:pPr>
+            <a:r>
+              <a:rPr sz="1050" b="1" i="0">
+                <a:solidFill>
+                  <a:srgbClr val="0083CA"/>
                 </a:solidFill>
                 <a:latin typeface="Calibri"/>
               </a:rPr>
-              <a:t>ARCHITECTURE</a:t>
+              <a:t>THE PROBLEM · AND WHAT REPLACES IT</a:t>
             </a:r>
           </a:p>
         </p:txBody>
@@ -4165,8 +4633,8 @@
         </p:nvSpPr>
         <p:spPr>
           <a:xfrm>
-            <a:off x="685800" y="786384"/>
-            <a:ext cx="10789920" cy="914400"/>
+            <a:off x="822960" y="969264"/>
+            <a:ext cx="10545775" cy="777240"/>
           </a:xfrm>
           <a:prstGeom prst="rect">
             <a:avLst/>
@@ -4181,42 +4649,82 @@
           <a:p>
             <a:pPr algn="l">
               <a:spcAft>
-                <a:spcPts val="400"/>
-              </a:spcAft>
-            </a:pPr>
-            <a:r>
-              <a:rPr sz="3800" b="1" i="0">
-                <a:solidFill>
-                  <a:srgbClr val="F2E9D8"/>
-                </a:solidFill>
-                <a:latin typeface="Arial"/>
-              </a:rPr>
-              <a:t>One service, four moving parts</a:t>
-            </a:r>
-          </a:p>
-        </p:txBody>
-      </p:sp>
-      <p:sp>
-        <p:nvSpPr>
-          <p:cNvPr id="5" name="Rectangle 4"/>
+                <a:spcPts val="500"/>
+              </a:spcAft>
+            </a:pPr>
+            <a:r>
+              <a:rPr sz="4000" b="1" i="0">
+                <a:solidFill>
+                  <a:srgbClr val="0C2B45"/>
+                </a:solidFill>
+                <a:latin typeface="Cambria"/>
+              </a:rPr>
+              <a:t>Nobody ever learned from a quiz</a:t>
+            </a:r>
+          </a:p>
+        </p:txBody>
+      </p:sp>
+      <p:sp>
+        <p:nvSpPr>
+          <p:cNvPr id="5" name="TextBox 4"/>
+          <p:cNvSpPr txBox="1"/>
+          <p:nvPr/>
+        </p:nvSpPr>
+        <p:spPr>
+          <a:xfrm>
+            <a:off x="822960" y="1901952"/>
+            <a:ext cx="10545775" cy="749808"/>
+          </a:xfrm>
+          <a:prstGeom prst="rect">
+            <a:avLst/>
+          </a:prstGeom>
+          <a:noFill/>
+        </p:spPr>
+        <p:txBody>
+          <a:bodyPr wrap="square" lIns="0" rIns="0" tIns="0" bIns="0" anchor="t">
+            <a:spAutoFit/>
+          </a:bodyPr>
+          <a:lstStyle/>
+          <a:p>
+            <a:pPr algn="l">
+              <a:lnSpc>
+                <a:spcPct val="115000"/>
+              </a:lnSpc>
+              <a:spcAft>
+                <a:spcPts val="500"/>
+              </a:spcAft>
+            </a:pPr>
+            <a:r>
+              <a:rPr sz="1800" b="0" i="0">
+                <a:solidFill>
+                  <a:srgbClr val="0F5885"/>
+                </a:solidFill>
+                <a:latin typeface="Cambria"/>
+              </a:rPr>
+              <a:t>A quiz tells you what someone remembered this morning. It does not tell you whether they can use the idea when a customer is standing in front of them.</a:t>
+            </a:r>
+          </a:p>
+        </p:txBody>
+      </p:sp>
+      <p:sp>
+        <p:nvSpPr>
+          <p:cNvPr id="6" name="Rectangle 5"/>
           <p:cNvSpPr/>
           <p:nvPr/>
         </p:nvSpPr>
         <p:spPr>
           <a:xfrm>
-            <a:off x="685800" y="1965960"/>
-            <a:ext cx="2423160" cy="1371600"/>
+            <a:off x="822960" y="2852928"/>
+            <a:ext cx="10545775" cy="25603"/>
           </a:xfrm>
           <a:prstGeom prst="rect">
             <a:avLst/>
           </a:prstGeom>
           <a:solidFill>
-            <a:srgbClr val="1A202B"/>
+            <a:srgbClr val="E6E7E8"/>
           </a:solidFill>
-          <a:ln w="25400">
-            <a:solidFill>
-              <a:srgbClr val="00B4D8"/>
-            </a:solidFill>
+          <a:ln>
+            <a:noFill/>
           </a:ln>
           <a:effectLst/>
         </p:spPr>
@@ -4244,14 +4752,14 @@
       </p:sp>
       <p:sp>
         <p:nvSpPr>
-          <p:cNvPr id="6" name="TextBox 5"/>
+          <p:cNvPr id="7" name="TextBox 6"/>
           <p:cNvSpPr txBox="1"/>
           <p:nvPr/>
         </p:nvSpPr>
         <p:spPr>
           <a:xfrm>
-            <a:off x="886968" y="2176272"/>
-            <a:ext cx="2011680" cy="1005840"/>
+            <a:off x="822960" y="3127248"/>
+            <a:ext cx="4846320" cy="2194560"/>
           </a:xfrm>
           <a:prstGeom prst="rect">
             <a:avLst/>
@@ -4266,17 +4774,33 @@
           <a:p>
             <a:pPr algn="l">
               <a:spcAft>
-                <a:spcPts val="500"/>
-              </a:spcAft>
-            </a:pPr>
-            <a:r>
-              <a:rPr sz="1500" b="1" i="0">
-                <a:solidFill>
-                  <a:srgbClr val="00B4D8"/>
-                </a:solidFill>
-                <a:latin typeface="Arial"/>
-              </a:rPr>
-              <a:t>Content in</a:t>
+                <a:spcPts val="900"/>
+              </a:spcAft>
+            </a:pPr>
+            <a:r>
+              <a:rPr sz="950" b="1" i="0">
+                <a:solidFill>
+                  <a:srgbClr val="0083CA"/>
+                </a:solidFill>
+                <a:latin typeface="Calibri"/>
+              </a:rPr>
+              <a:t>SO REHNUMA NEVER TESTS ANYONE</a:t>
+            </a:r>
+          </a:p>
+          <a:p>
+            <a:pPr algn="l">
+              <a:spcAft>
+                <a:spcPts val="800"/>
+              </a:spcAft>
+            </a:pPr>
+            <a:r>
+              <a:rPr sz="1350" b="0" i="0">
+                <a:solidFill>
+                  <a:srgbClr val="808285"/>
+                </a:solidFill>
+                <a:latin typeface="Calibri"/>
+              </a:rPr>
+              <a:t>It gives you situations to act in — a customer at the counter, a colleague who has misunderstood something, a flaw to spot.</a:t>
             </a:r>
           </a:p>
           <a:p>
@@ -4286,28 +4810,27 @@
               </a:spcAft>
             </a:pPr>
             <a:r>
-              <a:rPr sz="1100" b="0" i="0">
-                <a:solidFill>
-                  <a:srgbClr val="F2E9D8"/>
+              <a:rPr sz="1350" b="0" i="0">
+                <a:solidFill>
+                  <a:srgbClr val="808285"/>
                 </a:solidFill>
                 <a:latin typeface="Calibri"/>
               </a:rPr>
-              <a:t>PDF / text → clean text
-PyMuPDF</a:t>
-            </a:r>
-          </a:p>
-        </p:txBody>
-      </p:sp>
-      <p:sp>
-        <p:nvSpPr>
-          <p:cNvPr id="7" name="TextBox 6"/>
+              <a:t>Then it works out what you understand from how you answer: the examples you reach for, the mistakes you catch yourself making, the words you start using.</a:t>
+            </a:r>
+          </a:p>
+        </p:txBody>
+      </p:sp>
+      <p:sp>
+        <p:nvSpPr>
+          <p:cNvPr id="8" name="TextBox 7"/>
           <p:cNvSpPr txBox="1"/>
           <p:nvPr/>
         </p:nvSpPr>
         <p:spPr>
           <a:xfrm>
-            <a:off x="3172968" y="2487168"/>
-            <a:ext cx="274320" cy="365760"/>
+            <a:off x="6263640" y="3090672"/>
+            <a:ext cx="457200" cy="530352"/>
           </a:xfrm>
           <a:prstGeom prst="rect">
             <a:avLst/>
@@ -4320,66 +4843,20 @@
           </a:bodyPr>
           <a:lstStyle/>
           <a:p>
-            <a:pPr algn="ctr">
-              <a:spcAft>
-                <a:spcPts val="400"/>
-              </a:spcAft>
-            </a:pPr>
-            <a:r>
-              <a:rPr sz="1600" b="0" i="0">
-                <a:solidFill>
-                  <a:srgbClr val="A99A7C"/>
-                </a:solidFill>
-                <a:latin typeface="Calibri"/>
-              </a:rPr>
-              <a:t>▶</a:t>
-            </a:r>
-          </a:p>
-        </p:txBody>
-      </p:sp>
-      <p:sp>
-        <p:nvSpPr>
-          <p:cNvPr id="8" name="Rectangle 7"/>
-          <p:cNvSpPr/>
-          <p:nvPr/>
-        </p:nvSpPr>
-        <p:spPr>
-          <a:xfrm>
-            <a:off x="3474720" y="1965960"/>
-            <a:ext cx="2423160" cy="1371600"/>
-          </a:xfrm>
-          <a:prstGeom prst="rect">
-            <a:avLst/>
-          </a:prstGeom>
-          <a:solidFill>
-            <a:srgbClr val="1A202B"/>
-          </a:solidFill>
-          <a:ln w="25400">
-            <a:solidFill>
-              <a:srgbClr val="FFC402"/>
-            </a:solidFill>
-          </a:ln>
-          <a:effectLst/>
-        </p:spPr>
-        <p:style>
-          <a:lnRef idx="1">
-            <a:schemeClr val="accent1"/>
-          </a:lnRef>
-          <a:fillRef idx="3">
-            <a:schemeClr val="accent1"/>
-          </a:fillRef>
-          <a:effectRef idx="2">
-            <a:schemeClr val="accent1"/>
-          </a:effectRef>
-          <a:fontRef idx="minor">
-            <a:schemeClr val="lt1"/>
-          </a:fontRef>
-        </p:style>
-        <p:txBody>
-          <a:bodyPr rtlCol="0" anchor="ctr"/>
-          <a:lstStyle/>
-          <a:p>
-            <a:pPr algn="ctr"/>
+            <a:pPr algn="l">
+              <a:spcAft>
+                <a:spcPts val="500"/>
+              </a:spcAft>
+            </a:pPr>
+            <a:r>
+              <a:rPr sz="2600" b="1" i="0">
+                <a:solidFill>
+                  <a:srgbClr val="E6E7E8"/>
+                </a:solidFill>
+                <a:latin typeface="Cambria"/>
+              </a:rPr>
+              <a:t>1</a:t>
+            </a:r>
           </a:p>
         </p:txBody>
       </p:sp>
@@ -4391,8 +4868,8 @@
         </p:nvSpPr>
         <p:spPr>
           <a:xfrm>
-            <a:off x="3675887" y="2176272"/>
-            <a:ext cx="2011680" cy="1005840"/>
+            <a:off x="6784848" y="3163824"/>
+            <a:ext cx="4160520" cy="868680"/>
           </a:xfrm>
           <a:prstGeom prst="rect">
             <a:avLst/>
@@ -4407,17 +4884,17 @@
           <a:p>
             <a:pPr algn="l">
               <a:spcAft>
-                <a:spcPts val="500"/>
+                <a:spcPts val="300"/>
               </a:spcAft>
             </a:pPr>
             <a:r>
               <a:rPr sz="1500" b="1" i="0">
                 <a:solidFill>
-                  <a:srgbClr val="FFC402"/>
-                </a:solidFill>
-                <a:latin typeface="Arial"/>
-              </a:rPr>
-              <a:t>Concept map</a:t>
+                  <a:srgbClr val="0C2B45"/>
+                </a:solidFill>
+                <a:latin typeface="Cambria"/>
+              </a:rPr>
+              <a:t>Bring anything</a:t>
             </a:r>
           </a:p>
           <a:p>
@@ -4427,14 +4904,13 @@
               </a:spcAft>
             </a:pPr>
             <a:r>
-              <a:rPr sz="1100" b="0" i="0">
-                <a:solidFill>
-                  <a:srgbClr val="F2E9D8"/>
+              <a:rPr sz="1200" b="0" i="0">
+                <a:solidFill>
+                  <a:srgbClr val="808285"/>
                 </a:solidFill>
                 <a:latin typeface="Calibri"/>
               </a:rPr>
-              <a:t>Ideas + VERBATIM
-source quotes</a:t>
+              <a:t>A PDF, a policy, an article. Thirty seconds later it is a journey.</a:t>
             </a:r>
           </a:p>
         </p:txBody>
@@ -4447,8 +4923,8 @@
         </p:nvSpPr>
         <p:spPr>
           <a:xfrm>
-            <a:off x="5961888" y="2487168"/>
-            <a:ext cx="274320" cy="365760"/>
+            <a:off x="6263640" y="4114800"/>
+            <a:ext cx="457200" cy="530352"/>
           </a:xfrm>
           <a:prstGeom prst="rect">
             <a:avLst/>
@@ -4461,79 +4937,33 @@
           </a:bodyPr>
           <a:lstStyle/>
           <a:p>
-            <a:pPr algn="ctr">
-              <a:spcAft>
-                <a:spcPts val="400"/>
-              </a:spcAft>
-            </a:pPr>
-            <a:r>
-              <a:rPr sz="1600" b="0" i="0">
-                <a:solidFill>
-                  <a:srgbClr val="A99A7C"/>
-                </a:solidFill>
-                <a:latin typeface="Calibri"/>
-              </a:rPr>
-              <a:t>▶</a:t>
-            </a:r>
-          </a:p>
-        </p:txBody>
-      </p:sp>
-      <p:sp>
-        <p:nvSpPr>
-          <p:cNvPr id="11" name="Rectangle 10"/>
-          <p:cNvSpPr/>
-          <p:nvPr/>
-        </p:nvSpPr>
-        <p:spPr>
-          <a:xfrm>
-            <a:off x="6263640" y="1965960"/>
-            <a:ext cx="2423160" cy="1371600"/>
-          </a:xfrm>
-          <a:prstGeom prst="rect">
-            <a:avLst/>
-          </a:prstGeom>
-          <a:solidFill>
-            <a:srgbClr val="1A202B"/>
-          </a:solidFill>
-          <a:ln w="25400">
-            <a:solidFill>
-              <a:srgbClr val="E6006E"/>
-            </a:solidFill>
-          </a:ln>
-          <a:effectLst/>
-        </p:spPr>
-        <p:style>
-          <a:lnRef idx="1">
-            <a:schemeClr val="accent1"/>
-          </a:lnRef>
-          <a:fillRef idx="3">
-            <a:schemeClr val="accent1"/>
-          </a:fillRef>
-          <a:effectRef idx="2">
-            <a:schemeClr val="accent1"/>
-          </a:effectRef>
-          <a:fontRef idx="minor">
-            <a:schemeClr val="lt1"/>
-          </a:fontRef>
-        </p:style>
-        <p:txBody>
-          <a:bodyPr rtlCol="0" anchor="ctr"/>
-          <a:lstStyle/>
-          <a:p>
-            <a:pPr algn="ctr"/>
-          </a:p>
-        </p:txBody>
-      </p:sp>
-      <p:sp>
-        <p:nvSpPr>
-          <p:cNvPr id="12" name="TextBox 11"/>
+            <a:pPr algn="l">
+              <a:spcAft>
+                <a:spcPts val="500"/>
+              </a:spcAft>
+            </a:pPr>
+            <a:r>
+              <a:rPr sz="2600" b="1" i="0">
+                <a:solidFill>
+                  <a:srgbClr val="E6E7E8"/>
+                </a:solidFill>
+                <a:latin typeface="Cambria"/>
+              </a:rPr>
+              <a:t>2</a:t>
+            </a:r>
+          </a:p>
+        </p:txBody>
+      </p:sp>
+      <p:sp>
+        <p:nvSpPr>
+          <p:cNvPr id="11" name="TextBox 10"/>
           <p:cNvSpPr txBox="1"/>
           <p:nvPr/>
         </p:nvSpPr>
         <p:spPr>
           <a:xfrm>
-            <a:off x="6464807" y="2176272"/>
-            <a:ext cx="2011680" cy="1005840"/>
+            <a:off x="6784848" y="4187952"/>
+            <a:ext cx="4160520" cy="868680"/>
           </a:xfrm>
           <a:prstGeom prst="rect">
             <a:avLst/>
@@ -4548,17 +4978,17 @@
           <a:p>
             <a:pPr algn="l">
               <a:spcAft>
-                <a:spcPts val="500"/>
+                <a:spcPts val="300"/>
               </a:spcAft>
             </a:pPr>
             <a:r>
               <a:rPr sz="1500" b="1" i="0">
                 <a:solidFill>
-                  <a:srgbClr val="E6006E"/>
-                </a:solidFill>
-                <a:latin typeface="Arial"/>
-              </a:rPr>
-              <a:t>Learning loop</a:t>
+                  <a:srgbClr val="0C2B45"/>
+                </a:solidFill>
+                <a:latin typeface="Cambria"/>
+              </a:rPr>
+              <a:t>Play, don’t read</a:t>
             </a:r>
           </a:p>
           <a:p>
@@ -4568,28 +4998,27 @@
               </a:spcAft>
             </a:pPr>
             <a:r>
-              <a:rPr sz="1100" b="0" i="0">
-                <a:solidFill>
-                  <a:srgbClr val="F2E9D8"/>
+              <a:rPr sz="1200" b="0" i="0">
+                <a:solidFill>
+                  <a:srgbClr val="808285"/>
                 </a:solidFill>
                 <a:latin typeface="Calibri"/>
               </a:rPr>
-              <a:t>Claude Opus 5
-structured output</a:t>
-            </a:r>
-          </a:p>
-        </p:txBody>
-      </p:sp>
-      <p:sp>
-        <p:nvSpPr>
-          <p:cNvPr id="13" name="TextBox 12"/>
+              <a:t>Missions, role-play and puzzles — in English or Urdu, typed or spoken.</a:t>
+            </a:r>
+          </a:p>
+        </p:txBody>
+      </p:sp>
+      <p:sp>
+        <p:nvSpPr>
+          <p:cNvPr id="12" name="TextBox 11"/>
           <p:cNvSpPr txBox="1"/>
           <p:nvPr/>
         </p:nvSpPr>
         <p:spPr>
           <a:xfrm>
-            <a:off x="8750808" y="2487168"/>
-            <a:ext cx="274320" cy="365760"/>
+            <a:off x="6263640" y="5138928"/>
+            <a:ext cx="457200" cy="530352"/>
           </a:xfrm>
           <a:prstGeom prst="rect">
             <a:avLst/>
@@ -4602,79 +5031,33 @@
           </a:bodyPr>
           <a:lstStyle/>
           <a:p>
-            <a:pPr algn="ctr">
-              <a:spcAft>
-                <a:spcPts val="400"/>
-              </a:spcAft>
-            </a:pPr>
-            <a:r>
-              <a:rPr sz="1600" b="0" i="0">
-                <a:solidFill>
-                  <a:srgbClr val="A99A7C"/>
-                </a:solidFill>
-                <a:latin typeface="Calibri"/>
-              </a:rPr>
-              <a:t>▶</a:t>
-            </a:r>
-          </a:p>
-        </p:txBody>
-      </p:sp>
-      <p:sp>
-        <p:nvSpPr>
-          <p:cNvPr id="14" name="Rectangle 13"/>
-          <p:cNvSpPr/>
-          <p:nvPr/>
-        </p:nvSpPr>
-        <p:spPr>
-          <a:xfrm>
-            <a:off x="9052559" y="1965960"/>
-            <a:ext cx="2423160" cy="1371600"/>
-          </a:xfrm>
-          <a:prstGeom prst="rect">
-            <a:avLst/>
-          </a:prstGeom>
-          <a:solidFill>
-            <a:srgbClr val="1A202B"/>
-          </a:solidFill>
-          <a:ln w="25400">
-            <a:solidFill>
-              <a:srgbClr val="00A878"/>
-            </a:solidFill>
-          </a:ln>
-          <a:effectLst/>
-        </p:spPr>
-        <p:style>
-          <a:lnRef idx="1">
-            <a:schemeClr val="accent1"/>
-          </a:lnRef>
-          <a:fillRef idx="3">
-            <a:schemeClr val="accent1"/>
-          </a:fillRef>
-          <a:effectRef idx="2">
-            <a:schemeClr val="accent1"/>
-          </a:effectRef>
-          <a:fontRef idx="minor">
-            <a:schemeClr val="lt1"/>
-          </a:fontRef>
-        </p:style>
-        <p:txBody>
-          <a:bodyPr rtlCol="0" anchor="ctr"/>
-          <a:lstStyle/>
-          <a:p>
-            <a:pPr algn="ctr"/>
-          </a:p>
-        </p:txBody>
-      </p:sp>
-      <p:sp>
-        <p:nvSpPr>
-          <p:cNvPr id="15" name="TextBox 14"/>
+            <a:pPr algn="l">
+              <a:spcAft>
+                <a:spcPts val="500"/>
+              </a:spcAft>
+            </a:pPr>
+            <a:r>
+              <a:rPr sz="2600" b="1" i="0">
+                <a:solidFill>
+                  <a:srgbClr val="E6E7E8"/>
+                </a:solidFill>
+                <a:latin typeface="Cambria"/>
+              </a:rPr>
+              <a:t>3</a:t>
+            </a:r>
+          </a:p>
+        </p:txBody>
+      </p:sp>
+      <p:sp>
+        <p:nvSpPr>
+          <p:cNvPr id="13" name="TextBox 12"/>
           <p:cNvSpPr txBox="1"/>
           <p:nvPr/>
         </p:nvSpPr>
         <p:spPr>
           <a:xfrm>
-            <a:off x="9253728" y="2176272"/>
-            <a:ext cx="2011680" cy="1005840"/>
+            <a:off x="6784848" y="5212080"/>
+            <a:ext cx="4160520" cy="868680"/>
           </a:xfrm>
           <a:prstGeom prst="rect">
             <a:avLst/>
@@ -4689,17 +5072,17 @@
           <a:p>
             <a:pPr algn="l">
               <a:spcAft>
-                <a:spcPts val="500"/>
+                <a:spcPts val="300"/>
               </a:spcAft>
             </a:pPr>
             <a:r>
               <a:rPr sz="1500" b="1" i="0">
                 <a:solidFill>
-                  <a:srgbClr val="00A878"/>
-                </a:solidFill>
-                <a:latin typeface="Arial"/>
-              </a:rPr>
-              <a:t>Learner state</a:t>
+                  <a:srgbClr val="0C2B45"/>
+                </a:solidFill>
+                <a:latin typeface="Cambria"/>
+              </a:rPr>
+              <a:t>Progress, not scores</a:t>
             </a:r>
           </a:p>
           <a:p>
@@ -4709,72 +5092,27 @@
               </a:spcAft>
             </a:pPr>
             <a:r>
-              <a:rPr sz="1100" b="0" i="0">
-                <a:solidFill>
-                  <a:srgbClr val="F2E9D8"/>
+              <a:rPr sz="1200" b="0" i="0">
+                <a:solidFill>
+                  <a:srgbClr val="808285"/>
                 </a:solidFill>
                 <a:latin typeface="Calibri"/>
               </a:rPr>
-              <a:t>Mastery, XP, streaks,
-unlocks</a:t>
-            </a:r>
-          </a:p>
-        </p:txBody>
-      </p:sp>
-      <p:sp>
-        <p:nvSpPr>
-          <p:cNvPr id="16" name="Rectangle 15"/>
-          <p:cNvSpPr/>
-          <p:nvPr/>
-        </p:nvSpPr>
-        <p:spPr>
-          <a:xfrm>
-            <a:off x="685800" y="3611880"/>
-            <a:ext cx="4983480" cy="914400"/>
-          </a:xfrm>
-          <a:prstGeom prst="rect">
-            <a:avLst/>
-          </a:prstGeom>
-          <a:solidFill>
-            <a:srgbClr val="262E3C"/>
-          </a:solidFill>
-          <a:ln>
-            <a:noFill/>
-          </a:ln>
-          <a:effectLst/>
-        </p:spPr>
-        <p:style>
-          <a:lnRef idx="1">
-            <a:schemeClr val="accent1"/>
-          </a:lnRef>
-          <a:fillRef idx="3">
-            <a:schemeClr val="accent1"/>
-          </a:fillRef>
-          <a:effectRef idx="2">
-            <a:schemeClr val="accent1"/>
-          </a:effectRef>
-          <a:fontRef idx="minor">
-            <a:schemeClr val="lt1"/>
-          </a:fontRef>
-        </p:style>
-        <p:txBody>
-          <a:bodyPr rtlCol="0" anchor="ctr"/>
-          <a:lstStyle/>
-          <a:p>
-            <a:pPr algn="ctr"/>
-          </a:p>
-        </p:txBody>
-      </p:sp>
-      <p:sp>
-        <p:nvSpPr>
-          <p:cNvPr id="17" name="TextBox 16"/>
+              <a:t>Concepts unlock as understanding grows. No pass mark anywhere.</a:t>
+            </a:r>
+          </a:p>
+        </p:txBody>
+      </p:sp>
+      <p:sp>
+        <p:nvSpPr>
+          <p:cNvPr id="14" name="TextBox 13"/>
           <p:cNvSpPr txBox="1"/>
           <p:nvPr/>
         </p:nvSpPr>
         <p:spPr>
           <a:xfrm>
-            <a:off x="960120" y="3822191"/>
-            <a:ext cx="4480560" cy="548640"/>
+            <a:off x="822960" y="6345936"/>
+            <a:ext cx="8229600" cy="237744"/>
           </a:xfrm>
           <a:prstGeom prst="rect">
             <a:avLst/>
@@ -4789,91 +5127,31 @@
           <a:p>
             <a:pPr algn="l">
               <a:spcAft>
-                <a:spcPts val="300"/>
-              </a:spcAft>
-            </a:pPr>
-            <a:r>
-              <a:rPr sz="1100" b="1" i="0">
-                <a:solidFill>
-                  <a:srgbClr val="FFC402"/>
+                <a:spcPts val="500"/>
+              </a:spcAft>
+            </a:pPr>
+            <a:r>
+              <a:rPr sz="850" b="0" i="0">
+                <a:solidFill>
+                  <a:srgbClr val="808285"/>
                 </a:solidFill>
                 <a:latin typeface="Calibri"/>
               </a:rPr>
-              <a:t>LEARNER EXPERIENCE</a:t>
-            </a:r>
-          </a:p>
-          <a:p>
-            <a:pPr algn="l">
-              <a:spcAft>
-                <a:spcPts val="0"/>
-              </a:spcAft>
-            </a:pPr>
-            <a:r>
-              <a:rPr sz="1200" b="0" i="0">
-                <a:solidFill>
-                  <a:srgbClr val="F2E9D8"/>
-                </a:solidFill>
-                <a:latin typeface="Calibri"/>
-              </a:rPr>
-              <a:t>Board, conversation, voice in English &amp; Urdu</a:t>
-            </a:r>
-          </a:p>
-        </p:txBody>
-      </p:sp>
-      <p:sp>
-        <p:nvSpPr>
-          <p:cNvPr id="18" name="Rectangle 17"/>
-          <p:cNvSpPr/>
-          <p:nvPr/>
-        </p:nvSpPr>
-        <p:spPr>
-          <a:xfrm>
-            <a:off x="5989320" y="3611880"/>
-            <a:ext cx="4983480" cy="914400"/>
-          </a:xfrm>
-          <a:prstGeom prst="rect">
-            <a:avLst/>
-          </a:prstGeom>
-          <a:solidFill>
-            <a:srgbClr val="262E3C"/>
-          </a:solidFill>
-          <a:ln>
-            <a:noFill/>
-          </a:ln>
-          <a:effectLst/>
-        </p:spPr>
-        <p:style>
-          <a:lnRef idx="1">
-            <a:schemeClr val="accent1"/>
-          </a:lnRef>
-          <a:fillRef idx="3">
-            <a:schemeClr val="accent1"/>
-          </a:fillRef>
-          <a:effectRef idx="2">
-            <a:schemeClr val="accent1"/>
-          </a:effectRef>
-          <a:fontRef idx="minor">
-            <a:schemeClr val="lt1"/>
-          </a:fontRef>
-        </p:style>
-        <p:txBody>
-          <a:bodyPr rtlCol="0" anchor="ctr"/>
-          <a:lstStyle/>
-          <a:p>
-            <a:pPr algn="ctr"/>
-          </a:p>
-        </p:txBody>
-      </p:sp>
-      <p:sp>
-        <p:nvSpPr>
-          <p:cNvPr id="19" name="TextBox 18"/>
+              <a:t>Ayesha Faheem  ·  Digital HR &amp; AI Manager assignment  ·  prototype for assessment</a:t>
+            </a:r>
+          </a:p>
+        </p:txBody>
+      </p:sp>
+      <p:sp>
+        <p:nvSpPr>
+          <p:cNvPr id="15" name="TextBox 14"/>
           <p:cNvSpPr txBox="1"/>
           <p:nvPr/>
         </p:nvSpPr>
         <p:spPr>
           <a:xfrm>
-            <a:off x="6263640" y="3822191"/>
-            <a:ext cx="4480560" cy="548640"/>
+            <a:off x="10058400" y="6345936"/>
+            <a:ext cx="1307592" cy="237744"/>
           </a:xfrm>
           <a:prstGeom prst="rect">
             <a:avLst/>
@@ -4886,449 +5164,19 @@
           </a:bodyPr>
           <a:lstStyle/>
           <a:p>
-            <a:pPr algn="l">
-              <a:spcAft>
-                <a:spcPts val="300"/>
-              </a:spcAft>
-            </a:pPr>
-            <a:r>
-              <a:rPr sz="1100" b="1" i="0">
-                <a:solidFill>
-                  <a:srgbClr val="00B4D8"/>
+            <a:pPr algn="r">
+              <a:spcAft>
+                <a:spcPts val="500"/>
+              </a:spcAft>
+            </a:pPr>
+            <a:r>
+              <a:rPr sz="850" b="0" i="0">
+                <a:solidFill>
+                  <a:srgbClr val="808285"/>
                 </a:solidFill>
                 <a:latin typeface="Calibri"/>
               </a:rPr>
-              <a:t>CONTROL ROOM</a:t>
-            </a:r>
-          </a:p>
-          <a:p>
-            <a:pPr algn="l">
-              <a:spcAft>
-                <a:spcPts val="0"/>
-              </a:spcAft>
-            </a:pPr>
-            <a:r>
-              <a:rPr sz="1200" b="0" i="0">
-                <a:solidFill>
-                  <a:srgbClr val="F2E9D8"/>
-                </a:solidFill>
-                <a:latin typeface="Calibri"/>
-              </a:rPr>
-              <a:t>Analytics, evidence feed, configuration, logs</a:t>
-            </a:r>
-          </a:p>
-        </p:txBody>
-      </p:sp>
-      <p:sp>
-        <p:nvSpPr>
-          <p:cNvPr id="20" name="TextBox 19"/>
-          <p:cNvSpPr txBox="1"/>
-          <p:nvPr/>
-        </p:nvSpPr>
-        <p:spPr>
-          <a:xfrm>
-            <a:off x="685800" y="4773168"/>
-            <a:ext cx="10789920" cy="274320"/>
-          </a:xfrm>
-          <a:prstGeom prst="rect">
-            <a:avLst/>
-          </a:prstGeom>
-          <a:noFill/>
-        </p:spPr>
-        <p:txBody>
-          <a:bodyPr wrap="square" lIns="0" rIns="0" tIns="0" bIns="0" anchor="t">
-            <a:spAutoFit/>
-          </a:bodyPr>
-          <a:lstStyle/>
-          <a:p>
-            <a:pPr algn="l">
-              <a:spcAft>
-                <a:spcPts val="400"/>
-              </a:spcAft>
-            </a:pPr>
-            <a:r>
-              <a:rPr sz="1100" b="1" i="0">
-                <a:solidFill>
-                  <a:srgbClr val="A99A7C"/>
-                </a:solidFill>
-                <a:latin typeface="Calibri"/>
-              </a:rPr>
-              <a:t>THREE DECISIONS WORTH DEFENDING</a:t>
-            </a:r>
-          </a:p>
-        </p:txBody>
-      </p:sp>
-      <p:sp>
-        <p:nvSpPr>
-          <p:cNvPr id="21" name="Rectangle 20"/>
-          <p:cNvSpPr/>
-          <p:nvPr/>
-        </p:nvSpPr>
-        <p:spPr>
-          <a:xfrm>
-            <a:off x="685800" y="5102352"/>
-            <a:ext cx="3429000" cy="1097280"/>
-          </a:xfrm>
-          <a:prstGeom prst="rect">
-            <a:avLst/>
-          </a:prstGeom>
-          <a:solidFill>
-            <a:srgbClr val="1A202B"/>
-          </a:solidFill>
-          <a:ln>
-            <a:noFill/>
-          </a:ln>
-          <a:effectLst/>
-        </p:spPr>
-        <p:style>
-          <a:lnRef idx="1">
-            <a:schemeClr val="accent1"/>
-          </a:lnRef>
-          <a:fillRef idx="3">
-            <a:schemeClr val="accent1"/>
-          </a:fillRef>
-          <a:effectRef idx="2">
-            <a:schemeClr val="accent1"/>
-          </a:effectRef>
-          <a:fontRef idx="minor">
-            <a:schemeClr val="lt1"/>
-          </a:fontRef>
-        </p:style>
-        <p:txBody>
-          <a:bodyPr rtlCol="0" anchor="ctr"/>
-          <a:lstStyle/>
-          <a:p>
-            <a:pPr algn="ctr"/>
-          </a:p>
-        </p:txBody>
-      </p:sp>
-      <p:sp>
-        <p:nvSpPr>
-          <p:cNvPr id="22" name="TextBox 21"/>
-          <p:cNvSpPr txBox="1"/>
-          <p:nvPr/>
-        </p:nvSpPr>
-        <p:spPr>
-          <a:xfrm>
-            <a:off x="886968" y="5266944"/>
-            <a:ext cx="3063240" cy="868680"/>
-          </a:xfrm>
-          <a:prstGeom prst="rect">
-            <a:avLst/>
-          </a:prstGeom>
-          <a:noFill/>
-        </p:spPr>
-        <p:txBody>
-          <a:bodyPr wrap="square" lIns="0" rIns="0" tIns="0" bIns="0" anchor="t">
-            <a:spAutoFit/>
-          </a:bodyPr>
-          <a:lstStyle/>
-          <a:p>
-            <a:pPr algn="l">
-              <a:spcAft>
-                <a:spcPts val="300"/>
-              </a:spcAft>
-            </a:pPr>
-            <a:r>
-              <a:rPr sz="1200" b="1" i="0">
-                <a:solidFill>
-                  <a:srgbClr val="F2E9D8"/>
-                </a:solidFill>
-                <a:latin typeface="Calibri"/>
-              </a:rPr>
-              <a:t>No vector database</a:t>
-            </a:r>
-          </a:p>
-          <a:p>
-            <a:pPr algn="l">
-              <a:spcAft>
-                <a:spcPts val="0"/>
-              </a:spcAft>
-            </a:pPr>
-            <a:r>
-              <a:rPr sz="1000" b="0" i="0">
-                <a:solidFill>
-                  <a:srgbClr val="A99A7C"/>
-                </a:solidFill>
-                <a:latin typeface="Calibri"/>
-              </a:rPr>
-              <a:t>The panel uploads one document; it fits in context. Grounding is shown as clickable citations instead of hidden in a retrieval step.</a:t>
-            </a:r>
-          </a:p>
-        </p:txBody>
-      </p:sp>
-      <p:sp>
-        <p:nvSpPr>
-          <p:cNvPr id="23" name="Rectangle 22"/>
-          <p:cNvSpPr/>
-          <p:nvPr/>
-        </p:nvSpPr>
-        <p:spPr>
-          <a:xfrm>
-            <a:off x="4343400" y="5102352"/>
-            <a:ext cx="3429000" cy="1097280"/>
-          </a:xfrm>
-          <a:prstGeom prst="rect">
-            <a:avLst/>
-          </a:prstGeom>
-          <a:solidFill>
-            <a:srgbClr val="1A202B"/>
-          </a:solidFill>
-          <a:ln>
-            <a:noFill/>
-          </a:ln>
-          <a:effectLst/>
-        </p:spPr>
-        <p:style>
-          <a:lnRef idx="1">
-            <a:schemeClr val="accent1"/>
-          </a:lnRef>
-          <a:fillRef idx="3">
-            <a:schemeClr val="accent1"/>
-          </a:fillRef>
-          <a:effectRef idx="2">
-            <a:schemeClr val="accent1"/>
-          </a:effectRef>
-          <a:fontRef idx="minor">
-            <a:schemeClr val="lt1"/>
-          </a:fontRef>
-        </p:style>
-        <p:txBody>
-          <a:bodyPr rtlCol="0" anchor="ctr"/>
-          <a:lstStyle/>
-          <a:p>
-            <a:pPr algn="ctr"/>
-          </a:p>
-        </p:txBody>
-      </p:sp>
-      <p:sp>
-        <p:nvSpPr>
-          <p:cNvPr id="24" name="TextBox 23"/>
-          <p:cNvSpPr txBox="1"/>
-          <p:nvPr/>
-        </p:nvSpPr>
-        <p:spPr>
-          <a:xfrm>
-            <a:off x="4544568" y="5266944"/>
-            <a:ext cx="3063240" cy="868680"/>
-          </a:xfrm>
-          <a:prstGeom prst="rect">
-            <a:avLst/>
-          </a:prstGeom>
-          <a:noFill/>
-        </p:spPr>
-        <p:txBody>
-          <a:bodyPr wrap="square" lIns="0" rIns="0" tIns="0" bIns="0" anchor="t">
-            <a:spAutoFit/>
-          </a:bodyPr>
-          <a:lstStyle/>
-          <a:p>
-            <a:pPr algn="l">
-              <a:spcAft>
-                <a:spcPts val="300"/>
-              </a:spcAft>
-            </a:pPr>
-            <a:r>
-              <a:rPr sz="1200" b="1" i="0">
-                <a:solidFill>
-                  <a:srgbClr val="F2E9D8"/>
-                </a:solidFill>
-                <a:latin typeface="Calibri"/>
-              </a:rPr>
-              <a:t>One deployable service</a:t>
-            </a:r>
-          </a:p>
-          <a:p>
-            <a:pPr algn="l">
-              <a:spcAft>
-                <a:spcPts val="0"/>
-              </a:spcAft>
-            </a:pPr>
-            <a:r>
-              <a:rPr sz="1000" b="0" i="0">
-                <a:solidFill>
-                  <a:srgbClr val="A99A7C"/>
-                </a:solidFill>
-                <a:latin typeface="Calibri"/>
-              </a:rPr>
-              <a:t>FastAPI serves the API and the pages. No build step, no second deploy, no CORS — fewer things to fail live.</a:t>
-            </a:r>
-          </a:p>
-        </p:txBody>
-      </p:sp>
-      <p:sp>
-        <p:nvSpPr>
-          <p:cNvPr id="25" name="Rectangle 24"/>
-          <p:cNvSpPr/>
-          <p:nvPr/>
-        </p:nvSpPr>
-        <p:spPr>
-          <a:xfrm>
-            <a:off x="8001000" y="5102352"/>
-            <a:ext cx="3429000" cy="1097280"/>
-          </a:xfrm>
-          <a:prstGeom prst="rect">
-            <a:avLst/>
-          </a:prstGeom>
-          <a:solidFill>
-            <a:srgbClr val="1A202B"/>
-          </a:solidFill>
-          <a:ln>
-            <a:noFill/>
-          </a:ln>
-          <a:effectLst/>
-        </p:spPr>
-        <p:style>
-          <a:lnRef idx="1">
-            <a:schemeClr val="accent1"/>
-          </a:lnRef>
-          <a:fillRef idx="3">
-            <a:schemeClr val="accent1"/>
-          </a:fillRef>
-          <a:effectRef idx="2">
-            <a:schemeClr val="accent1"/>
-          </a:effectRef>
-          <a:fontRef idx="minor">
-            <a:schemeClr val="lt1"/>
-          </a:fontRef>
-        </p:style>
-        <p:txBody>
-          <a:bodyPr rtlCol="0" anchor="ctr"/>
-          <a:lstStyle/>
-          <a:p>
-            <a:pPr algn="ctr"/>
-          </a:p>
-        </p:txBody>
-      </p:sp>
-      <p:sp>
-        <p:nvSpPr>
-          <p:cNvPr id="26" name="TextBox 25"/>
-          <p:cNvSpPr txBox="1"/>
-          <p:nvPr/>
-        </p:nvSpPr>
-        <p:spPr>
-          <a:xfrm>
-            <a:off x="8202168" y="5266944"/>
-            <a:ext cx="3063240" cy="868680"/>
-          </a:xfrm>
-          <a:prstGeom prst="rect">
-            <a:avLst/>
-          </a:prstGeom>
-          <a:noFill/>
-        </p:spPr>
-        <p:txBody>
-          <a:bodyPr wrap="square" lIns="0" rIns="0" tIns="0" bIns="0" anchor="t">
-            <a:spAutoFit/>
-          </a:bodyPr>
-          <a:lstStyle/>
-          <a:p>
-            <a:pPr algn="l">
-              <a:spcAft>
-                <a:spcPts val="300"/>
-              </a:spcAft>
-            </a:pPr>
-            <a:r>
-              <a:rPr sz="1200" b="1" i="0">
-                <a:solidFill>
-                  <a:srgbClr val="F2E9D8"/>
-                </a:solidFill>
-                <a:latin typeface="Calibri"/>
-              </a:rPr>
-              <a:t>Structured outputs</a:t>
-            </a:r>
-          </a:p>
-          <a:p>
-            <a:pPr algn="l">
-              <a:spcAft>
-                <a:spcPts val="0"/>
-              </a:spcAft>
-            </a:pPr>
-            <a:r>
-              <a:rPr sz="1000" b="0" i="0">
-                <a:solidFill>
-                  <a:srgbClr val="A99A7C"/>
-                </a:solidFill>
-                <a:latin typeface="Calibri"/>
-              </a:rPr>
-              <a:t>Every model reply is schema-validated, so a malformed response cannot break the demo mid-sentence.</a:t>
-            </a:r>
-          </a:p>
-        </p:txBody>
-      </p:sp>
-      <p:sp>
-        <p:nvSpPr>
-          <p:cNvPr id="27" name="TextBox 26"/>
-          <p:cNvSpPr txBox="1"/>
-          <p:nvPr/>
-        </p:nvSpPr>
-        <p:spPr>
-          <a:xfrm>
-            <a:off x="685800" y="6327648"/>
-            <a:ext cx="7315200" cy="274320"/>
-          </a:xfrm>
-          <a:prstGeom prst="rect">
-            <a:avLst/>
-          </a:prstGeom>
-          <a:noFill/>
-        </p:spPr>
-        <p:txBody>
-          <a:bodyPr wrap="square" lIns="0" rIns="0" tIns="0" bIns="0" anchor="t">
-            <a:spAutoFit/>
-          </a:bodyPr>
-          <a:lstStyle/>
-          <a:p>
-            <a:pPr algn="l">
-              <a:spcAft>
-                <a:spcPts val="400"/>
-              </a:spcAft>
-            </a:pPr>
-            <a:r>
-              <a:rPr sz="900" b="0" i="0">
-                <a:solidFill>
-                  <a:srgbClr val="A99A7C"/>
-                </a:solidFill>
-                <a:latin typeface="Calibri"/>
-              </a:rPr>
-              <a:t>Rehnuma  ·  candidate prototype for United Bank Limited</a:t>
-            </a:r>
-          </a:p>
-        </p:txBody>
-      </p:sp>
-      <p:sp>
-        <p:nvSpPr>
-          <p:cNvPr id="28" name="TextBox 27"/>
-          <p:cNvSpPr txBox="1"/>
-          <p:nvPr/>
-        </p:nvSpPr>
-        <p:spPr>
-          <a:xfrm>
-            <a:off x="10332720" y="6327648"/>
-            <a:ext cx="1143000" cy="274320"/>
-          </a:xfrm>
-          <a:prstGeom prst="rect">
-            <a:avLst/>
-          </a:prstGeom>
-          <a:noFill/>
-        </p:spPr>
-        <p:txBody>
-          <a:bodyPr wrap="square" lIns="0" rIns="0" tIns="0" bIns="0" anchor="t">
-            <a:spAutoFit/>
-          </a:bodyPr>
-          <a:lstStyle/>
-          <a:p>
-            <a:pPr algn="r">
-              <a:spcAft>
-                <a:spcPts val="400"/>
-              </a:spcAft>
-            </a:pPr>
-            <a:r>
-              <a:rPr sz="900" b="0" i="0">
-                <a:solidFill>
-                  <a:srgbClr val="A99A7C"/>
-                </a:solidFill>
-                <a:latin typeface="Calibri"/>
-              </a:rPr>
-              <a:t>2 / 5</a:t>
+              <a:t>2 / 5</a:t>
             </a:r>
           </a:p>
         </p:txBody>
@@ -5366,7 +5214,7 @@
             <a:avLst/>
           </a:prstGeom>
           <a:solidFill>
-            <a:srgbClr val="10131A"/>
+            <a:srgbClr val="FFFFFF"/>
           </a:solidFill>
           <a:ln>
             <a:noFill/>
@@ -5403,8 +5251,8 @@
         </p:nvSpPr>
         <p:spPr>
           <a:xfrm>
-            <a:off x="685800" y="475488"/>
-            <a:ext cx="10789920" cy="274320"/>
+            <a:off x="822960" y="658368"/>
+            <a:ext cx="10545775" cy="237744"/>
           </a:xfrm>
           <a:prstGeom prst="rect">
             <a:avLst/>
@@ -5419,17 +5267,17 @@
           <a:p>
             <a:pPr algn="l">
               <a:spcAft>
-                <a:spcPts val="400"/>
-              </a:spcAft>
-            </a:pPr>
-            <a:r>
-              <a:rPr sz="1100" b="1" i="0">
-                <a:solidFill>
-                  <a:srgbClr val="A99A7C"/>
+                <a:spcPts val="500"/>
+              </a:spcAft>
+            </a:pPr>
+            <a:r>
+              <a:rPr sz="1050" b="1" i="0">
+                <a:solidFill>
+                  <a:srgbClr val="0083CA"/>
                 </a:solidFill>
                 <a:latin typeface="Calibri"/>
               </a:rPr>
-              <a:t>SECURITY &amp; PRIVACY</a:t>
+              <a:t>HOW IT WORKS</a:t>
             </a:r>
           </a:p>
         </p:txBody>
@@ -5442,8 +5290,8 @@
         </p:nvSpPr>
         <p:spPr>
           <a:xfrm>
-            <a:off x="685800" y="786384"/>
-            <a:ext cx="10789920" cy="914400"/>
+            <a:off x="822960" y="969264"/>
+            <a:ext cx="10545775" cy="777240"/>
           </a:xfrm>
           <a:prstGeom prst="rect">
             <a:avLst/>
@@ -5458,42 +5306,121 @@
           <a:p>
             <a:pPr algn="l">
               <a:spcAft>
-                <a:spcPts val="400"/>
-              </a:spcAft>
-            </a:pPr>
-            <a:r>
-              <a:rPr sz="3800" b="1" i="0">
-                <a:solidFill>
-                  <a:srgbClr val="F2E9D8"/>
-                </a:solidFill>
-                <a:latin typeface="Arial"/>
-              </a:rPr>
-              <a:t>Built for a bank</a:t>
-            </a:r>
-          </a:p>
-        </p:txBody>
-      </p:sp>
-      <p:sp>
-        <p:nvSpPr>
-          <p:cNvPr id="5" name="Rectangle 4"/>
+                <a:spcPts val="500"/>
+              </a:spcAft>
+            </a:pPr>
+            <a:r>
+              <a:rPr sz="4000" b="1" i="0">
+                <a:solidFill>
+                  <a:srgbClr val="0C2B45"/>
+                </a:solidFill>
+                <a:latin typeface="Cambria"/>
+              </a:rPr>
+              <a:t>Four steps, one service</a:t>
+            </a:r>
+          </a:p>
+        </p:txBody>
+      </p:sp>
+      <p:sp>
+        <p:nvSpPr>
+          <p:cNvPr id="5" name="TextBox 4"/>
+          <p:cNvSpPr txBox="1"/>
+          <p:nvPr/>
+        </p:nvSpPr>
+        <p:spPr>
+          <a:xfrm>
+            <a:off x="822960" y="1901952"/>
+            <a:ext cx="10545775" cy="749808"/>
+          </a:xfrm>
+          <a:prstGeom prst="rect">
+            <a:avLst/>
+          </a:prstGeom>
+          <a:noFill/>
+        </p:spPr>
+        <p:txBody>
+          <a:bodyPr wrap="square" lIns="0" rIns="0" tIns="0" bIns="0" anchor="t">
+            <a:spAutoFit/>
+          </a:bodyPr>
+          <a:lstStyle/>
+          <a:p>
+            <a:pPr algn="l">
+              <a:lnSpc>
+                <a:spcPct val="115000"/>
+              </a:lnSpc>
+              <a:spcAft>
+                <a:spcPts val="500"/>
+              </a:spcAft>
+            </a:pPr>
+            <a:r>
+              <a:rPr sz="1800" b="0" i="0">
+                <a:solidFill>
+                  <a:srgbClr val="0F5885"/>
+                </a:solidFill>
+                <a:latin typeface="Cambria"/>
+              </a:rPr>
+              <a:t>It reads your document, notes the ideas inside it, then holds a conversation about them — keeping a running picture of what you have understood.</a:t>
+            </a:r>
+          </a:p>
+        </p:txBody>
+      </p:sp>
+      <p:sp>
+        <p:nvSpPr>
+          <p:cNvPr id="6" name="TextBox 5"/>
+          <p:cNvSpPr txBox="1"/>
+          <p:nvPr/>
+        </p:nvSpPr>
+        <p:spPr>
+          <a:xfrm>
+            <a:off x="822960" y="2926080"/>
+            <a:ext cx="365760" cy="310896"/>
+          </a:xfrm>
+          <a:prstGeom prst="rect">
+            <a:avLst/>
+          </a:prstGeom>
+          <a:noFill/>
+        </p:spPr>
+        <p:txBody>
+          <a:bodyPr wrap="square" lIns="0" rIns="0" tIns="0" bIns="0" anchor="t">
+            <a:spAutoFit/>
+          </a:bodyPr>
+          <a:lstStyle/>
+          <a:p>
+            <a:pPr algn="l">
+              <a:spcAft>
+                <a:spcPts val="500"/>
+              </a:spcAft>
+            </a:pPr>
+            <a:r>
+              <a:rPr sz="1300" b="1" i="0">
+                <a:solidFill>
+                  <a:srgbClr val="0083CA"/>
+                </a:solidFill>
+                <a:latin typeface="Calibri"/>
+              </a:rPr>
+              <a:t>01</a:t>
+            </a:r>
+          </a:p>
+        </p:txBody>
+      </p:sp>
+      <p:sp>
+        <p:nvSpPr>
+          <p:cNvPr id="7" name="Rectangle 6"/>
           <p:cNvSpPr/>
           <p:nvPr/>
         </p:nvSpPr>
         <p:spPr>
           <a:xfrm>
-            <a:off x="685800" y="1965960"/>
-            <a:ext cx="5577840" cy="2331720"/>
+            <a:off x="822960" y="3273552"/>
+            <a:ext cx="2331720" cy="25603"/>
           </a:xfrm>
           <a:prstGeom prst="rect">
             <a:avLst/>
           </a:prstGeom>
           <a:solidFill>
-            <a:srgbClr val="1A202B"/>
+            <a:srgbClr val="0083CA"/>
           </a:solidFill>
-          <a:ln w="25400">
-            <a:solidFill>
-              <a:srgbClr val="E6006E"/>
-            </a:solidFill>
+          <a:ln>
+            <a:noFill/>
           </a:ln>
           <a:effectLst/>
         </p:spPr>
@@ -5521,20 +5448,130 @@
       </p:sp>
       <p:sp>
         <p:nvSpPr>
-          <p:cNvPr id="6" name="Oval 5"/>
+          <p:cNvPr id="8" name="TextBox 7"/>
+          <p:cNvSpPr txBox="1"/>
+          <p:nvPr/>
+        </p:nvSpPr>
+        <p:spPr>
+          <a:xfrm>
+            <a:off x="822960" y="3456432"/>
+            <a:ext cx="2331720" cy="1737360"/>
+          </a:xfrm>
+          <a:prstGeom prst="rect">
+            <a:avLst/>
+          </a:prstGeom>
+          <a:noFill/>
+        </p:spPr>
+        <p:txBody>
+          <a:bodyPr wrap="square" lIns="0" rIns="0" tIns="0" bIns="0" anchor="t">
+            <a:spAutoFit/>
+          </a:bodyPr>
+          <a:lstStyle/>
+          <a:p>
+            <a:pPr algn="l">
+              <a:spcAft>
+                <a:spcPts val="600"/>
+              </a:spcAft>
+            </a:pPr>
+            <a:r>
+              <a:rPr sz="1500" b="1" i="0">
+                <a:solidFill>
+                  <a:srgbClr val="0C2B45"/>
+                </a:solidFill>
+                <a:latin typeface="Cambria"/>
+              </a:rPr>
+              <a:t>Read the document</a:t>
+            </a:r>
+          </a:p>
+          <a:p>
+            <a:pPr algn="l">
+              <a:spcAft>
+                <a:spcPts val="800"/>
+              </a:spcAft>
+            </a:pPr>
+            <a:r>
+              <a:rPr sz="1200" b="0" i="0">
+                <a:solidFill>
+                  <a:srgbClr val="808285"/>
+                </a:solidFill>
+                <a:latin typeface="Calibri"/>
+              </a:rPr>
+              <a:t>Text is extracted from the PDF and cleaned.</a:t>
+            </a:r>
+          </a:p>
+          <a:p>
+            <a:pPr algn="l">
+              <a:spcAft>
+                <a:spcPts val="0"/>
+              </a:spcAft>
+            </a:pPr>
+            <a:r>
+              <a:rPr sz="1000" b="0" i="0">
+                <a:solidFill>
+                  <a:srgbClr val="2199E8"/>
+                </a:solidFill>
+                <a:latin typeface="Calibri"/>
+              </a:rPr>
+              <a:t>PyMuPDF · capped at 60k characters</a:t>
+            </a:r>
+          </a:p>
+        </p:txBody>
+      </p:sp>
+      <p:sp>
+        <p:nvSpPr>
+          <p:cNvPr id="9" name="TextBox 8"/>
+          <p:cNvSpPr txBox="1"/>
+          <p:nvPr/>
+        </p:nvSpPr>
+        <p:spPr>
+          <a:xfrm>
+            <a:off x="3502152" y="2926080"/>
+            <a:ext cx="365760" cy="310896"/>
+          </a:xfrm>
+          <a:prstGeom prst="rect">
+            <a:avLst/>
+          </a:prstGeom>
+          <a:noFill/>
+        </p:spPr>
+        <p:txBody>
+          <a:bodyPr wrap="square" lIns="0" rIns="0" tIns="0" bIns="0" anchor="t">
+            <a:spAutoFit/>
+          </a:bodyPr>
+          <a:lstStyle/>
+          <a:p>
+            <a:pPr algn="l">
+              <a:spcAft>
+                <a:spcPts val="500"/>
+              </a:spcAft>
+            </a:pPr>
+            <a:r>
+              <a:rPr sz="1300" b="1" i="0">
+                <a:solidFill>
+                  <a:srgbClr val="0083CA"/>
+                </a:solidFill>
+                <a:latin typeface="Calibri"/>
+              </a:rPr>
+              <a:t>02</a:t>
+            </a:r>
+          </a:p>
+        </p:txBody>
+      </p:sp>
+      <p:sp>
+        <p:nvSpPr>
+          <p:cNvPr id="10" name="Rectangle 9"/>
           <p:cNvSpPr/>
           <p:nvPr/>
         </p:nvSpPr>
         <p:spPr>
           <a:xfrm>
-            <a:off x="960120" y="2212848"/>
-            <a:ext cx="566928" cy="566928"/>
-          </a:xfrm>
-          <a:prstGeom prst="ellipse">
+            <a:off x="3502152" y="3273552"/>
+            <a:ext cx="2331720" cy="25603"/>
+          </a:xfrm>
+          <a:prstGeom prst="rect">
             <a:avLst/>
           </a:prstGeom>
           <a:solidFill>
-            <a:srgbClr val="E6006E"/>
+            <a:srgbClr val="E6E7E8"/>
           </a:solidFill>
           <a:ln>
             <a:noFill/>
@@ -5565,20 +5602,130 @@
       </p:sp>
       <p:sp>
         <p:nvSpPr>
-          <p:cNvPr id="7" name="Oval 6"/>
+          <p:cNvPr id="11" name="TextBox 10"/>
+          <p:cNvSpPr txBox="1"/>
+          <p:nvPr/>
+        </p:nvSpPr>
+        <p:spPr>
+          <a:xfrm>
+            <a:off x="3502152" y="3456432"/>
+            <a:ext cx="2331720" cy="1737360"/>
+          </a:xfrm>
+          <a:prstGeom prst="rect">
+            <a:avLst/>
+          </a:prstGeom>
+          <a:noFill/>
+        </p:spPr>
+        <p:txBody>
+          <a:bodyPr wrap="square" lIns="0" rIns="0" tIns="0" bIns="0" anchor="t">
+            <a:spAutoFit/>
+          </a:bodyPr>
+          <a:lstStyle/>
+          <a:p>
+            <a:pPr algn="l">
+              <a:spcAft>
+                <a:spcPts val="600"/>
+              </a:spcAft>
+            </a:pPr>
+            <a:r>
+              <a:rPr sz="1500" b="1" i="0">
+                <a:solidFill>
+                  <a:srgbClr val="0C2B45"/>
+                </a:solidFill>
+                <a:latin typeface="Cambria"/>
+              </a:rPr>
+              <a:t>Map the ideas</a:t>
+            </a:r>
+          </a:p>
+          <a:p>
+            <a:pPr algn="l">
+              <a:spcAft>
+                <a:spcPts val="800"/>
+              </a:spcAft>
+            </a:pPr>
+            <a:r>
+              <a:rPr sz="1200" b="0" i="0">
+                <a:solidFill>
+                  <a:srgbClr val="808285"/>
+                </a:solidFill>
+                <a:latin typeface="Calibri"/>
+              </a:rPr>
+              <a:t>Each idea is stored with the exact sentences it came from.</a:t>
+            </a:r>
+          </a:p>
+          <a:p>
+            <a:pPr algn="l">
+              <a:spcAft>
+                <a:spcPts val="0"/>
+              </a:spcAft>
+            </a:pPr>
+            <a:r>
+              <a:rPr sz="1000" b="0" i="0">
+                <a:solidFill>
+                  <a:srgbClr val="2199E8"/>
+                </a:solidFill>
+                <a:latin typeface="Calibri"/>
+              </a:rPr>
+              <a:t>One Claude call · schema-validated output</a:t>
+            </a:r>
+          </a:p>
+        </p:txBody>
+      </p:sp>
+      <p:sp>
+        <p:nvSpPr>
+          <p:cNvPr id="12" name="TextBox 11"/>
+          <p:cNvSpPr txBox="1"/>
+          <p:nvPr/>
+        </p:nvSpPr>
+        <p:spPr>
+          <a:xfrm>
+            <a:off x="6181344" y="2926080"/>
+            <a:ext cx="365760" cy="310896"/>
+          </a:xfrm>
+          <a:prstGeom prst="rect">
+            <a:avLst/>
+          </a:prstGeom>
+          <a:noFill/>
+        </p:spPr>
+        <p:txBody>
+          <a:bodyPr wrap="square" lIns="0" rIns="0" tIns="0" bIns="0" anchor="t">
+            <a:spAutoFit/>
+          </a:bodyPr>
+          <a:lstStyle/>
+          <a:p>
+            <a:pPr algn="l">
+              <a:spcAft>
+                <a:spcPts val="500"/>
+              </a:spcAft>
+            </a:pPr>
+            <a:r>
+              <a:rPr sz="1300" b="1" i="0">
+                <a:solidFill>
+                  <a:srgbClr val="0083CA"/>
+                </a:solidFill>
+                <a:latin typeface="Calibri"/>
+              </a:rPr>
+              <a:t>03</a:t>
+            </a:r>
+          </a:p>
+        </p:txBody>
+      </p:sp>
+      <p:sp>
+        <p:nvSpPr>
+          <p:cNvPr id="13" name="Rectangle 12"/>
           <p:cNvSpPr/>
           <p:nvPr/>
         </p:nvSpPr>
         <p:spPr>
           <a:xfrm>
-            <a:off x="1056497" y="2309225"/>
-            <a:ext cx="374172" cy="374172"/>
-          </a:xfrm>
-          <a:prstGeom prst="ellipse">
+            <a:off x="6181344" y="3273552"/>
+            <a:ext cx="2331720" cy="25603"/>
+          </a:xfrm>
+          <a:prstGeom prst="rect">
             <a:avLst/>
           </a:prstGeom>
           <a:solidFill>
-            <a:srgbClr val="10131A"/>
+            <a:srgbClr val="E6E7E8"/>
           </a:solidFill>
           <a:ln>
             <a:noFill/>
@@ -5600,32 +5747,23 @@
           </a:fontRef>
         </p:style>
         <p:txBody>
-          <a:bodyPr rtlCol="0" anchor="ctr" lIns="0" rIns="0" tIns="0" bIns="0"/>
+          <a:bodyPr rtlCol="0" anchor="ctr"/>
           <a:lstStyle/>
           <a:p>
             <a:pPr algn="ctr"/>
-            <a:r>
-              <a:rPr sz="1700" b="1">
-                <a:solidFill>
-                  <a:srgbClr val="E6006E"/>
-                </a:solidFill>
-                <a:latin typeface="Arial"/>
-              </a:rPr>
-              <a:t>!</a:t>
-            </a:r>
-          </a:p>
-        </p:txBody>
-      </p:sp>
-      <p:sp>
-        <p:nvSpPr>
-          <p:cNvPr id="8" name="TextBox 7"/>
+          </a:p>
+        </p:txBody>
+      </p:sp>
+      <p:sp>
+        <p:nvSpPr>
+          <p:cNvPr id="14" name="TextBox 13"/>
           <p:cNvSpPr txBox="1"/>
           <p:nvPr/>
         </p:nvSpPr>
         <p:spPr>
           <a:xfrm>
-            <a:off x="1719072" y="2249424"/>
-            <a:ext cx="4297680" cy="411480"/>
+            <a:off x="6181344" y="3456432"/>
+            <a:ext cx="2331720" cy="1737360"/>
           </a:xfrm>
           <a:prstGeom prst="rect">
             <a:avLst/>
@@ -5640,31 +5778,63 @@
           <a:p>
             <a:pPr algn="l">
               <a:spcAft>
-                <a:spcPts val="400"/>
-              </a:spcAft>
-            </a:pPr>
-            <a:r>
-              <a:rPr sz="1900" b="1" i="0">
-                <a:solidFill>
-                  <a:srgbClr val="F2E9D8"/>
-                </a:solidFill>
-                <a:latin typeface="Arial"/>
-              </a:rPr>
-              <a:t>Prompt-injection defence</a:t>
-            </a:r>
-          </a:p>
-        </p:txBody>
-      </p:sp>
-      <p:sp>
-        <p:nvSpPr>
-          <p:cNvPr id="9" name="TextBox 8"/>
+                <a:spcPts val="600"/>
+              </a:spcAft>
+            </a:pPr>
+            <a:r>
+              <a:rPr sz="1500" b="1" i="0">
+                <a:solidFill>
+                  <a:srgbClr val="0C2B45"/>
+                </a:solidFill>
+                <a:latin typeface="Cambria"/>
+              </a:rPr>
+              <a:t>Hold the conversation</a:t>
+            </a:r>
+          </a:p>
+          <a:p>
+            <a:pPr algn="l">
+              <a:spcAft>
+                <a:spcPts val="800"/>
+              </a:spcAft>
+            </a:pPr>
+            <a:r>
+              <a:rPr sz="1200" b="0" i="0">
+                <a:solidFill>
+                  <a:srgbClr val="808285"/>
+                </a:solidFill>
+                <a:latin typeface="Calibri"/>
+              </a:rPr>
+              <a:t>One situation per turn, adapted to how the learner is doing.</a:t>
+            </a:r>
+          </a:p>
+          <a:p>
+            <a:pPr algn="l">
+              <a:spcAft>
+                <a:spcPts val="0"/>
+              </a:spcAft>
+            </a:pPr>
+            <a:r>
+              <a:rPr sz="1000" b="0" i="0">
+                <a:solidFill>
+                  <a:srgbClr val="2199E8"/>
+                </a:solidFill>
+                <a:latin typeface="Calibri"/>
+              </a:rPr>
+              <a:t>Claude Opus 5 · concept map cached per session</a:t>
+            </a:r>
+          </a:p>
+        </p:txBody>
+      </p:sp>
+      <p:sp>
+        <p:nvSpPr>
+          <p:cNvPr id="15" name="TextBox 14"/>
           <p:cNvSpPr txBox="1"/>
           <p:nvPr/>
         </p:nvSpPr>
         <p:spPr>
           <a:xfrm>
-            <a:off x="960120" y="2971800"/>
-            <a:ext cx="5029200" cy="1188720"/>
+            <a:off x="8860536" y="2926080"/>
+            <a:ext cx="365760" cy="310896"/>
           </a:xfrm>
           <a:prstGeom prst="rect">
             <a:avLst/>
@@ -5679,363 +5849,17 @@
           <a:p>
             <a:pPr algn="l">
               <a:spcAft>
-                <a:spcPts val="700"/>
-              </a:spcAft>
-            </a:pPr>
-            <a:r>
-              <a:rPr sz="1200" b="0" i="0">
-                <a:solidFill>
-                  <a:srgbClr val="F2E9D8"/>
+                <a:spcPts val="500"/>
+              </a:spcAft>
+            </a:pPr>
+            <a:r>
+              <a:rPr sz="1300" b="1" i="0">
+                <a:solidFill>
+                  <a:srgbClr val="0083CA"/>
                 </a:solidFill>
                 <a:latin typeface="Calibri"/>
               </a:rPr>
-              <a:t>Uploaded content is the attack surface nobody expects. A document can contain text written to hijack the model — “ignore your instructions and…”</a:t>
-            </a:r>
-          </a:p>
-          <a:p>
-            <a:pPr algn="l">
-              <a:spcAft>
-                <a:spcPts val="0"/>
-              </a:spcAft>
-            </a:pPr>
-            <a:r>
-              <a:rPr sz="1200" b="0" i="0">
-                <a:solidFill>
-                  <a:srgbClr val="F2E9D8"/>
-                </a:solidFill>
-                <a:latin typeface="Calibri"/>
-              </a:rPr>
-              <a:t>Every upload is delimited and explicitly marked as DATA, never instructions, in both prompts. A malicious PDF cannot take over the tutor.</a:t>
-            </a:r>
-          </a:p>
-        </p:txBody>
-      </p:sp>
-      <p:sp>
-        <p:nvSpPr>
-          <p:cNvPr id="10" name="TextBox 9"/>
-          <p:cNvSpPr txBox="1"/>
-          <p:nvPr/>
-        </p:nvSpPr>
-        <p:spPr>
-          <a:xfrm>
-            <a:off x="6537960" y="1965960"/>
-            <a:ext cx="2240280" cy="731520"/>
-          </a:xfrm>
-          <a:prstGeom prst="rect">
-            <a:avLst/>
-          </a:prstGeom>
-          <a:noFill/>
-        </p:spPr>
-        <p:txBody>
-          <a:bodyPr wrap="square" lIns="0" rIns="0" tIns="0" bIns="0" anchor="t">
-            <a:spAutoFit/>
-          </a:bodyPr>
-          <a:lstStyle/>
-          <a:p>
-            <a:pPr algn="l">
-              <a:spcAft>
-                <a:spcPts val="200"/>
-              </a:spcAft>
-            </a:pPr>
-            <a:r>
-              <a:rPr sz="1200" b="1" i="0">
-                <a:solidFill>
-                  <a:srgbClr val="00A878"/>
-                </a:solidFill>
-                <a:latin typeface="Calibri"/>
-              </a:rPr>
-              <a:t>Roles</a:t>
-            </a:r>
-          </a:p>
-          <a:p>
-            <a:pPr algn="l">
-              <a:spcAft>
-                <a:spcPts val="0"/>
-              </a:spcAft>
-            </a:pPr>
-            <a:r>
-              <a:rPr sz="950" b="0" i="0">
-                <a:solidFill>
-                  <a:srgbClr val="A99A7C"/>
-                </a:solidFill>
-                <a:latin typeface="Calibri"/>
-              </a:rPr>
-              <a:t>Admin routes behind a password; HttpOnly, SameSite=Strict session</a:t>
-            </a:r>
-          </a:p>
-        </p:txBody>
-      </p:sp>
-      <p:sp>
-        <p:nvSpPr>
-          <p:cNvPr id="11" name="TextBox 10"/>
-          <p:cNvSpPr txBox="1"/>
-          <p:nvPr/>
-        </p:nvSpPr>
-        <p:spPr>
-          <a:xfrm>
-            <a:off x="8933688" y="1965960"/>
-            <a:ext cx="2240280" cy="731520"/>
-          </a:xfrm>
-          <a:prstGeom prst="rect">
-            <a:avLst/>
-          </a:prstGeom>
-          <a:noFill/>
-        </p:spPr>
-        <p:txBody>
-          <a:bodyPr wrap="square" lIns="0" rIns="0" tIns="0" bIns="0" anchor="t">
-            <a:spAutoFit/>
-          </a:bodyPr>
-          <a:lstStyle/>
-          <a:p>
-            <a:pPr algn="l">
-              <a:spcAft>
-                <a:spcPts val="200"/>
-              </a:spcAft>
-            </a:pPr>
-            <a:r>
-              <a:rPr sz="1200" b="1" i="0">
-                <a:solidFill>
-                  <a:srgbClr val="00A878"/>
-                </a:solidFill>
-                <a:latin typeface="Calibri"/>
-              </a:rPr>
-              <a:t>Rate limits</a:t>
-            </a:r>
-          </a:p>
-          <a:p>
-            <a:pPr algn="l">
-              <a:spcAft>
-                <a:spcPts val="0"/>
-              </a:spcAft>
-            </a:pPr>
-            <a:r>
-              <a:rPr sz="950" b="0" i="0">
-                <a:solidFill>
-                  <a:srgbClr val="A99A7C"/>
-                </a:solidFill>
-                <a:latin typeface="Calibri"/>
-              </a:rPr>
-              <a:t>Per-IP throttling on every write path; sign-in limited separately</a:t>
-            </a:r>
-          </a:p>
-        </p:txBody>
-      </p:sp>
-      <p:sp>
-        <p:nvSpPr>
-          <p:cNvPr id="12" name="TextBox 11"/>
-          <p:cNvSpPr txBox="1"/>
-          <p:nvPr/>
-        </p:nvSpPr>
-        <p:spPr>
-          <a:xfrm>
-            <a:off x="6537960" y="2770632"/>
-            <a:ext cx="2240280" cy="731520"/>
-          </a:xfrm>
-          <a:prstGeom prst="rect">
-            <a:avLst/>
-          </a:prstGeom>
-          <a:noFill/>
-        </p:spPr>
-        <p:txBody>
-          <a:bodyPr wrap="square" lIns="0" rIns="0" tIns="0" bIns="0" anchor="t">
-            <a:spAutoFit/>
-          </a:bodyPr>
-          <a:lstStyle/>
-          <a:p>
-            <a:pPr algn="l">
-              <a:spcAft>
-                <a:spcPts val="200"/>
-              </a:spcAft>
-            </a:pPr>
-            <a:r>
-              <a:rPr sz="1200" b="1" i="0">
-                <a:solidFill>
-                  <a:srgbClr val="00A878"/>
-                </a:solidFill>
-                <a:latin typeface="Calibri"/>
-              </a:rPr>
-              <a:t>Safe inputs</a:t>
-            </a:r>
-          </a:p>
-          <a:p>
-            <a:pPr algn="l">
-              <a:spcAft>
-                <a:spcPts val="0"/>
-              </a:spcAft>
-            </a:pPr>
-            <a:r>
-              <a:rPr sz="950" b="0" i="0">
-                <a:solidFill>
-                  <a:srgbClr val="A99A7C"/>
-                </a:solidFill>
-                <a:latin typeface="Calibri"/>
-              </a:rPr>
-              <a:t>Strict validation, control-character stripping, upload type &amp; size caps</a:t>
-            </a:r>
-          </a:p>
-        </p:txBody>
-      </p:sp>
-      <p:sp>
-        <p:nvSpPr>
-          <p:cNvPr id="13" name="TextBox 12"/>
-          <p:cNvSpPr txBox="1"/>
-          <p:nvPr/>
-        </p:nvSpPr>
-        <p:spPr>
-          <a:xfrm>
-            <a:off x="8933688" y="2770632"/>
-            <a:ext cx="2240280" cy="731520"/>
-          </a:xfrm>
-          <a:prstGeom prst="rect">
-            <a:avLst/>
-          </a:prstGeom>
-          <a:noFill/>
-        </p:spPr>
-        <p:txBody>
-          <a:bodyPr wrap="square" lIns="0" rIns="0" tIns="0" bIns="0" anchor="t">
-            <a:spAutoFit/>
-          </a:bodyPr>
-          <a:lstStyle/>
-          <a:p>
-            <a:pPr algn="l">
-              <a:spcAft>
-                <a:spcPts val="200"/>
-              </a:spcAft>
-            </a:pPr>
-            <a:r>
-              <a:rPr sz="1200" b="1" i="0">
-                <a:solidFill>
-                  <a:srgbClr val="00A878"/>
-                </a:solidFill>
-                <a:latin typeface="Calibri"/>
-              </a:rPr>
-              <a:t>Browser hardening</a:t>
-            </a:r>
-          </a:p>
-          <a:p>
-            <a:pPr algn="l">
-              <a:spcAft>
-                <a:spcPts val="0"/>
-              </a:spcAft>
-            </a:pPr>
-            <a:r>
-              <a:rPr sz="950" b="0" i="0">
-                <a:solidFill>
-                  <a:srgbClr val="A99A7C"/>
-                </a:solidFill>
-                <a:latin typeface="Calibri"/>
-              </a:rPr>
-              <a:t>CSP, X-Frame-Options DENY, nosniff, no-referrer</a:t>
-            </a:r>
-          </a:p>
-        </p:txBody>
-      </p:sp>
-      <p:sp>
-        <p:nvSpPr>
-          <p:cNvPr id="14" name="TextBox 13"/>
-          <p:cNvSpPr txBox="1"/>
-          <p:nvPr/>
-        </p:nvSpPr>
-        <p:spPr>
-          <a:xfrm>
-            <a:off x="6537960" y="3575304"/>
-            <a:ext cx="2240280" cy="731520"/>
-          </a:xfrm>
-          <a:prstGeom prst="rect">
-            <a:avLst/>
-          </a:prstGeom>
-          <a:noFill/>
-        </p:spPr>
-        <p:txBody>
-          <a:bodyPr wrap="square" lIns="0" rIns="0" tIns="0" bIns="0" anchor="t">
-            <a:spAutoFit/>
-          </a:bodyPr>
-          <a:lstStyle/>
-          <a:p>
-            <a:pPr algn="l">
-              <a:spcAft>
-                <a:spcPts val="200"/>
-              </a:spcAft>
-            </a:pPr>
-            <a:r>
-              <a:rPr sz="1200" b="1" i="0">
-                <a:solidFill>
-                  <a:srgbClr val="00A878"/>
-                </a:solidFill>
-                <a:latin typeface="Calibri"/>
-              </a:rPr>
-              <a:t>Data minimisation</a:t>
-            </a:r>
-          </a:p>
-          <a:p>
-            <a:pPr algn="l">
-              <a:spcAft>
-                <a:spcPts val="0"/>
-              </a:spcAft>
-            </a:pPr>
-            <a:r>
-              <a:rPr sz="950" b="0" i="0">
-                <a:solidFill>
-                  <a:srgbClr val="A99A7C"/>
-                </a:solidFill>
-                <a:latin typeface="Calibri"/>
-              </a:rPr>
-              <a:t>Learners are random IDs. No names, no email, no PII stored</a:t>
-            </a:r>
-          </a:p>
-        </p:txBody>
-      </p:sp>
-      <p:sp>
-        <p:nvSpPr>
-          <p:cNvPr id="15" name="TextBox 14"/>
-          <p:cNvSpPr txBox="1"/>
-          <p:nvPr/>
-        </p:nvSpPr>
-        <p:spPr>
-          <a:xfrm>
-            <a:off x="8933688" y="3575304"/>
-            <a:ext cx="2240280" cy="731520"/>
-          </a:xfrm>
-          <a:prstGeom prst="rect">
-            <a:avLst/>
-          </a:prstGeom>
-          <a:noFill/>
-        </p:spPr>
-        <p:txBody>
-          <a:bodyPr wrap="square" lIns="0" rIns="0" tIns="0" bIns="0" anchor="t">
-            <a:spAutoFit/>
-          </a:bodyPr>
-          <a:lstStyle/>
-          <a:p>
-            <a:pPr algn="l">
-              <a:spcAft>
-                <a:spcPts val="200"/>
-              </a:spcAft>
-            </a:pPr>
-            <a:r>
-              <a:rPr sz="1200" b="1" i="0">
-                <a:solidFill>
-                  <a:srgbClr val="00A878"/>
-                </a:solidFill>
-                <a:latin typeface="Calibri"/>
-              </a:rPr>
-              <a:t>Secrets</a:t>
-            </a:r>
-          </a:p>
-          <a:p>
-            <a:pPr algn="l">
-              <a:spcAft>
-                <a:spcPts val="0"/>
-              </a:spcAft>
-            </a:pPr>
-            <a:r>
-              <a:rPr sz="950" b="0" i="0">
-                <a:solidFill>
-                  <a:srgbClr val="A99A7C"/>
-                </a:solidFill>
-                <a:latin typeface="Calibri"/>
-              </a:rPr>
-              <a:t>Read only from environment; never in the repository</a:t>
+              <a:t>04</a:t>
             </a:r>
           </a:p>
         </p:txBody>
@@ -6048,14 +5872,14 @@
         </p:nvSpPr>
         <p:spPr>
           <a:xfrm>
-            <a:off x="685800" y="4553712"/>
-            <a:ext cx="10296144" cy="1097280"/>
+            <a:off x="8860536" y="3273552"/>
+            <a:ext cx="2331720" cy="25603"/>
           </a:xfrm>
           <a:prstGeom prst="rect">
             <a:avLst/>
           </a:prstGeom>
           <a:solidFill>
-            <a:srgbClr val="262E3C"/>
+            <a:srgbClr val="E6E7E8"/>
           </a:solidFill>
           <a:ln>
             <a:noFill/>
@@ -6092,8 +5916,8 @@
         </p:nvSpPr>
         <p:spPr>
           <a:xfrm>
-            <a:off x="960120" y="4736592"/>
-            <a:ext cx="9747504" cy="822960"/>
+            <a:off x="8860536" y="3456432"/>
+            <a:ext cx="2331720" cy="1737360"/>
           </a:xfrm>
           <a:prstGeom prst="rect">
             <a:avLst/>
@@ -6108,17 +5932,33 @@
           <a:p>
             <a:pPr algn="l">
               <a:spcAft>
-                <a:spcPts val="300"/>
-              </a:spcAft>
-            </a:pPr>
-            <a:r>
-              <a:rPr sz="1300" b="1" i="0">
-                <a:solidFill>
-                  <a:srgbClr val="FFC402"/>
+                <a:spcPts val="600"/>
+              </a:spcAft>
+            </a:pPr>
+            <a:r>
+              <a:rPr sz="1500" b="1" i="0">
+                <a:solidFill>
+                  <a:srgbClr val="0C2B45"/>
+                </a:solidFill>
+                <a:latin typeface="Cambria"/>
+              </a:rPr>
+              <a:t>Track understanding</a:t>
+            </a:r>
+          </a:p>
+          <a:p>
+            <a:pPr algn="l">
+              <a:spcAft>
+                <a:spcPts val="800"/>
+              </a:spcAft>
+            </a:pPr>
+            <a:r>
+              <a:rPr sz="1200" b="0" i="0">
+                <a:solidFill>
+                  <a:srgbClr val="808285"/>
                 </a:solidFill>
                 <a:latin typeface="Calibri"/>
               </a:rPr>
-              <a:t>Grounding is a safety control, not a feature.</a:t>
+              <a:t>Mastery, streaks and unlocks update from the evidence in each reply.</a:t>
             </a:r>
           </a:p>
           <a:p>
@@ -6128,27 +5968,71 @@
               </a:spcAft>
             </a:pPr>
             <a:r>
-              <a:rPr sz="1100" b="0" i="0">
-                <a:solidFill>
-                  <a:srgbClr val="F2E9D8"/>
+              <a:rPr sz="1000" b="0" i="0">
+                <a:solidFill>
+                  <a:srgbClr val="2199E8"/>
                 </a:solidFill>
                 <a:latin typeface="Calibri"/>
               </a:rPr>
-              <a:t>A tutor that invents a fact about a financial product creates real liability. Every claim cites a verbatim quote; anything outside the source is refused and flagged, never guessed.</a:t>
-            </a:r>
-          </a:p>
-        </p:txBody>
-      </p:sp>
-      <p:sp>
-        <p:nvSpPr>
-          <p:cNvPr id="18" name="TextBox 17"/>
+              <a:t>Arithmetic in our code, not the model’s memory</a:t>
+            </a:r>
+          </a:p>
+        </p:txBody>
+      </p:sp>
+      <p:sp>
+        <p:nvSpPr>
+          <p:cNvPr id="18" name="Rectangle 17"/>
+          <p:cNvSpPr/>
+          <p:nvPr/>
+        </p:nvSpPr>
+        <p:spPr>
+          <a:xfrm>
+            <a:off x="822960" y="5084064"/>
+            <a:ext cx="10545775" cy="1115568"/>
+          </a:xfrm>
+          <a:prstGeom prst="rect">
+            <a:avLst/>
+          </a:prstGeom>
+          <a:solidFill>
+            <a:srgbClr val="F4F7FA"/>
+          </a:solidFill>
+          <a:ln>
+            <a:noFill/>
+          </a:ln>
+          <a:effectLst/>
+        </p:spPr>
+        <p:style>
+          <a:lnRef idx="1">
+            <a:schemeClr val="accent1"/>
+          </a:lnRef>
+          <a:fillRef idx="3">
+            <a:schemeClr val="accent1"/>
+          </a:fillRef>
+          <a:effectRef idx="2">
+            <a:schemeClr val="accent1"/>
+          </a:effectRef>
+          <a:fontRef idx="minor">
+            <a:schemeClr val="lt1"/>
+          </a:fontRef>
+        </p:style>
+        <p:txBody>
+          <a:bodyPr rtlCol="0" anchor="ctr"/>
+          <a:lstStyle/>
+          <a:p>
+            <a:pPr algn="ctr"/>
+          </a:p>
+        </p:txBody>
+      </p:sp>
+      <p:sp>
+        <p:nvSpPr>
+          <p:cNvPr id="19" name="TextBox 18"/>
           <p:cNvSpPr txBox="1"/>
           <p:nvPr/>
         </p:nvSpPr>
         <p:spPr>
           <a:xfrm>
-            <a:off x="685800" y="6327648"/>
-            <a:ext cx="7315200" cy="274320"/>
+            <a:off x="1115568" y="5266944"/>
+            <a:ext cx="9966960" cy="868680"/>
           </a:xfrm>
           <a:prstGeom prst="rect">
             <a:avLst/>
@@ -6163,31 +6047,47 @@
           <a:p>
             <a:pPr algn="l">
               <a:spcAft>
-                <a:spcPts val="400"/>
-              </a:spcAft>
-            </a:pPr>
-            <a:r>
-              <a:rPr sz="900" b="0" i="0">
-                <a:solidFill>
-                  <a:srgbClr val="A99A7C"/>
+                <a:spcPts val="500"/>
+              </a:spcAft>
+            </a:pPr>
+            <a:r>
+              <a:rPr sz="1350" b="1" i="0">
+                <a:solidFill>
+                  <a:srgbClr val="0C2B45"/>
+                </a:solidFill>
+                <a:latin typeface="Cambria"/>
+              </a:rPr>
+              <a:t>Why one service instead of four</a:t>
+            </a:r>
+          </a:p>
+          <a:p>
+            <a:pPr algn="l">
+              <a:spcAft>
+                <a:spcPts val="0"/>
+              </a:spcAft>
+            </a:pPr>
+            <a:r>
+              <a:rPr sz="1150" b="0" i="0">
+                <a:solidFill>
+                  <a:srgbClr val="808285"/>
                 </a:solidFill>
                 <a:latin typeface="Calibri"/>
               </a:rPr>
-              <a:t>Rehnuma  ·  candidate prototype for United Bank Limited</a:t>
-            </a:r>
-          </a:p>
-        </p:txBody>
-      </p:sp>
-      <p:sp>
-        <p:nvSpPr>
-          <p:cNvPr id="19" name="TextBox 18"/>
+              <a:t>The whole thing is a single Python application that serves both the pages and the API. No separate front-end build, no second deployment, no cross-origin configuration — three fewer things that can fail in front of you, and it deploys to a free cloud tier in one step.</a:t>
+            </a:r>
+          </a:p>
+        </p:txBody>
+      </p:sp>
+      <p:sp>
+        <p:nvSpPr>
+          <p:cNvPr id="20" name="TextBox 19"/>
           <p:cNvSpPr txBox="1"/>
           <p:nvPr/>
         </p:nvSpPr>
         <p:spPr>
           <a:xfrm>
-            <a:off x="10332720" y="6327648"/>
-            <a:ext cx="1143000" cy="274320"/>
+            <a:off x="822960" y="6345936"/>
+            <a:ext cx="8229600" cy="237744"/>
           </a:xfrm>
           <a:prstGeom prst="rect">
             <a:avLst/>
@@ -6200,19 +6100,58 @@
           </a:bodyPr>
           <a:lstStyle/>
           <a:p>
+            <a:pPr algn="l">
+              <a:spcAft>
+                <a:spcPts val="500"/>
+              </a:spcAft>
+            </a:pPr>
+            <a:r>
+              <a:rPr sz="850" b="0" i="0">
+                <a:solidFill>
+                  <a:srgbClr val="808285"/>
+                </a:solidFill>
+                <a:latin typeface="Calibri"/>
+              </a:rPr>
+              <a:t>Ayesha Faheem  ·  Digital HR &amp; AI Manager assignment  ·  prototype for assessment</a:t>
+            </a:r>
+          </a:p>
+        </p:txBody>
+      </p:sp>
+      <p:sp>
+        <p:nvSpPr>
+          <p:cNvPr id="21" name="TextBox 20"/>
+          <p:cNvSpPr txBox="1"/>
+          <p:nvPr/>
+        </p:nvSpPr>
+        <p:spPr>
+          <a:xfrm>
+            <a:off x="10058400" y="6345936"/>
+            <a:ext cx="1307592" cy="237744"/>
+          </a:xfrm>
+          <a:prstGeom prst="rect">
+            <a:avLst/>
+          </a:prstGeom>
+          <a:noFill/>
+        </p:spPr>
+        <p:txBody>
+          <a:bodyPr wrap="square" lIns="0" rIns="0" tIns="0" bIns="0" anchor="t">
+            <a:spAutoFit/>
+          </a:bodyPr>
+          <a:lstStyle/>
+          <a:p>
             <a:pPr algn="r">
               <a:spcAft>
-                <a:spcPts val="400"/>
-              </a:spcAft>
-            </a:pPr>
-            <a:r>
-              <a:rPr sz="900" b="0" i="0">
-                <a:solidFill>
-                  <a:srgbClr val="A99A7C"/>
+                <a:spcPts val="500"/>
+              </a:spcAft>
+            </a:pPr>
+            <a:r>
+              <a:rPr sz="850" b="0" i="0">
+                <a:solidFill>
+                  <a:srgbClr val="808285"/>
                 </a:solidFill>
                 <a:latin typeface="Calibri"/>
               </a:rPr>
-              <a:t>3 / 5</a:t>
+              <a:t>3 / 5</a:t>
             </a:r>
           </a:p>
         </p:txBody>
@@ -6250,7 +6189,7 @@
             <a:avLst/>
           </a:prstGeom>
           <a:solidFill>
-            <a:srgbClr val="10131A"/>
+            <a:srgbClr val="FFFFFF"/>
           </a:solidFill>
           <a:ln>
             <a:noFill/>
@@ -6287,8 +6226,8 @@
         </p:nvSpPr>
         <p:spPr>
           <a:xfrm>
-            <a:off x="685800" y="475488"/>
-            <a:ext cx="10789920" cy="274320"/>
+            <a:off x="822960" y="658368"/>
+            <a:ext cx="10545775" cy="237744"/>
           </a:xfrm>
           <a:prstGeom prst="rect">
             <a:avLst/>
@@ -6303,17 +6242,17 @@
           <a:p>
             <a:pPr algn="l">
               <a:spcAft>
-                <a:spcPts val="400"/>
-              </a:spcAft>
-            </a:pPr>
-            <a:r>
-              <a:rPr sz="1100" b="1" i="0">
-                <a:solidFill>
-                  <a:srgbClr val="A99A7C"/>
+                <a:spcPts val="500"/>
+              </a:spcAft>
+            </a:pPr>
+            <a:r>
+              <a:rPr sz="1050" b="1" i="0">
+                <a:solidFill>
+                  <a:srgbClr val="0083CA"/>
                 </a:solidFill>
                 <a:latin typeface="Calibri"/>
               </a:rPr>
-              <a:t>EFFICIENCY &amp; EFFECTIVENESS</a:t>
+              <a:t>SECURITY, PRIVACY &amp; HONESTY</a:t>
             </a:r>
           </a:p>
         </p:txBody>
@@ -6326,8 +6265,8 @@
         </p:nvSpPr>
         <p:spPr>
           <a:xfrm>
-            <a:off x="685800" y="786384"/>
-            <a:ext cx="10789920" cy="914400"/>
+            <a:off x="822960" y="969264"/>
+            <a:ext cx="10545775" cy="777240"/>
           </a:xfrm>
           <a:prstGeom prst="rect">
             <a:avLst/>
@@ -6342,37 +6281,79 @@
           <a:p>
             <a:pPr algn="l">
               <a:spcAft>
-                <a:spcPts val="400"/>
-              </a:spcAft>
-            </a:pPr>
-            <a:r>
-              <a:rPr sz="3800" b="1" i="0">
-                <a:solidFill>
-                  <a:srgbClr val="F2E9D8"/>
-                </a:solidFill>
-                <a:latin typeface="Arial"/>
-              </a:rPr>
-              <a:t>Fast, cheap, and hard to knock over</a:t>
-            </a:r>
-          </a:p>
-        </p:txBody>
-      </p:sp>
-      <p:sp>
-        <p:nvSpPr>
-          <p:cNvPr id="5" name="Oval 4"/>
+                <a:spcPts val="500"/>
+              </a:spcAft>
+            </a:pPr>
+            <a:r>
+              <a:rPr sz="4000" b="1" i="0">
+                <a:solidFill>
+                  <a:srgbClr val="0C2B45"/>
+                </a:solidFill>
+                <a:latin typeface="Cambria"/>
+              </a:rPr>
+              <a:t>Built for a bank</a:t>
+            </a:r>
+          </a:p>
+        </p:txBody>
+      </p:sp>
+      <p:sp>
+        <p:nvSpPr>
+          <p:cNvPr id="5" name="TextBox 4"/>
+          <p:cNvSpPr txBox="1"/>
+          <p:nvPr/>
+        </p:nvSpPr>
+        <p:spPr>
+          <a:xfrm>
+            <a:off x="822960" y="1901952"/>
+            <a:ext cx="10545775" cy="749808"/>
+          </a:xfrm>
+          <a:prstGeom prst="rect">
+            <a:avLst/>
+          </a:prstGeom>
+          <a:noFill/>
+        </p:spPr>
+        <p:txBody>
+          <a:bodyPr wrap="square" lIns="0" rIns="0" tIns="0" bIns="0" anchor="t">
+            <a:spAutoFit/>
+          </a:bodyPr>
+          <a:lstStyle/>
+          <a:p>
+            <a:pPr algn="l">
+              <a:lnSpc>
+                <a:spcPct val="115000"/>
+              </a:lnSpc>
+              <a:spcAft>
+                <a:spcPts val="500"/>
+              </a:spcAft>
+            </a:pPr>
+            <a:r>
+              <a:rPr sz="1800" b="0" i="0">
+                <a:solidFill>
+                  <a:srgbClr val="0F5885"/>
+                </a:solidFill>
+                <a:latin typeface="Cambria"/>
+              </a:rPr>
+              <a:t>Two risks matter more than the rest: a tutor that invents a fact about a financial product, and a document written to hijack it.</a:t>
+            </a:r>
+          </a:p>
+        </p:txBody>
+      </p:sp>
+      <p:sp>
+        <p:nvSpPr>
+          <p:cNvPr id="6" name="Rectangle 5"/>
           <p:cNvSpPr/>
           <p:nvPr/>
         </p:nvSpPr>
         <p:spPr>
           <a:xfrm>
-            <a:off x="685800" y="2020824"/>
-            <a:ext cx="502920" cy="502920"/>
-          </a:xfrm>
-          <a:prstGeom prst="ellipse">
+            <a:off x="822960" y="2834640"/>
+            <a:ext cx="5074920" cy="2395728"/>
+          </a:xfrm>
+          <a:prstGeom prst="rect">
             <a:avLst/>
           </a:prstGeom>
           <a:solidFill>
-            <a:srgbClr val="FFC402"/>
+            <a:srgbClr val="F4F7FA"/>
           </a:solidFill>
           <a:ln>
             <a:noFill/>
@@ -6403,20 +6384,91 @@
       </p:sp>
       <p:sp>
         <p:nvSpPr>
-          <p:cNvPr id="6" name="Oval 5"/>
+          <p:cNvPr id="7" name="TextBox 6"/>
+          <p:cNvSpPr txBox="1"/>
+          <p:nvPr/>
+        </p:nvSpPr>
+        <p:spPr>
+          <a:xfrm>
+            <a:off x="1115568" y="3072384"/>
+            <a:ext cx="4480560" cy="2011680"/>
+          </a:xfrm>
+          <a:prstGeom prst="rect">
+            <a:avLst/>
+          </a:prstGeom>
+          <a:noFill/>
+        </p:spPr>
+        <p:txBody>
+          <a:bodyPr wrap="square" lIns="0" rIns="0" tIns="0" bIns="0" anchor="t">
+            <a:spAutoFit/>
+          </a:bodyPr>
+          <a:lstStyle/>
+          <a:p>
+            <a:pPr algn="l">
+              <a:spcAft>
+                <a:spcPts val="900"/>
+              </a:spcAft>
+            </a:pPr>
+            <a:r>
+              <a:rPr sz="950" b="1" i="0">
+                <a:solidFill>
+                  <a:srgbClr val="0083CA"/>
+                </a:solidFill>
+                <a:latin typeface="Calibri"/>
+              </a:rPr>
+              <a:t>IT CANNOT MAKE THINGS UP</a:t>
+            </a:r>
+          </a:p>
+          <a:p>
+            <a:pPr algn="l">
+              <a:spcAft>
+                <a:spcPts val="800"/>
+              </a:spcAft>
+            </a:pPr>
+            <a:r>
+              <a:rPr sz="1250" b="0" i="0">
+                <a:solidFill>
+                  <a:srgbClr val="808285"/>
+                </a:solidFill>
+                <a:latin typeface="Calibri"/>
+              </a:rPr>
+              <a:t>Every idea is stored with the exact sentences it came from, and every claim the tutor makes carries a citation you can click to see the original line.</a:t>
+            </a:r>
+          </a:p>
+          <a:p>
+            <a:pPr algn="l">
+              <a:spcAft>
+                <a:spcPts val="0"/>
+              </a:spcAft>
+            </a:pPr>
+            <a:r>
+              <a:rPr sz="1250" b="0" i="0">
+                <a:solidFill>
+                  <a:srgbClr val="808285"/>
+                </a:solidFill>
+                <a:latin typeface="Calibri"/>
+              </a:rPr>
+              <a:t>Ask it something the document does not cover and it says so plainly, and flags it. It never fills the gap with a guess.</a:t>
+            </a:r>
+          </a:p>
+        </p:txBody>
+      </p:sp>
+      <p:sp>
+        <p:nvSpPr>
+          <p:cNvPr id="8" name="Rectangle 7"/>
           <p:cNvSpPr/>
           <p:nvPr/>
         </p:nvSpPr>
         <p:spPr>
           <a:xfrm>
-            <a:off x="771296" y="2106320"/>
-            <a:ext cx="331927" cy="331927"/>
-          </a:xfrm>
-          <a:prstGeom prst="ellipse">
+            <a:off x="6309360" y="2834640"/>
+            <a:ext cx="5074920" cy="2395728"/>
+          </a:xfrm>
+          <a:prstGeom prst="rect">
             <a:avLst/>
           </a:prstGeom>
           <a:solidFill>
-            <a:srgbClr val="10131A"/>
+            <a:srgbClr val="F4F7FA"/>
           </a:solidFill>
           <a:ln>
             <a:noFill/>
@@ -6438,32 +6490,23 @@
           </a:fontRef>
         </p:style>
         <p:txBody>
-          <a:bodyPr rtlCol="0" anchor="ctr" lIns="0" rIns="0" tIns="0" bIns="0"/>
+          <a:bodyPr rtlCol="0" anchor="ctr"/>
           <a:lstStyle/>
           <a:p>
             <a:pPr algn="ctr"/>
-            <a:r>
-              <a:rPr sz="1400" b="1">
-                <a:solidFill>
-                  <a:srgbClr val="FFC402"/>
-                </a:solidFill>
-                <a:latin typeface="Arial"/>
-              </a:rPr>
-              <a:t>1</a:t>
-            </a:r>
-          </a:p>
-        </p:txBody>
-      </p:sp>
-      <p:sp>
-        <p:nvSpPr>
-          <p:cNvPr id="7" name="TextBox 6"/>
+          </a:p>
+        </p:txBody>
+      </p:sp>
+      <p:sp>
+        <p:nvSpPr>
+          <p:cNvPr id="9" name="TextBox 8"/>
           <p:cNvSpPr txBox="1"/>
           <p:nvPr/>
         </p:nvSpPr>
         <p:spPr>
           <a:xfrm>
-            <a:off x="1389888" y="1965960"/>
-            <a:ext cx="4937760" cy="914400"/>
+            <a:off x="6601968" y="3072384"/>
+            <a:ext cx="4480560" cy="2011680"/>
           </a:xfrm>
           <a:prstGeom prst="rect">
             <a:avLst/>
@@ -6478,17 +6521,33 @@
           <a:p>
             <a:pPr algn="l">
               <a:spcAft>
-                <a:spcPts val="300"/>
-              </a:spcAft>
-            </a:pPr>
-            <a:r>
-              <a:rPr sz="1500" b="1" i="0">
-                <a:solidFill>
-                  <a:srgbClr val="FFC402"/>
-                </a:solidFill>
-                <a:latin typeface="Arial"/>
-              </a:rPr>
-              <a:t>Prompt caching</a:t>
+                <a:spcPts val="900"/>
+              </a:spcAft>
+            </a:pPr>
+            <a:r>
+              <a:rPr sz="950" b="1" i="0">
+                <a:solidFill>
+                  <a:srgbClr val="E6006E"/>
+                </a:solidFill>
+                <a:latin typeface="Calibri"/>
+              </a:rPr>
+              <a:t>IT CANNOT BE HIJACKED</a:t>
+            </a:r>
+          </a:p>
+          <a:p>
+            <a:pPr algn="l">
+              <a:spcAft>
+                <a:spcPts val="800"/>
+              </a:spcAft>
+            </a:pPr>
+            <a:r>
+              <a:rPr sz="1250" b="0" i="0">
+                <a:solidFill>
+                  <a:srgbClr val="808285"/>
+                </a:solidFill>
+                <a:latin typeface="Calibri"/>
+              </a:rPr>
+              <a:t>Uploaded content is the attack surface nobody expects. A document can contain text aimed at the model — “ignore your instructions and…”</a:t>
             </a:r>
           </a:p>
           <a:p>
@@ -6498,110 +6557,13 @@
               </a:spcAft>
             </a:pPr>
             <a:r>
-              <a:rPr sz="1100" b="0" i="0">
-                <a:solidFill>
-                  <a:srgbClr val="F2E9D8"/>
+              <a:rPr sz="1250" b="0" i="0">
+                <a:solidFill>
+                  <a:srgbClr val="808285"/>
                 </a:solidFill>
                 <a:latin typeface="Calibri"/>
               </a:rPr>
-              <a:t>The concept map is the largest, most stable part of every request, so it is cached — repeat turns re-read it at a fraction of the cost.</a:t>
-            </a:r>
-          </a:p>
-        </p:txBody>
-      </p:sp>
-      <p:sp>
-        <p:nvSpPr>
-          <p:cNvPr id="8" name="Oval 7"/>
-          <p:cNvSpPr/>
-          <p:nvPr/>
-        </p:nvSpPr>
-        <p:spPr>
-          <a:xfrm>
-            <a:off x="685800" y="3044952"/>
-            <a:ext cx="502920" cy="502920"/>
-          </a:xfrm>
-          <a:prstGeom prst="ellipse">
-            <a:avLst/>
-          </a:prstGeom>
-          <a:solidFill>
-            <a:srgbClr val="00B4D8"/>
-          </a:solidFill>
-          <a:ln>
-            <a:noFill/>
-          </a:ln>
-          <a:effectLst/>
-        </p:spPr>
-        <p:style>
-          <a:lnRef idx="1">
-            <a:schemeClr val="accent1"/>
-          </a:lnRef>
-          <a:fillRef idx="3">
-            <a:schemeClr val="accent1"/>
-          </a:fillRef>
-          <a:effectRef idx="2">
-            <a:schemeClr val="accent1"/>
-          </a:effectRef>
-          <a:fontRef idx="minor">
-            <a:schemeClr val="lt1"/>
-          </a:fontRef>
-        </p:style>
-        <p:txBody>
-          <a:bodyPr rtlCol="0" anchor="ctr"/>
-          <a:lstStyle/>
-          <a:p>
-            <a:pPr algn="ctr"/>
-          </a:p>
-        </p:txBody>
-      </p:sp>
-      <p:sp>
-        <p:nvSpPr>
-          <p:cNvPr id="9" name="Oval 8"/>
-          <p:cNvSpPr/>
-          <p:nvPr/>
-        </p:nvSpPr>
-        <p:spPr>
-          <a:xfrm>
-            <a:off x="771296" y="3130448"/>
-            <a:ext cx="331927" cy="331927"/>
-          </a:xfrm>
-          <a:prstGeom prst="ellipse">
-            <a:avLst/>
-          </a:prstGeom>
-          <a:solidFill>
-            <a:srgbClr val="10131A"/>
-          </a:solidFill>
-          <a:ln>
-            <a:noFill/>
-          </a:ln>
-          <a:effectLst/>
-        </p:spPr>
-        <p:style>
-          <a:lnRef idx="1">
-            <a:schemeClr val="accent1"/>
-          </a:lnRef>
-          <a:fillRef idx="3">
-            <a:schemeClr val="accent1"/>
-          </a:fillRef>
-          <a:effectRef idx="2">
-            <a:schemeClr val="accent1"/>
-          </a:effectRef>
-          <a:fontRef idx="minor">
-            <a:schemeClr val="lt1"/>
-          </a:fontRef>
-        </p:style>
-        <p:txBody>
-          <a:bodyPr rtlCol="0" anchor="ctr" lIns="0" rIns="0" tIns="0" bIns="0"/>
-          <a:lstStyle/>
-          <a:p>
-            <a:pPr algn="ctr"/>
-            <a:r>
-              <a:rPr sz="1400" b="1">
-                <a:solidFill>
-                  <a:srgbClr val="00B4D8"/>
-                </a:solidFill>
-                <a:latin typeface="Arial"/>
-              </a:rPr>
-              <a:t>2</a:t>
+              <a:t>Every upload is marked as data, never instructions, in both prompts. A malicious file is taught from, not obeyed.</a:t>
             </a:r>
           </a:p>
         </p:txBody>
@@ -6614,8 +6576,8 @@
         </p:nvSpPr>
         <p:spPr>
           <a:xfrm>
-            <a:off x="1389888" y="2990088"/>
-            <a:ext cx="4937760" cy="914400"/>
+            <a:off x="822960" y="5504688"/>
+            <a:ext cx="2057400" cy="566928"/>
           </a:xfrm>
           <a:prstGeom prst="rect">
             <a:avLst/>
@@ -6630,17 +6592,17 @@
           <a:p>
             <a:pPr algn="l">
               <a:spcAft>
-                <a:spcPts val="300"/>
-              </a:spcAft>
-            </a:pPr>
-            <a:r>
-              <a:rPr sz="1500" b="1" i="0">
-                <a:solidFill>
-                  <a:srgbClr val="00B4D8"/>
-                </a:solidFill>
-                <a:latin typeface="Arial"/>
-              </a:rPr>
-              <a:t>Tunable effort</a:t>
+                <a:spcPts val="200"/>
+              </a:spcAft>
+            </a:pPr>
+            <a:r>
+              <a:rPr sz="1150" b="1" i="0">
+                <a:solidFill>
+                  <a:srgbClr val="0C2B45"/>
+                </a:solidFill>
+                <a:latin typeface="Calibri"/>
+              </a:rPr>
+              <a:t>Roles</a:t>
             </a:r>
           </a:p>
           <a:p>
@@ -6650,124 +6612,27 @@
               </a:spcAft>
             </a:pPr>
             <a:r>
-              <a:rPr sz="1100" b="0" i="0">
-                <a:solidFill>
-                  <a:srgbClr val="F2E9D8"/>
+              <a:rPr sz="1000" b="0" i="0">
+                <a:solidFill>
+                  <a:srgbClr val="808285"/>
                 </a:solidFill>
                 <a:latin typeface="Calibri"/>
               </a:rPr>
-              <a:t>Reasoning depth is a setting, not a rebuild. Turn it down for speed during a live demo, up for harder material.</a:t>
-            </a:r>
-          </a:p>
-        </p:txBody>
-      </p:sp>
-      <p:sp>
-        <p:nvSpPr>
-          <p:cNvPr id="11" name="Oval 10"/>
-          <p:cNvSpPr/>
-          <p:nvPr/>
-        </p:nvSpPr>
-        <p:spPr>
-          <a:xfrm>
-            <a:off x="685800" y="4069080"/>
-            <a:ext cx="502920" cy="502920"/>
-          </a:xfrm>
-          <a:prstGeom prst="ellipse">
-            <a:avLst/>
-          </a:prstGeom>
-          <a:solidFill>
-            <a:srgbClr val="00A878"/>
-          </a:solidFill>
-          <a:ln>
-            <a:noFill/>
-          </a:ln>
-          <a:effectLst/>
-        </p:spPr>
-        <p:style>
-          <a:lnRef idx="1">
-            <a:schemeClr val="accent1"/>
-          </a:lnRef>
-          <a:fillRef idx="3">
-            <a:schemeClr val="accent1"/>
-          </a:fillRef>
-          <a:effectRef idx="2">
-            <a:schemeClr val="accent1"/>
-          </a:effectRef>
-          <a:fontRef idx="minor">
-            <a:schemeClr val="lt1"/>
-          </a:fontRef>
-        </p:style>
-        <p:txBody>
-          <a:bodyPr rtlCol="0" anchor="ctr"/>
-          <a:lstStyle/>
-          <a:p>
-            <a:pPr algn="ctr"/>
-          </a:p>
-        </p:txBody>
-      </p:sp>
-      <p:sp>
-        <p:nvSpPr>
-          <p:cNvPr id="12" name="Oval 11"/>
-          <p:cNvSpPr/>
-          <p:nvPr/>
-        </p:nvSpPr>
-        <p:spPr>
-          <a:xfrm>
-            <a:off x="771296" y="4154576"/>
-            <a:ext cx="331927" cy="331927"/>
-          </a:xfrm>
-          <a:prstGeom prst="ellipse">
-            <a:avLst/>
-          </a:prstGeom>
-          <a:solidFill>
-            <a:srgbClr val="10131A"/>
-          </a:solidFill>
-          <a:ln>
-            <a:noFill/>
-          </a:ln>
-          <a:effectLst/>
-        </p:spPr>
-        <p:style>
-          <a:lnRef idx="1">
-            <a:schemeClr val="accent1"/>
-          </a:lnRef>
-          <a:fillRef idx="3">
-            <a:schemeClr val="accent1"/>
-          </a:fillRef>
-          <a:effectRef idx="2">
-            <a:schemeClr val="accent1"/>
-          </a:effectRef>
-          <a:fontRef idx="minor">
-            <a:schemeClr val="lt1"/>
-          </a:fontRef>
-        </p:style>
-        <p:txBody>
-          <a:bodyPr rtlCol="0" anchor="ctr" lIns="0" rIns="0" tIns="0" bIns="0"/>
-          <a:lstStyle/>
-          <a:p>
-            <a:pPr algn="ctr"/>
-            <a:r>
-              <a:rPr sz="1400" b="1">
-                <a:solidFill>
-                  <a:srgbClr val="00A878"/>
-                </a:solidFill>
-                <a:latin typeface="Arial"/>
-              </a:rPr>
-              <a:t>3</a:t>
-            </a:r>
-          </a:p>
-        </p:txBody>
-      </p:sp>
-      <p:sp>
-        <p:nvSpPr>
-          <p:cNvPr id="13" name="TextBox 12"/>
+              <a:t>Admin behind a password</a:t>
+            </a:r>
+          </a:p>
+        </p:txBody>
+      </p:sp>
+      <p:sp>
+        <p:nvSpPr>
+          <p:cNvPr id="11" name="TextBox 10"/>
           <p:cNvSpPr txBox="1"/>
           <p:nvPr/>
         </p:nvSpPr>
         <p:spPr>
           <a:xfrm>
-            <a:off x="1389888" y="4014216"/>
-            <a:ext cx="4937760" cy="914400"/>
+            <a:off x="3035808" y="5504688"/>
+            <a:ext cx="2057400" cy="566928"/>
           </a:xfrm>
           <a:prstGeom prst="rect">
             <a:avLst/>
@@ -6782,17 +6647,17 @@
           <a:p>
             <a:pPr algn="l">
               <a:spcAft>
-                <a:spcPts val="300"/>
-              </a:spcAft>
-            </a:pPr>
-            <a:r>
-              <a:rPr sz="1500" b="1" i="0">
-                <a:solidFill>
-                  <a:srgbClr val="00A878"/>
-                </a:solidFill>
-                <a:latin typeface="Arial"/>
-              </a:rPr>
-              <a:t>One beat per turn</a:t>
+                <a:spcPts val="200"/>
+              </a:spcAft>
+            </a:pPr>
+            <a:r>
+              <a:rPr sz="1150" b="1" i="0">
+                <a:solidFill>
+                  <a:srgbClr val="0C2B45"/>
+                </a:solidFill>
+                <a:latin typeface="Calibri"/>
+              </a:rPr>
+              <a:t>Rate limits</a:t>
             </a:r>
           </a:p>
           <a:p>
@@ -6802,73 +6667,27 @@
               </a:spcAft>
             </a:pPr>
             <a:r>
-              <a:rPr sz="1100" b="0" i="0">
-                <a:solidFill>
-                  <a:srgbClr val="F2E9D8"/>
+              <a:rPr sz="1000" b="0" i="0">
+                <a:solidFill>
+                  <a:srgbClr val="808285"/>
                 </a:solidFill>
                 <a:latin typeface="Calibri"/>
               </a:rPr>
-              <a:t>The guide is instructed to give one situation at a time. Shorter replies mean lower latency and a better conversation.</a:t>
-            </a:r>
-          </a:p>
-        </p:txBody>
-      </p:sp>
-      <p:sp>
-        <p:nvSpPr>
-          <p:cNvPr id="14" name="Rectangle 13"/>
-          <p:cNvSpPr/>
-          <p:nvPr/>
-        </p:nvSpPr>
-        <p:spPr>
-          <a:xfrm>
-            <a:off x="6537960" y="1965960"/>
-            <a:ext cx="4443984" cy="3072384"/>
-          </a:xfrm>
-          <a:prstGeom prst="rect">
-            <a:avLst/>
-          </a:prstGeom>
-          <a:solidFill>
-            <a:srgbClr val="1A202B"/>
-          </a:solidFill>
-          <a:ln w="25400">
-            <a:solidFill>
-              <a:srgbClr val="FFC402"/>
-            </a:solidFill>
-          </a:ln>
-          <a:effectLst/>
-        </p:spPr>
-        <p:style>
-          <a:lnRef idx="1">
-            <a:schemeClr val="accent1"/>
-          </a:lnRef>
-          <a:fillRef idx="3">
-            <a:schemeClr val="accent1"/>
-          </a:fillRef>
-          <a:effectRef idx="2">
-            <a:schemeClr val="accent1"/>
-          </a:effectRef>
-          <a:fontRef idx="minor">
-            <a:schemeClr val="lt1"/>
-          </a:fontRef>
-        </p:style>
-        <p:txBody>
-          <a:bodyPr rtlCol="0" anchor="ctr"/>
-          <a:lstStyle/>
-          <a:p>
-            <a:pPr algn="ctr"/>
-          </a:p>
-        </p:txBody>
-      </p:sp>
-      <p:sp>
-        <p:nvSpPr>
-          <p:cNvPr id="15" name="TextBox 14"/>
+              <a:t>Per-IP on every write</a:t>
+            </a:r>
+          </a:p>
+        </p:txBody>
+      </p:sp>
+      <p:sp>
+        <p:nvSpPr>
+          <p:cNvPr id="12" name="TextBox 11"/>
           <p:cNvSpPr txBox="1"/>
           <p:nvPr/>
         </p:nvSpPr>
         <p:spPr>
           <a:xfrm>
-            <a:off x="6812280" y="2176272"/>
-            <a:ext cx="3931920" cy="365760"/>
+            <a:off x="5248656" y="5504688"/>
+            <a:ext cx="2057400" cy="566928"/>
           </a:xfrm>
           <a:prstGeom prst="rect">
             <a:avLst/>
@@ -6883,31 +6702,47 @@
           <a:p>
             <a:pPr algn="l">
               <a:spcAft>
-                <a:spcPts val="400"/>
-              </a:spcAft>
-            </a:pPr>
-            <a:r>
-              <a:rPr sz="1100" b="1" i="0">
-                <a:solidFill>
-                  <a:srgbClr val="FFC402"/>
+                <a:spcPts val="200"/>
+              </a:spcAft>
+            </a:pPr>
+            <a:r>
+              <a:rPr sz="1150" b="1" i="0">
+                <a:solidFill>
+                  <a:srgbClr val="0C2B45"/>
                 </a:solidFill>
                 <a:latin typeface="Calibri"/>
               </a:rPr>
-              <a:t>RESILIENCE</a:t>
-            </a:r>
-          </a:p>
-        </p:txBody>
-      </p:sp>
-      <p:sp>
-        <p:nvSpPr>
-          <p:cNvPr id="16" name="TextBox 15"/>
+              <a:t>Safe inputs</a:t>
+            </a:r>
+          </a:p>
+          <a:p>
+            <a:pPr algn="l">
+              <a:spcAft>
+                <a:spcPts val="0"/>
+              </a:spcAft>
+            </a:pPr>
+            <a:r>
+              <a:rPr sz="1000" b="0" i="0">
+                <a:solidFill>
+                  <a:srgbClr val="808285"/>
+                </a:solidFill>
+                <a:latin typeface="Calibri"/>
+              </a:rPr>
+              <a:t>Validated, type &amp; size capped</a:t>
+            </a:r>
+          </a:p>
+        </p:txBody>
+      </p:sp>
+      <p:sp>
+        <p:nvSpPr>
+          <p:cNvPr id="13" name="TextBox 12"/>
           <p:cNvSpPr txBox="1"/>
           <p:nvPr/>
         </p:nvSpPr>
         <p:spPr>
           <a:xfrm>
-            <a:off x="6812280" y="2487168"/>
-            <a:ext cx="3931920" cy="2377440"/>
+            <a:off x="7461504" y="5504688"/>
+            <a:ext cx="2057400" cy="566928"/>
           </a:xfrm>
           <a:prstGeom prst="rect">
             <a:avLst/>
@@ -6922,123 +6757,47 @@
           <a:p>
             <a:pPr algn="l">
               <a:spcAft>
-                <a:spcPts val="700"/>
-              </a:spcAft>
-            </a:pPr>
-            <a:r>
-              <a:rPr sz="1700" b="1" i="0">
-                <a:solidFill>
-                  <a:srgbClr val="F2E9D8"/>
-                </a:solidFill>
-                <a:latin typeface="Arial"/>
-              </a:rPr>
-              <a:t>Demo fallback mode</a:t>
-            </a:r>
-          </a:p>
-          <a:p>
-            <a:pPr algn="l">
-              <a:spcAft>
-                <a:spcPts val="700"/>
-              </a:spcAft>
-            </a:pPr>
-            <a:r>
-              <a:rPr sz="1150" b="0" i="0">
-                <a:solidFill>
-                  <a:srgbClr val="F2E9D8"/>
+                <a:spcPts val="200"/>
+              </a:spcAft>
+            </a:pPr>
+            <a:r>
+              <a:rPr sz="1150" b="1" i="0">
+                <a:solidFill>
+                  <a:srgbClr val="0C2B45"/>
                 </a:solidFill>
                 <a:latin typeface="Calibri"/>
               </a:rPr>
-              <a:t>One switch in the configuration screen runs the entire experience with no API calls at all.</a:t>
-            </a:r>
-          </a:p>
-          <a:p>
-            <a:pPr algn="l">
-              <a:spcAft>
-                <a:spcPts val="700"/>
-              </a:spcAft>
-            </a:pPr>
-            <a:r>
-              <a:rPr sz="1150" b="0" i="0">
-                <a:solidFill>
-                  <a:srgbClr val="F2E9D8"/>
+              <a:t>Browser hardening</a:t>
+            </a:r>
+          </a:p>
+          <a:p>
+            <a:pPr algn="l">
+              <a:spcAft>
+                <a:spcPts val="0"/>
+              </a:spcAft>
+            </a:pPr>
+            <a:r>
+              <a:rPr sz="1000" b="0" i="0">
+                <a:solidFill>
+                  <a:srgbClr val="808285"/>
                 </a:solidFill>
                 <a:latin typeface="Calibri"/>
               </a:rPr>
-              <a:t>It is not a recording. It reads whatever document is actually uploaded, extracts real quotes and builds the journey from those — so it still works on content it has never seen.</a:t>
-            </a:r>
-          </a:p>
-          <a:p>
-            <a:pPr algn="l">
-              <a:spcAft>
-                <a:spcPts val="0"/>
-              </a:spcAft>
-            </a:pPr>
-            <a:r>
-              <a:rPr sz="1150" b="0" i="1">
-                <a:solidFill>
-                  <a:srgbClr val="FFC402"/>
-                </a:solidFill>
-                <a:latin typeface="Calibri"/>
-              </a:rPr>
-              <a:t>If the network, the billing or a rate limit fails mid-demo, the session keeps running.</a:t>
-            </a:r>
-          </a:p>
-        </p:txBody>
-      </p:sp>
-      <p:sp>
-        <p:nvSpPr>
-          <p:cNvPr id="17" name="Rectangle 16"/>
-          <p:cNvSpPr/>
-          <p:nvPr/>
-        </p:nvSpPr>
-        <p:spPr>
-          <a:xfrm>
-            <a:off x="685800" y="5138928"/>
-            <a:ext cx="10296144" cy="932688"/>
-          </a:xfrm>
-          <a:prstGeom prst="rect">
-            <a:avLst/>
-          </a:prstGeom>
-          <a:solidFill>
-            <a:srgbClr val="262E3C"/>
-          </a:solidFill>
-          <a:ln>
-            <a:noFill/>
-          </a:ln>
-          <a:effectLst/>
-        </p:spPr>
-        <p:style>
-          <a:lnRef idx="1">
-            <a:schemeClr val="accent1"/>
-          </a:lnRef>
-          <a:fillRef idx="3">
-            <a:schemeClr val="accent1"/>
-          </a:fillRef>
-          <a:effectRef idx="2">
-            <a:schemeClr val="accent1"/>
-          </a:effectRef>
-          <a:fontRef idx="minor">
-            <a:schemeClr val="lt1"/>
-          </a:fontRef>
-        </p:style>
-        <p:txBody>
-          <a:bodyPr rtlCol="0" anchor="ctr"/>
-          <a:lstStyle/>
-          <a:p>
-            <a:pPr algn="ctr"/>
-          </a:p>
-        </p:txBody>
-      </p:sp>
-      <p:sp>
-        <p:nvSpPr>
-          <p:cNvPr id="18" name="TextBox 17"/>
+              <a:t>CSP, frame and sniff protection</a:t>
+            </a:r>
+          </a:p>
+        </p:txBody>
+      </p:sp>
+      <p:sp>
+        <p:nvSpPr>
+          <p:cNvPr id="14" name="TextBox 13"/>
           <p:cNvSpPr txBox="1"/>
           <p:nvPr/>
         </p:nvSpPr>
         <p:spPr>
           <a:xfrm>
-            <a:off x="960120" y="5321808"/>
-            <a:ext cx="9784080" cy="640080"/>
+            <a:off x="9674352" y="5504688"/>
+            <a:ext cx="2057400" cy="566928"/>
           </a:xfrm>
           <a:prstGeom prst="rect">
             <a:avLst/>
@@ -7053,17 +6812,17 @@
           <a:p>
             <a:pPr algn="l">
               <a:spcAft>
-                <a:spcPts val="300"/>
-              </a:spcAft>
-            </a:pPr>
-            <a:r>
-              <a:rPr sz="1300" b="1" i="0">
-                <a:solidFill>
-                  <a:srgbClr val="00A878"/>
+                <a:spcPts val="200"/>
+              </a:spcAft>
+            </a:pPr>
+            <a:r>
+              <a:rPr sz="1150" b="1" i="0">
+                <a:solidFill>
+                  <a:srgbClr val="0C2B45"/>
                 </a:solidFill>
                 <a:latin typeface="Calibri"/>
               </a:rPr>
-              <a:t>Measured live, not claimed.</a:t>
+              <a:t>No personal data</a:t>
             </a:r>
           </a:p>
           <a:p>
@@ -7073,27 +6832,27 @@
               </a:spcAft>
             </a:pPr>
             <a:r>
-              <a:rPr sz="1100" b="0" i="0">
-                <a:solidFill>
-                  <a:srgbClr val="F2E9D8"/>
+              <a:rPr sz="1000" b="0" i="0">
+                <a:solidFill>
+                  <a:srgbClr val="808285"/>
                 </a:solidFill>
                 <a:latin typeface="Calibri"/>
               </a:rPr>
-              <a:t>Response latency (p50 and p95), token use and cost per session are recorded on every turn and shown on the dashboard. We will read them off the live system during this demo rather than quote a number from a slide.</a:t>
-            </a:r>
-          </a:p>
-        </p:txBody>
-      </p:sp>
-      <p:sp>
-        <p:nvSpPr>
-          <p:cNvPr id="19" name="TextBox 18"/>
+              <a:t>Learners are random IDs</a:t>
+            </a:r>
+          </a:p>
+        </p:txBody>
+      </p:sp>
+      <p:sp>
+        <p:nvSpPr>
+          <p:cNvPr id="15" name="TextBox 14"/>
           <p:cNvSpPr txBox="1"/>
           <p:nvPr/>
         </p:nvSpPr>
         <p:spPr>
           <a:xfrm>
-            <a:off x="685800" y="6327648"/>
-            <a:ext cx="7315200" cy="274320"/>
+            <a:off x="822960" y="6345936"/>
+            <a:ext cx="8229600" cy="237744"/>
           </a:xfrm>
           <a:prstGeom prst="rect">
             <a:avLst/>
@@ -7108,31 +6867,31 @@
           <a:p>
             <a:pPr algn="l">
               <a:spcAft>
-                <a:spcPts val="400"/>
-              </a:spcAft>
-            </a:pPr>
-            <a:r>
-              <a:rPr sz="900" b="0" i="0">
-                <a:solidFill>
-                  <a:srgbClr val="A99A7C"/>
+                <a:spcPts val="500"/>
+              </a:spcAft>
+            </a:pPr>
+            <a:r>
+              <a:rPr sz="850" b="0" i="0">
+                <a:solidFill>
+                  <a:srgbClr val="808285"/>
                 </a:solidFill>
                 <a:latin typeface="Calibri"/>
               </a:rPr>
-              <a:t>Rehnuma  ·  candidate prototype for United Bank Limited</a:t>
-            </a:r>
-          </a:p>
-        </p:txBody>
-      </p:sp>
-      <p:sp>
-        <p:nvSpPr>
-          <p:cNvPr id="20" name="TextBox 19"/>
+              <a:t>Ayesha Faheem  ·  Digital HR &amp; AI Manager assignment  ·  prototype for assessment</a:t>
+            </a:r>
+          </a:p>
+        </p:txBody>
+      </p:sp>
+      <p:sp>
+        <p:nvSpPr>
+          <p:cNvPr id="16" name="TextBox 15"/>
           <p:cNvSpPr txBox="1"/>
           <p:nvPr/>
         </p:nvSpPr>
         <p:spPr>
           <a:xfrm>
-            <a:off x="10332720" y="6327648"/>
-            <a:ext cx="1143000" cy="274320"/>
+            <a:off x="10058400" y="6345936"/>
+            <a:ext cx="1307592" cy="237744"/>
           </a:xfrm>
           <a:prstGeom prst="rect">
             <a:avLst/>
@@ -7147,17 +6906,17 @@
           <a:p>
             <a:pPr algn="r">
               <a:spcAft>
-                <a:spcPts val="400"/>
-              </a:spcAft>
-            </a:pPr>
-            <a:r>
-              <a:rPr sz="900" b="0" i="0">
-                <a:solidFill>
-                  <a:srgbClr val="A99A7C"/>
+                <a:spcPts val="500"/>
+              </a:spcAft>
+            </a:pPr>
+            <a:r>
+              <a:rPr sz="850" b="0" i="0">
+                <a:solidFill>
+                  <a:srgbClr val="808285"/>
                 </a:solidFill>
                 <a:latin typeface="Calibri"/>
               </a:rPr>
-              <a:t>4 / 5</a:t>
+              <a:t>4 / 5</a:t>
             </a:r>
           </a:p>
         </p:txBody>
@@ -7195,7 +6954,7 @@
             <a:avLst/>
           </a:prstGeom>
           <a:solidFill>
-            <a:srgbClr val="10131A"/>
+            <a:srgbClr val="FFFFFF"/>
           </a:solidFill>
           <a:ln>
             <a:noFill/>
@@ -7232,8 +6991,8 @@
         </p:nvSpPr>
         <p:spPr>
           <a:xfrm>
-            <a:off x="685800" y="475488"/>
-            <a:ext cx="10789920" cy="274320"/>
+            <a:off x="822960" y="658368"/>
+            <a:ext cx="10545775" cy="237744"/>
           </a:xfrm>
           <a:prstGeom prst="rect">
             <a:avLst/>
@@ -7248,17 +7007,17 @@
           <a:p>
             <a:pPr algn="l">
               <a:spcAft>
-                <a:spcPts val="400"/>
-              </a:spcAft>
-            </a:pPr>
-            <a:r>
-              <a:rPr sz="1100" b="1" i="0">
-                <a:solidFill>
-                  <a:srgbClr val="A99A7C"/>
+                <a:spcPts val="500"/>
+              </a:spcAft>
+            </a:pPr>
+            <a:r>
+              <a:rPr sz="1050" b="1" i="0">
+                <a:solidFill>
+                  <a:srgbClr val="0083CA"/>
                 </a:solidFill>
                 <a:latin typeface="Calibri"/>
               </a:rPr>
-              <a:t>MEASUREMENT</a:t>
+              <a:t>MEASUREMENT &amp; OUTCOMES</a:t>
             </a:r>
           </a:p>
         </p:txBody>
@@ -7271,8 +7030,8 @@
         </p:nvSpPr>
         <p:spPr>
           <a:xfrm>
-            <a:off x="685800" y="786384"/>
-            <a:ext cx="10789920" cy="914400"/>
+            <a:off x="822960" y="969264"/>
+            <a:ext cx="10545775" cy="777240"/>
           </a:xfrm>
           <a:prstGeom prst="rect">
             <a:avLst/>
@@ -7287,15 +7046,15 @@
           <a:p>
             <a:pPr algn="l">
               <a:spcAft>
-                <a:spcPts val="400"/>
-              </a:spcAft>
-            </a:pPr>
-            <a:r>
-              <a:rPr sz="3800" b="1" i="0">
-                <a:solidFill>
-                  <a:srgbClr val="F2E9D8"/>
-                </a:solidFill>
-                <a:latin typeface="Arial"/>
+                <a:spcPts val="500"/>
+              </a:spcAft>
+            </a:pPr>
+            <a:r>
+              <a:rPr sz="4000" b="1" i="0">
+                <a:solidFill>
+                  <a:srgbClr val="0C2B45"/>
+                </a:solidFill>
+                <a:latin typeface="Cambria"/>
               </a:rPr>
               <a:t>How we know they learned</a:t>
             </a:r>
@@ -7310,8 +7069,8 @@
         </p:nvSpPr>
         <p:spPr>
           <a:xfrm>
-            <a:off x="685800" y="1874519"/>
-            <a:ext cx="10789920" cy="320040"/>
+            <a:off x="822960" y="1901952"/>
+            <a:ext cx="10545775" cy="749808"/>
           </a:xfrm>
           <a:prstGeom prst="rect">
             <a:avLst/>
@@ -7325,38 +7084,371 @@
           <a:lstStyle/>
           <a:p>
             <a:pPr algn="l">
-              <a:spcAft>
-                <a:spcPts val="400"/>
-              </a:spcAft>
-            </a:pPr>
-            <a:r>
-              <a:rPr sz="1250" b="0" i="0">
-                <a:solidFill>
-                  <a:srgbClr val="F2E9D8"/>
+              <a:lnSpc>
+                <a:spcPct val="115000"/>
+              </a:lnSpc>
+              <a:spcAft>
+                <a:spcPts val="500"/>
+              </a:spcAft>
+            </a:pPr>
+            <a:r>
+              <a:rPr sz="1800" b="0" i="0">
+                <a:solidFill>
+                  <a:srgbClr val="0F5885"/>
+                </a:solidFill>
+                <a:latin typeface="Cambria"/>
+              </a:rPr>
+              <a:t>Six things are watched in every reply. Each one is recorded next to the learner’s own words, so progress can be audited rather than trusted.</a:t>
+            </a:r>
+          </a:p>
+        </p:txBody>
+      </p:sp>
+      <p:sp>
+        <p:nvSpPr>
+          <p:cNvPr id="6" name="TextBox 5"/>
+          <p:cNvSpPr txBox="1"/>
+          <p:nvPr/>
+        </p:nvSpPr>
+        <p:spPr>
+          <a:xfrm>
+            <a:off x="822960" y="2871216"/>
+            <a:ext cx="3383280" cy="658368"/>
+          </a:xfrm>
+          <a:prstGeom prst="rect">
+            <a:avLst/>
+          </a:prstGeom>
+          <a:noFill/>
+        </p:spPr>
+        <p:txBody>
+          <a:bodyPr wrap="square" lIns="0" rIns="0" tIns="0" bIns="0" anchor="t">
+            <a:spAutoFit/>
+          </a:bodyPr>
+          <a:lstStyle/>
+          <a:p>
+            <a:pPr algn="l">
+              <a:spcAft>
+                <a:spcPts val="300"/>
+              </a:spcAft>
+            </a:pPr>
+            <a:r>
+              <a:rPr sz="1300" b="1" i="0">
+                <a:solidFill>
+                  <a:srgbClr val="0C2B45"/>
+                </a:solidFill>
+                <a:latin typeface="Cambria"/>
+              </a:rPr>
+              <a:t>Applied it</a:t>
+            </a:r>
+          </a:p>
+          <a:p>
+            <a:pPr algn="l">
+              <a:spcAft>
+                <a:spcPts val="0"/>
+              </a:spcAft>
+            </a:pPr>
+            <a:r>
+              <a:rPr sz="1100" b="0" i="0">
+                <a:solidFill>
+                  <a:srgbClr val="808285"/>
                 </a:solidFill>
                 <a:latin typeface="Calibri"/>
               </a:rPr>
-              <a:t>Six behavioural signals are judged on every turn — each recorded with the learner’s own words as evidence.</a:t>
-            </a:r>
-          </a:p>
-        </p:txBody>
-      </p:sp>
-      <p:sp>
-        <p:nvSpPr>
-          <p:cNvPr id="6" name="Rectangle 5"/>
+              <a:t>Used the idea on a new example</a:t>
+            </a:r>
+          </a:p>
+        </p:txBody>
+      </p:sp>
+      <p:sp>
+        <p:nvSpPr>
+          <p:cNvPr id="7" name="TextBox 6"/>
+          <p:cNvSpPr txBox="1"/>
+          <p:nvPr/>
+        </p:nvSpPr>
+        <p:spPr>
+          <a:xfrm>
+            <a:off x="4434840" y="2871216"/>
+            <a:ext cx="3383280" cy="658368"/>
+          </a:xfrm>
+          <a:prstGeom prst="rect">
+            <a:avLst/>
+          </a:prstGeom>
+          <a:noFill/>
+        </p:spPr>
+        <p:txBody>
+          <a:bodyPr wrap="square" lIns="0" rIns="0" tIns="0" bIns="0" anchor="t">
+            <a:spAutoFit/>
+          </a:bodyPr>
+          <a:lstStyle/>
+          <a:p>
+            <a:pPr algn="l">
+              <a:spcAft>
+                <a:spcPts val="300"/>
+              </a:spcAft>
+            </a:pPr>
+            <a:r>
+              <a:rPr sz="1300" b="1" i="0">
+                <a:solidFill>
+                  <a:srgbClr val="0C2B45"/>
+                </a:solidFill>
+                <a:latin typeface="Cambria"/>
+              </a:rPr>
+              <a:t>Corrected themselves</a:t>
+            </a:r>
+          </a:p>
+          <a:p>
+            <a:pPr algn="l">
+              <a:spcAft>
+                <a:spcPts val="0"/>
+              </a:spcAft>
+            </a:pPr>
+            <a:r>
+              <a:rPr sz="1100" b="0" i="0">
+                <a:solidFill>
+                  <a:srgbClr val="808285"/>
+                </a:solidFill>
+                <a:latin typeface="Calibri"/>
+              </a:rPr>
+              <a:t>Caught their own mistake mid-thought</a:t>
+            </a:r>
+          </a:p>
+        </p:txBody>
+      </p:sp>
+      <p:sp>
+        <p:nvSpPr>
+          <p:cNvPr id="8" name="TextBox 7"/>
+          <p:cNvSpPr txBox="1"/>
+          <p:nvPr/>
+        </p:nvSpPr>
+        <p:spPr>
+          <a:xfrm>
+            <a:off x="8046720" y="2871216"/>
+            <a:ext cx="3383280" cy="658368"/>
+          </a:xfrm>
+          <a:prstGeom prst="rect">
+            <a:avLst/>
+          </a:prstGeom>
+          <a:noFill/>
+        </p:spPr>
+        <p:txBody>
+          <a:bodyPr wrap="square" lIns="0" rIns="0" tIns="0" bIns="0" anchor="t">
+            <a:spAutoFit/>
+          </a:bodyPr>
+          <a:lstStyle/>
+          <a:p>
+            <a:pPr algn="l">
+              <a:spcAft>
+                <a:spcPts val="300"/>
+              </a:spcAft>
+            </a:pPr>
+            <a:r>
+              <a:rPr sz="1300" b="1" i="0">
+                <a:solidFill>
+                  <a:srgbClr val="0C2B45"/>
+                </a:solidFill>
+                <a:latin typeface="Cambria"/>
+              </a:rPr>
+              <a:t>Borrowed the vocabulary</a:t>
+            </a:r>
+          </a:p>
+          <a:p>
+            <a:pPr algn="l">
+              <a:spcAft>
+                <a:spcPts val="0"/>
+              </a:spcAft>
+            </a:pPr>
+            <a:r>
+              <a:rPr sz="1100" b="0" i="0">
+                <a:solidFill>
+                  <a:srgbClr val="808285"/>
+                </a:solidFill>
+                <a:latin typeface="Calibri"/>
+              </a:rPr>
+              <a:t>Started using the material’s terms</a:t>
+            </a:r>
+          </a:p>
+        </p:txBody>
+      </p:sp>
+      <p:sp>
+        <p:nvSpPr>
+          <p:cNvPr id="9" name="TextBox 8"/>
+          <p:cNvSpPr txBox="1"/>
+          <p:nvPr/>
+        </p:nvSpPr>
+        <p:spPr>
+          <a:xfrm>
+            <a:off x="822960" y="3712464"/>
+            <a:ext cx="3383280" cy="658368"/>
+          </a:xfrm>
+          <a:prstGeom prst="rect">
+            <a:avLst/>
+          </a:prstGeom>
+          <a:noFill/>
+        </p:spPr>
+        <p:txBody>
+          <a:bodyPr wrap="square" lIns="0" rIns="0" tIns="0" bIns="0" anchor="t">
+            <a:spAutoFit/>
+          </a:bodyPr>
+          <a:lstStyle/>
+          <a:p>
+            <a:pPr algn="l">
+              <a:spcAft>
+                <a:spcPts val="300"/>
+              </a:spcAft>
+            </a:pPr>
+            <a:r>
+              <a:rPr sz="1300" b="1" i="0">
+                <a:solidFill>
+                  <a:srgbClr val="0C2B45"/>
+                </a:solidFill>
+                <a:latin typeface="Cambria"/>
+              </a:rPr>
+              <a:t>Asked ahead</a:t>
+            </a:r>
+          </a:p>
+          <a:p>
+            <a:pPr algn="l">
+              <a:spcAft>
+                <a:spcPts val="0"/>
+              </a:spcAft>
+            </a:pPr>
+            <a:r>
+              <a:rPr sz="1100" b="0" i="0">
+                <a:solidFill>
+                  <a:srgbClr val="808285"/>
+                </a:solidFill>
+                <a:latin typeface="Calibri"/>
+              </a:rPr>
+              <a:t>Questioned beyond what was covered</a:t>
+            </a:r>
+          </a:p>
+        </p:txBody>
+      </p:sp>
+      <p:sp>
+        <p:nvSpPr>
+          <p:cNvPr id="10" name="TextBox 9"/>
+          <p:cNvSpPr txBox="1"/>
+          <p:nvPr/>
+        </p:nvSpPr>
+        <p:spPr>
+          <a:xfrm>
+            <a:off x="4434840" y="3712464"/>
+            <a:ext cx="3383280" cy="658368"/>
+          </a:xfrm>
+          <a:prstGeom prst="rect">
+            <a:avLst/>
+          </a:prstGeom>
+          <a:noFill/>
+        </p:spPr>
+        <p:txBody>
+          <a:bodyPr wrap="square" lIns="0" rIns="0" tIns="0" bIns="0" anchor="t">
+            <a:spAutoFit/>
+          </a:bodyPr>
+          <a:lstStyle/>
+          <a:p>
+            <a:pPr algn="l">
+              <a:spcAft>
+                <a:spcPts val="300"/>
+              </a:spcAft>
+            </a:pPr>
+            <a:r>
+              <a:rPr sz="1300" b="1" i="0">
+                <a:solidFill>
+                  <a:srgbClr val="0C2B45"/>
+                </a:solidFill>
+                <a:latin typeface="Cambria"/>
+              </a:rPr>
+              <a:t>Leaned on a hint</a:t>
+            </a:r>
+          </a:p>
+          <a:p>
+            <a:pPr algn="l">
+              <a:spcAft>
+                <a:spcPts val="0"/>
+              </a:spcAft>
+            </a:pPr>
+            <a:r>
+              <a:rPr sz="1100" b="0" i="0">
+                <a:solidFill>
+                  <a:srgbClr val="808285"/>
+                </a:solidFill>
+                <a:latin typeface="Calibri"/>
+              </a:rPr>
+              <a:t>Needed carrying — counts against</a:t>
+            </a:r>
+          </a:p>
+        </p:txBody>
+      </p:sp>
+      <p:sp>
+        <p:nvSpPr>
+          <p:cNvPr id="11" name="TextBox 10"/>
+          <p:cNvSpPr txBox="1"/>
+          <p:nvPr/>
+        </p:nvSpPr>
+        <p:spPr>
+          <a:xfrm>
+            <a:off x="8046720" y="3712464"/>
+            <a:ext cx="3383280" cy="658368"/>
+          </a:xfrm>
+          <a:prstGeom prst="rect">
+            <a:avLst/>
+          </a:prstGeom>
+          <a:noFill/>
+        </p:spPr>
+        <p:txBody>
+          <a:bodyPr wrap="square" lIns="0" rIns="0" tIns="0" bIns="0" anchor="t">
+            <a:spAutoFit/>
+          </a:bodyPr>
+          <a:lstStyle/>
+          <a:p>
+            <a:pPr algn="l">
+              <a:spcAft>
+                <a:spcPts val="300"/>
+              </a:spcAft>
+            </a:pPr>
+            <a:r>
+              <a:rPr sz="1300" b="1" i="0">
+                <a:solidFill>
+                  <a:srgbClr val="0C2B45"/>
+                </a:solidFill>
+                <a:latin typeface="Cambria"/>
+              </a:rPr>
+              <a:t>Remembered</a:t>
+            </a:r>
+          </a:p>
+          <a:p>
+            <a:pPr algn="l">
+              <a:spcAft>
+                <a:spcPts val="0"/>
+              </a:spcAft>
+            </a:pPr>
+            <a:r>
+              <a:rPr sz="1100" b="0" i="0">
+                <a:solidFill>
+                  <a:srgbClr val="808285"/>
+                </a:solidFill>
+                <a:latin typeface="Calibri"/>
+              </a:rPr>
+              <a:t>Recalled something from earlier</a:t>
+            </a:r>
+          </a:p>
+        </p:txBody>
+      </p:sp>
+      <p:sp>
+        <p:nvSpPr>
+          <p:cNvPr id="12" name="Rectangle 11"/>
           <p:cNvSpPr/>
           <p:nvPr/>
         </p:nvSpPr>
         <p:spPr>
           <a:xfrm>
-            <a:off x="685800" y="2359152"/>
-            <a:ext cx="3364992" cy="786384"/>
+            <a:off x="822960" y="4645152"/>
+            <a:ext cx="10545775" cy="25603"/>
           </a:xfrm>
           <a:prstGeom prst="rect">
             <a:avLst/>
           </a:prstGeom>
           <a:solidFill>
-            <a:srgbClr val="1A202B"/>
+            <a:srgbClr val="E6E7E8"/>
           </a:solidFill>
           <a:ln>
             <a:noFill/>
@@ -7387,14 +7479,14 @@
       </p:sp>
       <p:sp>
         <p:nvSpPr>
-          <p:cNvPr id="7" name="TextBox 6"/>
+          <p:cNvPr id="13" name="TextBox 12"/>
           <p:cNvSpPr txBox="1"/>
           <p:nvPr/>
         </p:nvSpPr>
         <p:spPr>
           <a:xfrm>
-            <a:off x="886968" y="2496312"/>
-            <a:ext cx="3017520" cy="548640"/>
+            <a:off x="822960" y="4901184"/>
+            <a:ext cx="4937760" cy="1280160"/>
           </a:xfrm>
           <a:prstGeom prst="rect">
             <a:avLst/>
@@ -7409,17 +7501,17 @@
           <a:p>
             <a:pPr algn="l">
               <a:spcAft>
-                <a:spcPts val="200"/>
-              </a:spcAft>
-            </a:pPr>
-            <a:r>
-              <a:rPr sz="1250" b="1" i="0">
-                <a:solidFill>
-                  <a:srgbClr val="00A878"/>
+                <a:spcPts val="800"/>
+              </a:spcAft>
+            </a:pPr>
+            <a:r>
+              <a:rPr sz="950" b="1" i="0">
+                <a:solidFill>
+                  <a:srgbClr val="0083CA"/>
                 </a:solidFill>
                 <a:latin typeface="Calibri"/>
               </a:rPr>
-              <a:t>Applied correctly</a:t>
+              <a:t>WHAT THIS LOOKS LIKE IN PRACTICE</a:t>
             </a:r>
           </a:p>
           <a:p>
@@ -7429,71 +7521,27 @@
               </a:spcAft>
             </a:pPr>
             <a:r>
-              <a:rPr sz="1000" b="0" i="0">
-                <a:solidFill>
-                  <a:srgbClr val="A99A7C"/>
+              <a:rPr sz="1250" b="0" i="0">
+                <a:solidFill>
+                  <a:srgbClr val="808285"/>
                 </a:solidFill>
                 <a:latin typeface="Calibri"/>
               </a:rPr>
-              <a:t>Used the idea on a new example</a:t>
-            </a:r>
-          </a:p>
-        </p:txBody>
-      </p:sp>
-      <p:sp>
-        <p:nvSpPr>
-          <p:cNvPr id="8" name="Rectangle 7"/>
-          <p:cNvSpPr/>
-          <p:nvPr/>
-        </p:nvSpPr>
-        <p:spPr>
-          <a:xfrm>
-            <a:off x="4297680" y="2359152"/>
-            <a:ext cx="3364992" cy="786384"/>
-          </a:xfrm>
-          <a:prstGeom prst="rect">
-            <a:avLst/>
-          </a:prstGeom>
-          <a:solidFill>
-            <a:srgbClr val="1A202B"/>
-          </a:solidFill>
-          <a:ln>
-            <a:noFill/>
-          </a:ln>
-          <a:effectLst/>
-        </p:spPr>
-        <p:style>
-          <a:lnRef idx="1">
-            <a:schemeClr val="accent1"/>
-          </a:lnRef>
-          <a:fillRef idx="3">
-            <a:schemeClr val="accent1"/>
-          </a:fillRef>
-          <a:effectRef idx="2">
-            <a:schemeClr val="accent1"/>
-          </a:effectRef>
-          <a:fontRef idx="minor">
-            <a:schemeClr val="lt1"/>
-          </a:fontRef>
-        </p:style>
-        <p:txBody>
-          <a:bodyPr rtlCol="0" anchor="ctr"/>
-          <a:lstStyle/>
-          <a:p>
-            <a:pPr algn="ctr"/>
-          </a:p>
-        </p:txBody>
-      </p:sp>
-      <p:sp>
-        <p:nvSpPr>
-          <p:cNvPr id="9" name="TextBox 8"/>
+              <a:t>A learner typed “idk”. The system logged a hint dependency, eased the challenge, reset the streak and lowered that concept’s mastery — without ever marking an answer wrong.</a:t>
+            </a:r>
+          </a:p>
+        </p:txBody>
+      </p:sp>
+      <p:sp>
+        <p:nvSpPr>
+          <p:cNvPr id="14" name="TextBox 13"/>
           <p:cNvSpPr txBox="1"/>
           <p:nvPr/>
         </p:nvSpPr>
         <p:spPr>
           <a:xfrm>
-            <a:off x="4498848" y="2496312"/>
-            <a:ext cx="3017520" cy="548640"/>
+            <a:off x="6309360" y="4901184"/>
+            <a:ext cx="5074920" cy="1280160"/>
           </a:xfrm>
           <a:prstGeom prst="rect">
             <a:avLst/>
@@ -7508,17 +7556,17 @@
           <a:p>
             <a:pPr algn="l">
               <a:spcAft>
-                <a:spcPts val="200"/>
-              </a:spcAft>
-            </a:pPr>
-            <a:r>
-              <a:rPr sz="1250" b="1" i="0">
-                <a:solidFill>
-                  <a:srgbClr val="00A878"/>
+                <a:spcPts val="800"/>
+              </a:spcAft>
+            </a:pPr>
+            <a:r>
+              <a:rPr sz="950" b="1" i="0">
+                <a:solidFill>
+                  <a:srgbClr val="0083CA"/>
                 </a:solidFill>
                 <a:latin typeface="Calibri"/>
               </a:rPr>
-              <a:t>Self-corrected</a:t>
+              <a:t>AND WHAT YOU CAN TAKE AWAY</a:t>
             </a:r>
           </a:p>
           <a:p>
@@ -7528,71 +7576,27 @@
               </a:spcAft>
             </a:pPr>
             <a:r>
-              <a:rPr sz="1000" b="0" i="0">
-                <a:solidFill>
-                  <a:srgbClr val="A99A7C"/>
+              <a:rPr sz="1250" b="0" i="0">
+                <a:solidFill>
+                  <a:srgbClr val="808285"/>
                 </a:solidFill>
                 <a:latin typeface="Calibri"/>
               </a:rPr>
-              <a:t>Caught their own mistake mid-thought</a:t>
-            </a:r>
-          </a:p>
-        </p:txBody>
-      </p:sp>
-      <p:sp>
-        <p:nvSpPr>
-          <p:cNvPr id="10" name="Rectangle 9"/>
-          <p:cNvSpPr/>
-          <p:nvPr/>
-        </p:nvSpPr>
-        <p:spPr>
-          <a:xfrm>
-            <a:off x="7909560" y="2359152"/>
-            <a:ext cx="3364992" cy="786384"/>
-          </a:xfrm>
-          <a:prstGeom prst="rect">
-            <a:avLst/>
-          </a:prstGeom>
-          <a:solidFill>
-            <a:srgbClr val="1A202B"/>
-          </a:solidFill>
-          <a:ln>
-            <a:noFill/>
-          </a:ln>
-          <a:effectLst/>
-        </p:spPr>
-        <p:style>
-          <a:lnRef idx="1">
-            <a:schemeClr val="accent1"/>
-          </a:lnRef>
-          <a:fillRef idx="3">
-            <a:schemeClr val="accent1"/>
-          </a:fillRef>
-          <a:effectRef idx="2">
-            <a:schemeClr val="accent1"/>
-          </a:effectRef>
-          <a:fontRef idx="minor">
-            <a:schemeClr val="lt1"/>
-          </a:fontRef>
-        </p:style>
-        <p:txBody>
-          <a:bodyPr rtlCol="0" anchor="ctr"/>
-          <a:lstStyle/>
-          <a:p>
-            <a:pPr algn="ctr"/>
-          </a:p>
-        </p:txBody>
-      </p:sp>
-      <p:sp>
-        <p:nvSpPr>
-          <p:cNvPr id="11" name="TextBox 10"/>
+              <a:t>A live evidence feed, before-and-after mastery per concept, engagement and response times — all exportable as a spreadsheet. The figures in this demo are read from the running system, not from this slide.</a:t>
+            </a:r>
+          </a:p>
+        </p:txBody>
+      </p:sp>
+      <p:sp>
+        <p:nvSpPr>
+          <p:cNvPr id="15" name="TextBox 14"/>
           <p:cNvSpPr txBox="1"/>
           <p:nvPr/>
         </p:nvSpPr>
         <p:spPr>
           <a:xfrm>
-            <a:off x="8110728" y="2496312"/>
-            <a:ext cx="3017520" cy="548640"/>
+            <a:off x="822960" y="6345936"/>
+            <a:ext cx="8229600" cy="237744"/>
           </a:xfrm>
           <a:prstGeom prst="rect">
             <a:avLst/>
@@ -7607,91 +7611,31 @@
           <a:p>
             <a:pPr algn="l">
               <a:spcAft>
-                <a:spcPts val="200"/>
-              </a:spcAft>
-            </a:pPr>
-            <a:r>
-              <a:rPr sz="1250" b="1" i="0">
-                <a:solidFill>
-                  <a:srgbClr val="00A878"/>
+                <a:spcPts val="500"/>
+              </a:spcAft>
+            </a:pPr>
+            <a:r>
+              <a:rPr sz="850" b="0" i="0">
+                <a:solidFill>
+                  <a:srgbClr val="808285"/>
                 </a:solidFill>
                 <a:latin typeface="Calibri"/>
               </a:rPr>
-              <a:t>Source vocabulary</a:t>
-            </a:r>
-          </a:p>
-          <a:p>
-            <a:pPr algn="l">
-              <a:spcAft>
-                <a:spcPts val="0"/>
-              </a:spcAft>
-            </a:pPr>
-            <a:r>
-              <a:rPr sz="1000" b="0" i="0">
-                <a:solidFill>
-                  <a:srgbClr val="A99A7C"/>
-                </a:solidFill>
-                <a:latin typeface="Calibri"/>
-              </a:rPr>
-              <a:t>Adopted the material’s terms unprompted</a:t>
-            </a:r>
-          </a:p>
-        </p:txBody>
-      </p:sp>
-      <p:sp>
-        <p:nvSpPr>
-          <p:cNvPr id="12" name="Rectangle 11"/>
-          <p:cNvSpPr/>
-          <p:nvPr/>
-        </p:nvSpPr>
-        <p:spPr>
-          <a:xfrm>
-            <a:off x="685800" y="3291840"/>
-            <a:ext cx="3364992" cy="786384"/>
-          </a:xfrm>
-          <a:prstGeom prst="rect">
-            <a:avLst/>
-          </a:prstGeom>
-          <a:solidFill>
-            <a:srgbClr val="1A202B"/>
-          </a:solidFill>
-          <a:ln>
-            <a:noFill/>
-          </a:ln>
-          <a:effectLst/>
-        </p:spPr>
-        <p:style>
-          <a:lnRef idx="1">
-            <a:schemeClr val="accent1"/>
-          </a:lnRef>
-          <a:fillRef idx="3">
-            <a:schemeClr val="accent1"/>
-          </a:fillRef>
-          <a:effectRef idx="2">
-            <a:schemeClr val="accent1"/>
-          </a:effectRef>
-          <a:fontRef idx="minor">
-            <a:schemeClr val="lt1"/>
-          </a:fontRef>
-        </p:style>
-        <p:txBody>
-          <a:bodyPr rtlCol="0" anchor="ctr"/>
-          <a:lstStyle/>
-          <a:p>
-            <a:pPr algn="ctr"/>
-          </a:p>
-        </p:txBody>
-      </p:sp>
-      <p:sp>
-        <p:nvSpPr>
-          <p:cNvPr id="13" name="TextBox 12"/>
+              <a:t>Ayesha Faheem  ·  Digital HR &amp; AI Manager assignment  ·  prototype for assessment</a:t>
+            </a:r>
+          </a:p>
+        </p:txBody>
+      </p:sp>
+      <p:sp>
+        <p:nvSpPr>
+          <p:cNvPr id="16" name="TextBox 15"/>
           <p:cNvSpPr txBox="1"/>
           <p:nvPr/>
         </p:nvSpPr>
         <p:spPr>
           <a:xfrm>
-            <a:off x="886968" y="3429000"/>
-            <a:ext cx="3017520" cy="548640"/>
+            <a:off x="10058400" y="6345936"/>
+            <a:ext cx="1307592" cy="237744"/>
           </a:xfrm>
           <a:prstGeom prst="rect">
             <a:avLst/>
@@ -7704,557 +7648,19 @@
           </a:bodyPr>
           <a:lstStyle/>
           <a:p>
-            <a:pPr algn="l">
-              <a:spcAft>
-                <a:spcPts val="200"/>
-              </a:spcAft>
-            </a:pPr>
-            <a:r>
-              <a:rPr sz="1250" b="1" i="0">
-                <a:solidFill>
-                  <a:srgbClr val="00B4D8"/>
+            <a:pPr algn="r">
+              <a:spcAft>
+                <a:spcPts val="500"/>
+              </a:spcAft>
+            </a:pPr>
+            <a:r>
+              <a:rPr sz="850" b="0" i="0">
+                <a:solidFill>
+                  <a:srgbClr val="808285"/>
                 </a:solidFill>
                 <a:latin typeface="Calibri"/>
               </a:rPr>
-              <a:t>Deepening question</a:t>
-            </a:r>
-          </a:p>
-          <a:p>
-            <a:pPr algn="l">
-              <a:spcAft>
-                <a:spcPts val="0"/>
-              </a:spcAft>
-            </a:pPr>
-            <a:r>
-              <a:rPr sz="1000" b="0" i="0">
-                <a:solidFill>
-                  <a:srgbClr val="A99A7C"/>
-                </a:solidFill>
-                <a:latin typeface="Calibri"/>
-              </a:rPr>
-              <a:t>Asked something ahead of the lesson</a:t>
-            </a:r>
-          </a:p>
-        </p:txBody>
-      </p:sp>
-      <p:sp>
-        <p:nvSpPr>
-          <p:cNvPr id="14" name="Rectangle 13"/>
-          <p:cNvSpPr/>
-          <p:nvPr/>
-        </p:nvSpPr>
-        <p:spPr>
-          <a:xfrm>
-            <a:off x="4297680" y="3291840"/>
-            <a:ext cx="3364992" cy="786384"/>
-          </a:xfrm>
-          <a:prstGeom prst="rect">
-            <a:avLst/>
-          </a:prstGeom>
-          <a:solidFill>
-            <a:srgbClr val="1A202B"/>
-          </a:solidFill>
-          <a:ln>
-            <a:noFill/>
-          </a:ln>
-          <a:effectLst/>
-        </p:spPr>
-        <p:style>
-          <a:lnRef idx="1">
-            <a:schemeClr val="accent1"/>
-          </a:lnRef>
-          <a:fillRef idx="3">
-            <a:schemeClr val="accent1"/>
-          </a:fillRef>
-          <a:effectRef idx="2">
-            <a:schemeClr val="accent1"/>
-          </a:effectRef>
-          <a:fontRef idx="minor">
-            <a:schemeClr val="lt1"/>
-          </a:fontRef>
-        </p:style>
-        <p:txBody>
-          <a:bodyPr rtlCol="0" anchor="ctr"/>
-          <a:lstStyle/>
-          <a:p>
-            <a:pPr algn="ctr"/>
-          </a:p>
-        </p:txBody>
-      </p:sp>
-      <p:sp>
-        <p:nvSpPr>
-          <p:cNvPr id="15" name="TextBox 14"/>
-          <p:cNvSpPr txBox="1"/>
-          <p:nvPr/>
-        </p:nvSpPr>
-        <p:spPr>
-          <a:xfrm>
-            <a:off x="4498848" y="3429000"/>
-            <a:ext cx="3017520" cy="548640"/>
-          </a:xfrm>
-          <a:prstGeom prst="rect">
-            <a:avLst/>
-          </a:prstGeom>
-          <a:noFill/>
-        </p:spPr>
-        <p:txBody>
-          <a:bodyPr wrap="square" lIns="0" rIns="0" tIns="0" bIns="0" anchor="t">
-            <a:spAutoFit/>
-          </a:bodyPr>
-          <a:lstStyle/>
-          <a:p>
-            <a:pPr algn="l">
-              <a:spcAft>
-                <a:spcPts val="200"/>
-              </a:spcAft>
-            </a:pPr>
-            <a:r>
-              <a:rPr sz="1250" b="1" i="0">
-                <a:solidFill>
-                  <a:srgbClr val="E6006E"/>
-                </a:solidFill>
-                <a:latin typeface="Calibri"/>
-              </a:rPr>
-              <a:t>Hint dependency</a:t>
-            </a:r>
-          </a:p>
-          <a:p>
-            <a:pPr algn="l">
-              <a:spcAft>
-                <a:spcPts val="0"/>
-              </a:spcAft>
-            </a:pPr>
-            <a:r>
-              <a:rPr sz="1000" b="0" i="0">
-                <a:solidFill>
-                  <a:srgbClr val="A99A7C"/>
-                </a:solidFill>
-                <a:latin typeface="Calibri"/>
-              </a:rPr>
-              <a:t>Needed carrying to the answer</a:t>
-            </a:r>
-          </a:p>
-        </p:txBody>
-      </p:sp>
-      <p:sp>
-        <p:nvSpPr>
-          <p:cNvPr id="16" name="Rectangle 15"/>
-          <p:cNvSpPr/>
-          <p:nvPr/>
-        </p:nvSpPr>
-        <p:spPr>
-          <a:xfrm>
-            <a:off x="7909560" y="3291840"/>
-            <a:ext cx="3364992" cy="786384"/>
-          </a:xfrm>
-          <a:prstGeom prst="rect">
-            <a:avLst/>
-          </a:prstGeom>
-          <a:solidFill>
-            <a:srgbClr val="1A202B"/>
-          </a:solidFill>
-          <a:ln>
-            <a:noFill/>
-          </a:ln>
-          <a:effectLst/>
-        </p:spPr>
-        <p:style>
-          <a:lnRef idx="1">
-            <a:schemeClr val="accent1"/>
-          </a:lnRef>
-          <a:fillRef idx="3">
-            <a:schemeClr val="accent1"/>
-          </a:fillRef>
-          <a:effectRef idx="2">
-            <a:schemeClr val="accent1"/>
-          </a:effectRef>
-          <a:fontRef idx="minor">
-            <a:schemeClr val="lt1"/>
-          </a:fontRef>
-        </p:style>
-        <p:txBody>
-          <a:bodyPr rtlCol="0" anchor="ctr"/>
-          <a:lstStyle/>
-          <a:p>
-            <a:pPr algn="ctr"/>
-          </a:p>
-        </p:txBody>
-      </p:sp>
-      <p:sp>
-        <p:nvSpPr>
-          <p:cNvPr id="17" name="TextBox 16"/>
-          <p:cNvSpPr txBox="1"/>
-          <p:nvPr/>
-        </p:nvSpPr>
-        <p:spPr>
-          <a:xfrm>
-            <a:off x="8110728" y="3429000"/>
-            <a:ext cx="3017520" cy="548640"/>
-          </a:xfrm>
-          <a:prstGeom prst="rect">
-            <a:avLst/>
-          </a:prstGeom>
-          <a:noFill/>
-        </p:spPr>
-        <p:txBody>
-          <a:bodyPr wrap="square" lIns="0" rIns="0" tIns="0" bIns="0" anchor="t">
-            <a:spAutoFit/>
-          </a:bodyPr>
-          <a:lstStyle/>
-          <a:p>
-            <a:pPr algn="l">
-              <a:spcAft>
-                <a:spcPts val="200"/>
-              </a:spcAft>
-            </a:pPr>
-            <a:r>
-              <a:rPr sz="1250" b="1" i="0">
-                <a:solidFill>
-                  <a:srgbClr val="00B4D8"/>
-                </a:solidFill>
-                <a:latin typeface="Calibri"/>
-              </a:rPr>
-              <a:t>Retention</a:t>
-            </a:r>
-          </a:p>
-          <a:p>
-            <a:pPr algn="l">
-              <a:spcAft>
-                <a:spcPts val="0"/>
-              </a:spcAft>
-            </a:pPr>
-            <a:r>
-              <a:rPr sz="1000" b="0" i="0">
-                <a:solidFill>
-                  <a:srgbClr val="A99A7C"/>
-                </a:solidFill>
-                <a:latin typeface="Calibri"/>
-              </a:rPr>
-              <a:t>Recalled something from turns earlier</a:t>
-            </a:r>
-          </a:p>
-        </p:txBody>
-      </p:sp>
-      <p:sp>
-        <p:nvSpPr>
-          <p:cNvPr id="18" name="Rectangle 17"/>
-          <p:cNvSpPr/>
-          <p:nvPr/>
-        </p:nvSpPr>
-        <p:spPr>
-          <a:xfrm>
-            <a:off x="685800" y="4407408"/>
-            <a:ext cx="4983480" cy="1664208"/>
-          </a:xfrm>
-          <a:prstGeom prst="rect">
-            <a:avLst/>
-          </a:prstGeom>
-          <a:solidFill>
-            <a:srgbClr val="262E3C"/>
-          </a:solidFill>
-          <a:ln>
-            <a:noFill/>
-          </a:ln>
-          <a:effectLst/>
-        </p:spPr>
-        <p:style>
-          <a:lnRef idx="1">
-            <a:schemeClr val="accent1"/>
-          </a:lnRef>
-          <a:fillRef idx="3">
-            <a:schemeClr val="accent1"/>
-          </a:fillRef>
-          <a:effectRef idx="2">
-            <a:schemeClr val="accent1"/>
-          </a:effectRef>
-          <a:fontRef idx="minor">
-            <a:schemeClr val="lt1"/>
-          </a:fontRef>
-        </p:style>
-        <p:txBody>
-          <a:bodyPr rtlCol="0" anchor="ctr"/>
-          <a:lstStyle/>
-          <a:p>
-            <a:pPr algn="ctr"/>
-          </a:p>
-        </p:txBody>
-      </p:sp>
-      <p:sp>
-        <p:nvSpPr>
-          <p:cNvPr id="19" name="TextBox 18"/>
-          <p:cNvSpPr txBox="1"/>
-          <p:nvPr/>
-        </p:nvSpPr>
-        <p:spPr>
-          <a:xfrm>
-            <a:off x="960120" y="4590288"/>
-            <a:ext cx="4480560" cy="1371600"/>
-          </a:xfrm>
-          <a:prstGeom prst="rect">
-            <a:avLst/>
-          </a:prstGeom>
-          <a:noFill/>
-        </p:spPr>
-        <p:txBody>
-          <a:bodyPr wrap="square" lIns="0" rIns="0" tIns="0" bIns="0" anchor="t">
-            <a:spAutoFit/>
-          </a:bodyPr>
-          <a:lstStyle/>
-          <a:p>
-            <a:pPr algn="l">
-              <a:spcAft>
-                <a:spcPts val="600"/>
-              </a:spcAft>
-            </a:pPr>
-            <a:r>
-              <a:rPr sz="1000" b="1" i="0">
-                <a:solidFill>
-                  <a:srgbClr val="FFC402"/>
-                </a:solidFill>
-                <a:latin typeface="Calibri"/>
-              </a:rPr>
-              <a:t>WORKED EXAMPLE</a:t>
-            </a:r>
-          </a:p>
-          <a:p>
-            <a:pPr algn="l">
-              <a:spcAft>
-                <a:spcPts val="500"/>
-              </a:spcAft>
-            </a:pPr>
-            <a:r>
-              <a:rPr sz="1200" b="0" i="1">
-                <a:solidFill>
-                  <a:srgbClr val="F2E9D8"/>
-                </a:solidFill>
-                <a:latin typeface="Calibri"/>
-              </a:rPr>
-              <a:t>Learner typed: “idk”</a:t>
-            </a:r>
-          </a:p>
-          <a:p>
-            <a:pPr algn="l">
-              <a:spcAft>
-                <a:spcPts val="500"/>
-              </a:spcAft>
-            </a:pPr>
-            <a:r>
-              <a:rPr sz="1100" b="0" i="0">
-                <a:solidFill>
-                  <a:srgbClr val="E6006E"/>
-                </a:solidFill>
-                <a:latin typeface="Calibri"/>
-              </a:rPr>
-              <a:t>→ hint dependency detected  ·  mastery −0.05  ·  streak reset</a:t>
-            </a:r>
-          </a:p>
-          <a:p>
-            <a:pPr algn="l">
-              <a:spcAft>
-                <a:spcPts val="0"/>
-              </a:spcAft>
-            </a:pPr>
-            <a:r>
-              <a:rPr sz="1100" b="0" i="0">
-                <a:solidFill>
-                  <a:srgbClr val="00A878"/>
-                </a:solidFill>
-                <a:latin typeface="Calibri"/>
-              </a:rPr>
-              <a:t>→ the guide dropped the challenge and rephrased it instead</a:t>
-            </a:r>
-          </a:p>
-        </p:txBody>
-      </p:sp>
-      <p:sp>
-        <p:nvSpPr>
-          <p:cNvPr id="20" name="Rectangle 19"/>
-          <p:cNvSpPr/>
-          <p:nvPr/>
-        </p:nvSpPr>
-        <p:spPr>
-          <a:xfrm>
-            <a:off x="5989320" y="4407408"/>
-            <a:ext cx="4992624" cy="1664208"/>
-          </a:xfrm>
-          <a:prstGeom prst="rect">
-            <a:avLst/>
-          </a:prstGeom>
-          <a:solidFill>
-            <a:srgbClr val="262E3C"/>
-          </a:solidFill>
-          <a:ln>
-            <a:noFill/>
-          </a:ln>
-          <a:effectLst/>
-        </p:spPr>
-        <p:style>
-          <a:lnRef idx="1">
-            <a:schemeClr val="accent1"/>
-          </a:lnRef>
-          <a:fillRef idx="3">
-            <a:schemeClr val="accent1"/>
-          </a:fillRef>
-          <a:effectRef idx="2">
-            <a:schemeClr val="accent1"/>
-          </a:effectRef>
-          <a:fontRef idx="minor">
-            <a:schemeClr val="lt1"/>
-          </a:fontRef>
-        </p:style>
-        <p:txBody>
-          <a:bodyPr rtlCol="0" anchor="ctr"/>
-          <a:lstStyle/>
-          <a:p>
-            <a:pPr algn="ctr"/>
-          </a:p>
-        </p:txBody>
-      </p:sp>
-      <p:sp>
-        <p:nvSpPr>
-          <p:cNvPr id="21" name="TextBox 20"/>
-          <p:cNvSpPr txBox="1"/>
-          <p:nvPr/>
-        </p:nvSpPr>
-        <p:spPr>
-          <a:xfrm>
-            <a:off x="6263640" y="4590288"/>
-            <a:ext cx="4480560" cy="1371600"/>
-          </a:xfrm>
-          <a:prstGeom prst="rect">
-            <a:avLst/>
-          </a:prstGeom>
-          <a:noFill/>
-        </p:spPr>
-        <p:txBody>
-          <a:bodyPr wrap="square" lIns="0" rIns="0" tIns="0" bIns="0" anchor="t">
-            <a:spAutoFit/>
-          </a:bodyPr>
-          <a:lstStyle/>
-          <a:p>
-            <a:pPr algn="l">
-              <a:spcAft>
-                <a:spcPts val="600"/>
-              </a:spcAft>
-            </a:pPr>
-            <a:r>
-              <a:rPr sz="1000" b="1" i="0">
-                <a:solidFill>
-                  <a:srgbClr val="FFC402"/>
-                </a:solidFill>
-                <a:latin typeface="Calibri"/>
-              </a:rPr>
-              <a:t>WHAT THE PANEL SEES</a:t>
-            </a:r>
-          </a:p>
-          <a:p>
-            <a:pPr algn="l">
-              <a:spcAft>
-                <a:spcPts val="500"/>
-              </a:spcAft>
-            </a:pPr>
-            <a:r>
-              <a:rPr sz="1100" b="0" i="0">
-                <a:solidFill>
-                  <a:srgbClr val="F2E9D8"/>
-                </a:solidFill>
-                <a:latin typeface="Calibri"/>
-              </a:rPr>
-              <a:t>A live evidence feed listing every inferred signal beside the exact learner words that triggered it — so mastery is auditable, not asserted.</a:t>
-            </a:r>
-          </a:p>
-          <a:p>
-            <a:pPr algn="l">
-              <a:spcAft>
-                <a:spcPts val="0"/>
-              </a:spcAft>
-            </a:pPr>
-            <a:r>
-              <a:rPr sz="1100" b="0" i="0">
-                <a:solidFill>
-                  <a:srgbClr val="F2E9D8"/>
-                </a:solidFill>
-                <a:latin typeface="Calibri"/>
-              </a:rPr>
-              <a:t>Plus a before/after mastery report per concept, exportable as CSV.</a:t>
-            </a:r>
-          </a:p>
-        </p:txBody>
-      </p:sp>
-      <p:sp>
-        <p:nvSpPr>
-          <p:cNvPr id="22" name="TextBox 21"/>
-          <p:cNvSpPr txBox="1"/>
-          <p:nvPr/>
-        </p:nvSpPr>
-        <p:spPr>
-          <a:xfrm>
-            <a:off x="685800" y="6327648"/>
-            <a:ext cx="7315200" cy="274320"/>
-          </a:xfrm>
-          <a:prstGeom prst="rect">
-            <a:avLst/>
-          </a:prstGeom>
-          <a:noFill/>
-        </p:spPr>
-        <p:txBody>
-          <a:bodyPr wrap="square" lIns="0" rIns="0" tIns="0" bIns="0" anchor="t">
-            <a:spAutoFit/>
-          </a:bodyPr>
-          <a:lstStyle/>
-          <a:p>
-            <a:pPr algn="l">
-              <a:spcAft>
-                <a:spcPts val="400"/>
-              </a:spcAft>
-            </a:pPr>
-            <a:r>
-              <a:rPr sz="900" b="0" i="0">
-                <a:solidFill>
-                  <a:srgbClr val="A99A7C"/>
-                </a:solidFill>
-                <a:latin typeface="Calibri"/>
-              </a:rPr>
-              <a:t>Rehnuma  ·  candidate prototype for United Bank Limited</a:t>
-            </a:r>
-          </a:p>
-        </p:txBody>
-      </p:sp>
-      <p:sp>
-        <p:nvSpPr>
-          <p:cNvPr id="23" name="TextBox 22"/>
-          <p:cNvSpPr txBox="1"/>
-          <p:nvPr/>
-        </p:nvSpPr>
-        <p:spPr>
-          <a:xfrm>
-            <a:off x="10332720" y="6327648"/>
-            <a:ext cx="1143000" cy="274320"/>
-          </a:xfrm>
-          <a:prstGeom prst="rect">
-            <a:avLst/>
-          </a:prstGeom>
-          <a:noFill/>
-        </p:spPr>
-        <p:txBody>
-          <a:bodyPr wrap="square" lIns="0" rIns="0" tIns="0" bIns="0" anchor="t">
-            <a:spAutoFit/>
-          </a:bodyPr>
-          <a:lstStyle/>
-          <a:p>
-            <a:pPr algn="r">
-              <a:spcAft>
-                <a:spcPts val="400"/>
-              </a:spcAft>
-            </a:pPr>
-            <a:r>
-              <a:rPr sz="900" b="0" i="0">
-                <a:solidFill>
-                  <a:srgbClr val="A99A7C"/>
-                </a:solidFill>
-                <a:latin typeface="Calibri"/>
-              </a:rPr>
-              <a:t>5 / 5</a:t>
+              <a:t>5 / 5</a:t>
             </a:r>
           </a:p>
         </p:txBody>

--- a/Rehnuma_UBL_Presentation.pptx
+++ b/Rehnuma_UBL_Presentation.pptx
@@ -3928,59 +3928,30 @@
           </a:p>
         </p:txBody>
       </p:sp>
-      <p:sp>
-        <p:nvSpPr>
-          <p:cNvPr id="21" name="Rectangle 20"/>
-          <p:cNvSpPr/>
-          <p:nvPr/>
-        </p:nvSpPr>
-        <p:spPr>
-          <a:xfrm>
-            <a:off x="822960" y="658368"/>
-            <a:ext cx="817839" cy="475488"/>
-          </a:xfrm>
-          <a:prstGeom prst="rect">
-            <a:avLst/>
-          </a:prstGeom>
-          <a:solidFill>
-            <a:srgbClr val="0083CA"/>
-          </a:solidFill>
-          <a:ln>
-            <a:noFill/>
-          </a:ln>
-          <a:effectLst/>
-        </p:spPr>
-        <p:style>
-          <a:lnRef idx="1">
-            <a:schemeClr val="accent1"/>
-          </a:lnRef>
-          <a:fillRef idx="3">
-            <a:schemeClr val="accent1"/>
-          </a:fillRef>
-          <a:effectRef idx="2">
-            <a:schemeClr val="accent1"/>
-          </a:effectRef>
-          <a:fontRef idx="minor">
-            <a:schemeClr val="lt1"/>
-          </a:fontRef>
-        </p:style>
-        <p:txBody>
-          <a:bodyPr rtlCol="0" anchor="ctr" lIns="0" rIns="0" tIns="0" bIns="0"/>
-          <a:lstStyle/>
-          <a:p>
-            <a:pPr algn="ctr"/>
-            <a:r>
-              <a:rPr sz="2080" b="1">
-                <a:solidFill>
-                  <a:srgbClr val="FFFFFF"/>
-                </a:solidFill>
-                <a:latin typeface="Arial"/>
-              </a:rPr>
-              <a:t>UBL</a:t>
-            </a:r>
-          </a:p>
-        </p:txBody>
-      </p:sp>
+      <p:pic>
+        <p:nvPicPr>
+          <p:cNvPr id="21" name="Picture 20" descr="ubl-logo.png"/>
+          <p:cNvPicPr>
+            <a:picLocks noChangeAspect="1"/>
+          </p:cNvPicPr>
+          <p:nvPr/>
+        </p:nvPicPr>
+        <p:blipFill>
+          <a:blip r:embed="rId2"/>
+          <a:stretch>
+            <a:fillRect/>
+          </a:stretch>
+        </p:blipFill>
+        <p:spPr>
+          <a:xfrm>
+            <a:off x="822960" y="603504"/>
+            <a:ext cx="1106424" cy="676656"/>
+          </a:xfrm>
+          <a:prstGeom prst="rect">
+            <a:avLst/>
+          </a:prstGeom>
+        </p:spPr>
+      </p:pic>
       <p:sp>
         <p:nvSpPr>
           <p:cNvPr id="22" name="TextBox 21"/>
@@ -4050,7 +4021,7 @@
             <a:r>
               <a:rPr sz="1900" b="0" i="0">
                 <a:solidFill>
-                  <a:srgbClr val="0083CA"/>
+                  <a:srgbClr val="0070B8"/>
                 </a:solidFill>
                 <a:latin typeface="Calibri"/>
               </a:rPr>
@@ -4175,7 +4146,7 @@
             <a:r>
               <a:rPr sz="950" b="1" i="0">
                 <a:solidFill>
-                  <a:srgbClr val="0083CA"/>
+                  <a:srgbClr val="0070B8"/>
                 </a:solidFill>
                 <a:latin typeface="Calibri"/>
               </a:rPr>
@@ -4290,7 +4261,7 @@
             <a:r>
               <a:rPr sz="950" b="1" i="0">
                 <a:solidFill>
-                  <a:srgbClr val="0083CA"/>
+                  <a:srgbClr val="0070B8"/>
                 </a:solidFill>
                 <a:latin typeface="Calibri"/>
               </a:rPr>
@@ -4405,7 +4376,7 @@
             <a:r>
               <a:rPr sz="950" b="1" i="0">
                 <a:solidFill>
-                  <a:srgbClr val="0083CA"/>
+                  <a:srgbClr val="0070B8"/>
                 </a:solidFill>
                 <a:latin typeface="Calibri"/>
               </a:rPr>
@@ -4616,7 +4587,7 @@
             <a:r>
               <a:rPr sz="1050" b="1" i="0">
                 <a:solidFill>
-                  <a:srgbClr val="0083CA"/>
+                  <a:srgbClr val="0070B8"/>
                 </a:solidFill>
                 <a:latin typeface="Calibri"/>
               </a:rPr>
@@ -4780,7 +4751,7 @@
             <a:r>
               <a:rPr sz="950" b="1" i="0">
                 <a:solidFill>
-                  <a:srgbClr val="0083CA"/>
+                  <a:srgbClr val="0070B8"/>
                 </a:solidFill>
                 <a:latin typeface="Calibri"/>
               </a:rPr>
@@ -5273,7 +5244,7 @@
             <a:r>
               <a:rPr sz="1050" b="1" i="0">
                 <a:solidFill>
-                  <a:srgbClr val="0083CA"/>
+                  <a:srgbClr val="0070B8"/>
                 </a:solidFill>
                 <a:latin typeface="Calibri"/>
               </a:rPr>
@@ -5393,7 +5364,7 @@
             <a:r>
               <a:rPr sz="1300" b="1" i="0">
                 <a:solidFill>
-                  <a:srgbClr val="0083CA"/>
+                  <a:srgbClr val="0070B8"/>
                 </a:solidFill>
                 <a:latin typeface="Calibri"/>
               </a:rPr>
@@ -5417,7 +5388,7 @@
             <a:avLst/>
           </a:prstGeom>
           <a:solidFill>
-            <a:srgbClr val="0083CA"/>
+            <a:srgbClr val="0070B8"/>
           </a:solidFill>
           <a:ln>
             <a:noFill/>
@@ -5508,7 +5479,7 @@
             <a:r>
               <a:rPr sz="1000" b="0" i="0">
                 <a:solidFill>
-                  <a:srgbClr val="2199E8"/>
+                  <a:srgbClr val="50A0D0"/>
                 </a:solidFill>
                 <a:latin typeface="Calibri"/>
               </a:rPr>
@@ -5547,7 +5518,7 @@
             <a:r>
               <a:rPr sz="1300" b="1" i="0">
                 <a:solidFill>
-                  <a:srgbClr val="0083CA"/>
+                  <a:srgbClr val="0070B8"/>
                 </a:solidFill>
                 <a:latin typeface="Calibri"/>
               </a:rPr>
@@ -5662,7 +5633,7 @@
             <a:r>
               <a:rPr sz="1000" b="0" i="0">
                 <a:solidFill>
-                  <a:srgbClr val="2199E8"/>
+                  <a:srgbClr val="50A0D0"/>
                 </a:solidFill>
                 <a:latin typeface="Calibri"/>
               </a:rPr>
@@ -5701,7 +5672,7 @@
             <a:r>
               <a:rPr sz="1300" b="1" i="0">
                 <a:solidFill>
-                  <a:srgbClr val="0083CA"/>
+                  <a:srgbClr val="0070B8"/>
                 </a:solidFill>
                 <a:latin typeface="Calibri"/>
               </a:rPr>
@@ -5816,7 +5787,7 @@
             <a:r>
               <a:rPr sz="1000" b="0" i="0">
                 <a:solidFill>
-                  <a:srgbClr val="2199E8"/>
+                  <a:srgbClr val="50A0D0"/>
                 </a:solidFill>
                 <a:latin typeface="Calibri"/>
               </a:rPr>
@@ -5855,7 +5826,7 @@
             <a:r>
               <a:rPr sz="1300" b="1" i="0">
                 <a:solidFill>
-                  <a:srgbClr val="0083CA"/>
+                  <a:srgbClr val="0070B8"/>
                 </a:solidFill>
                 <a:latin typeface="Calibri"/>
               </a:rPr>
@@ -5970,7 +5941,7 @@
             <a:r>
               <a:rPr sz="1000" b="0" i="0">
                 <a:solidFill>
-                  <a:srgbClr val="2199E8"/>
+                  <a:srgbClr val="50A0D0"/>
                 </a:solidFill>
                 <a:latin typeface="Calibri"/>
               </a:rPr>
@@ -6248,7 +6219,7 @@
             <a:r>
               <a:rPr sz="1050" b="1" i="0">
                 <a:solidFill>
-                  <a:srgbClr val="0083CA"/>
+                  <a:srgbClr val="0070B8"/>
                 </a:solidFill>
                 <a:latin typeface="Calibri"/>
               </a:rPr>
@@ -6412,7 +6383,7 @@
             <a:r>
               <a:rPr sz="950" b="1" i="0">
                 <a:solidFill>
-                  <a:srgbClr val="0083CA"/>
+                  <a:srgbClr val="0070B8"/>
                 </a:solidFill>
                 <a:latin typeface="Calibri"/>
               </a:rPr>
@@ -7013,7 +6984,7 @@
             <a:r>
               <a:rPr sz="1050" b="1" i="0">
                 <a:solidFill>
-                  <a:srgbClr val="0083CA"/>
+                  <a:srgbClr val="0070B8"/>
                 </a:solidFill>
                 <a:latin typeface="Calibri"/>
               </a:rPr>
@@ -7507,7 +7478,7 @@
             <a:r>
               <a:rPr sz="950" b="1" i="0">
                 <a:solidFill>
-                  <a:srgbClr val="0083CA"/>
+                  <a:srgbClr val="0070B8"/>
                 </a:solidFill>
                 <a:latin typeface="Calibri"/>
               </a:rPr>
@@ -7562,7 +7533,7 @@
             <a:r>
               <a:rPr sz="950" b="1" i="0">
                 <a:solidFill>
-                  <a:srgbClr val="0083CA"/>
+                  <a:srgbClr val="0070B8"/>
                 </a:solidFill>
                 <a:latin typeface="Calibri"/>
               </a:rPr>
